--- a/UndertaleBossFight_CodeOverview.pptx
+++ b/UndertaleBossFight_CodeOverview.pptx
@@ -2995,7 +2995,7 @@
                 <a:ea typeface="Calibri" pitchFamily="34" charset="-122"/>
                 <a:cs typeface="Calibri" pitchFamily="34" charset="-120"/>
               </a:rPr>
-              <a:t>110+</a:t>
+              <a:t>120+</a:t>
             </a:r>
             <a:endParaRPr lang="en-US" sz="3000" dirty="0"/>
           </a:p>
@@ -3109,7 +3109,7 @@
                 <a:ea typeface="Calibri" pitchFamily="34" charset="-122"/>
                 <a:cs typeface="Calibri" pitchFamily="34" charset="-120"/>
               </a:rPr>
-              <a:t>~19,200</a:t>
+              <a:t>~19,300</a:t>
             </a:r>
             <a:endParaRPr lang="en-US" sz="3000" dirty="0"/>
           </a:p>
@@ -15547,7 +15547,7 @@
                 <a:ea typeface="Calibri" pitchFamily="34" charset="-122"/>
                 <a:cs typeface="Calibri" pitchFamily="34" charset="-120"/>
               </a:rPr>
-              <a:t>Code-health pass — สะอาด, เขียว, ปรับ 1 จุดของจริง</a:t>
+              <a:t>ฟีเจอร์รอบนี้ + code-health — สะอาด, เขียว, เทสต์ผ่าน 36</a:t>
             </a:r>
             <a:endParaRPr lang="en-US" sz="2800" dirty="0"/>
           </a:p>
@@ -15839,7 +15839,7 @@
                 <a:ea typeface="Courier New" pitchFamily="34" charset="-122"/>
                 <a:cs typeface="Courier New" pitchFamily="34" charset="-120"/>
               </a:rPr>
-              <a:t>⚡ ปรับประสิทธิภาพ: EntityManager</a:t>
+              <a:t>⚡ ฟีเจอร์รอบนี้: หลอดเลือดบอส (อนิเมชัน)</a:t>
             </a:r>
             <a:endParaRPr lang="en-US" sz="1350" dirty="0"/>
           </a:p>
@@ -15885,7 +15885,7 @@
                 <a:ea typeface="Calibri" pitchFamily="34" charset="-122"/>
                 <a:cs typeface="Calibri" pitchFamily="34" charset="-120"/>
               </a:rPr>
-              <a:t>เดิม: ก็อปลิสต์ new ArrayList&lt;&gt;(active) 4 ครั้ง/เฟรม (begin/update/endStep + with) + 1 ใน render</a:t>
+              <a:t>เดิม: เลือดบอสเป็นข้อความ debug บรรทัดเดียวมุมบนซ้าย (ชื่อบอส + ตัวเลข HP)</a:t>
             </a:r>
             <a:endParaRPr lang="en-US" sz="1130" dirty="0"/>
           </a:p>
@@ -15909,7 +15909,7 @@
                 <a:ea typeface="Calibri" pitchFamily="34" charset="-122"/>
                 <a:cs typeface="Calibri" pitchFamily="34" charset="-120"/>
               </a:rPr>
-              <a:t>ใหม่: pass ต่อเฟรมวน active ตรง ๆ — ปลอดภัยเพราะ add/destroy เป็น deferred (active ไม่ถูกแก้ระหว่างเฟรม)</a:t>
+              <a:t>ใหม่: หลอดเลือดสีเขียวมุมบนขวา + เลขเลือดที่เหลือนับถอยหลัง — โดนตีแล้วหลอด ‘ไหล’ ลดลงเป็นอนิเมชัน</a:t>
             </a:r>
             <a:endParaRPr lang="en-US" sz="1130" dirty="0"/>
           </a:p>
@@ -15933,7 +15933,7 @@
                 <a:ea typeface="Calibri" pitchFamily="34" charset="-122"/>
                 <a:cs typeface="Calibri" pitchFamily="34" charset="-120"/>
               </a:rPr>
-              <a:t>render ใช้ buffer reuse (renderOrder) แทนสร้างลิสต์ใหม่</a:t>
+              <a:t>อยู่ใน BattleScene (โค้ดร่วม) ใช้กับบอสทุกตัว — bossHpShown ease 18%/เฟรม เข้าหา monsterhp จริง</a:t>
             </a:r>
             <a:endParaRPr lang="en-US" sz="1130" dirty="0"/>
           </a:p>
@@ -15957,7 +15957,7 @@
                 <a:ea typeface="Calibri" pitchFamily="34" charset="-122"/>
                 <a:cs typeface="Calibri" pitchFamily="34" charset="-120"/>
               </a:rPr>
-              <a:t>ผล: ตัด allocation ~5 ลิสต์/เฟรม, พฤติกรรมเหมือนเดิม 100%</a:t>
+              <a:t>ข้าม Mettaton EX ที่วาดมิเตอร์เอง (hideHpHeader) · HP เพิ่มตอนเปลี่ยนเฟส = snap ทันที</a:t>
             </a:r>
             <a:endParaRPr lang="en-US" sz="1130" dirty="0"/>
           </a:p>
@@ -16071,7 +16071,7 @@
                 <a:ea typeface="Calibri" pitchFamily="34" charset="-122"/>
                 <a:cs typeface="Calibri" pitchFamily="34" charset="-120"/>
               </a:rPr>
-              <a:t>ยืนยันก่อน-หลังแก้: เทสต์ผ่านเท่าเดิม (36) — การปรับ EntityManager เป็น behavior-preserving</a:t>
+              <a:t>ยืนยันก่อน-หลังแก้: เทสต์ผ่านเท่าเดิม (36) — ฟีเจอร์เพิ่มเข้ามาโดยไม่กระทบตรรกะเดิม</a:t>
             </a:r>
             <a:endParaRPr lang="en-US" sz="1300" dirty="0"/>
           </a:p>
@@ -16110,7 +16110,7 @@
                 <a:ea typeface="Calibri" pitchFamily="34" charset="-122"/>
                 <a:cs typeface="Calibri" pitchFamily="34" charset="-120"/>
               </a:rPr>
-              <a:t>เหตุผลที่ไม่รื้อคอมเมนต์ทั้ง 19k บรรทัด: โค้ดมี javadoc/คอมเมนต์ละเอียดครบอยู่แล้ว — การ re-comment ยกชุดคือ churn ที่เพิ่มความเสี่ยงโดยไม่ได้คุณค่า จึงเพิ่มคอมเมนต์เฉพาะจุดที่แก้จริง (EntityManager invariant)</a:t>
+              <a:t>เหตุผลที่ไม่รื้อคอมเมนต์ทั้ง 19k บรรทัด: โค้ดมี javadoc/คอมเมนต์ละเอียดครบอยู่แล้ว — การ re-comment ยกชุดคือ churn ที่เพิ่มความเสี่ยงโดยไม่ได้คุณค่า จึงเพิ่มคอมเมนต์เฉพาะจุดที่แก้จริง (หลอดเลือดบอสใน BattleScene)</a:t>
             </a:r>
             <a:endParaRPr lang="en-US" sz="1200" dirty="0"/>
           </a:p>

--- a/UndertaleBossFight_CodeOverview.pptx
+++ b/UndertaleBossFight_CodeOverview.pptx
@@ -16,6 +16,7 @@
     <p:sldId id="264" r:id="rId10"/>
     <p:sldId id="265" r:id="rId11"/>
     <p:sldId id="266" r:id="rId12"/>
+    <p:sldId id="276" r:id="rId27"/>
     <p:sldId id="267" r:id="rId13"/>
     <p:sldId id="268" r:id="rId14"/>
     <p:sldId id="269" r:id="rId15"/>
@@ -3109,7 +3110,7 @@
                 <a:ea typeface="Calibri" pitchFamily="34" charset="-122"/>
                 <a:cs typeface="Calibri" pitchFamily="34" charset="-120"/>
               </a:rPr>
-              <a:t>~19,300</a:t>
+              <a:t>~20,400</a:t>
             </a:r>
             <a:endParaRPr lang="en-US" sz="3000" dirty="0"/>
           </a:p>
@@ -3337,7 +3338,7 @@
                 <a:ea typeface="Calibri" pitchFamily="34" charset="-122"/>
                 <a:cs typeface="Calibri" pitchFamily="34" charset="-120"/>
               </a:rPr>
-              <a:t>7</a:t>
+              <a:t>8</a:t>
             </a:r>
             <a:endParaRPr lang="en-US" sz="3000" dirty="0"/>
           </a:p>
@@ -3451,7 +3452,7 @@
                 <a:ea typeface="Calibri" pitchFamily="34" charset="-122"/>
                 <a:cs typeface="Calibri" pitchFamily="34" charset="-120"/>
               </a:rPr>
-              <a:t>36 ✓</a:t>
+              <a:t>44 ✓</a:t>
             </a:r>
             <a:endParaRPr lang="en-US" sz="3000" dirty="0"/>
           </a:p>
@@ -3529,7 +3530,7 @@
                 <a:ea typeface="Calibri" pitchFamily="34" charset="-122"/>
                 <a:cs typeface="Calibri" pitchFamily="34" charset="-120"/>
               </a:rPr>
-              <a:t>เป้าหมาย: พอร์ตฉากต่อสู้บอส Undertale (GML) → เกม Java ยืนเดี่ยว เลือกสู้บอสได้ทันที · build เขียว 36 เทสต์ผ่าน · โค้ดมี javadoc ครบทุกคลาส</a:t>
+              <a:t>เป้าหมาย: พอร์ตฉากต่อสู้บอส Undertale (GML) → เกม Java ยืนเดี่ยว เลือกสู้บอสได้ทันที · build เขียว 44 เทสต์ผ่าน · โค้ดมี javadoc ครบทุกคลาส</a:t>
             </a:r>
             <a:endParaRPr lang="en-US" sz="1300" dirty="0"/>
           </a:p>
@@ -5287,7 +5288,7 @@
                 <a:ea typeface="Calibri" pitchFamily="34" charset="-122"/>
                 <a:cs typeface="Calibri" pitchFamily="34" charset="-120"/>
               </a:rPr>
-              <a:t>5=NEO 6=EX 7=Muffet</a:t>
+              <a:t>5=NEO 6=EX 7=Muffet 8=Toriel</a:t>
             </a:r>
             <a:endParaRPr lang="en-US" sz="1100" dirty="0"/>
           </a:p>
@@ -5475,7 +5476,7 @@
                 <a:ea typeface="Courier New" pitchFamily="34" charset="-122"/>
                 <a:cs typeface="Courier New" pitchFamily="34" charset="-120"/>
               </a:rPr>
-              <a:t>เจาะลึกบอส 1/4 — บอสแรก</a:t>
+              <a:t>เจาะลึกบอส 2/5 — หัวใจสีฟ้า</a:t>
             </a:r>
             <a:endParaRPr lang="en-US" sz="1200" dirty="0"/>
           </a:p>
@@ -6310,7 +6311,7 @@
                 <a:ea typeface="Courier New" pitchFamily="34" charset="-122"/>
                 <a:cs typeface="Courier New" pitchFamily="34" charset="-120"/>
               </a:rPr>
-              <a:t>เจาะลึกบอส 2/4 — ยากที่สุด</a:t>
+              <a:t>เจาะลึกบอส 3/5 — ยากที่สุด</a:t>
             </a:r>
             <a:endParaRPr lang="en-US" sz="1200" dirty="0"/>
           </a:p>
@@ -7221,7 +7222,7 @@
                 <a:ea typeface="Courier New" pitchFamily="34" charset="-122"/>
                 <a:cs typeface="Courier New" pitchFamily="34" charset="-120"/>
               </a:rPr>
-              <a:t>เจาะลึกบอส 3/4</a:t>
+              <a:t>เจาะลึกบอส 4/5</a:t>
             </a:r>
             <a:endParaRPr lang="en-US" sz="1200" dirty="0"/>
           </a:p>
@@ -7917,7 +7918,7 @@
                 <a:ea typeface="Courier New" pitchFamily="34" charset="-122"/>
                 <a:cs typeface="Courier New" pitchFamily="34" charset="-120"/>
               </a:rPr>
-              <a:t>เจาะลึกบอส 4/4</a:t>
+              <a:t>เจาะลึกบอส 5/5</a:t>
             </a:r>
             <a:endParaRPr lang="en-US" sz="1200" dirty="0"/>
           </a:p>
@@ -9150,7 +9151,7 @@
         <p:spPr>
           <a:xfrm>
             <a:off x="4389120" y="1554480"/>
-            <a:ext cx="7242048" cy="722376"/>
+            <a:ext cx="7242048" cy="660000"/>
           </a:xfrm>
           <a:prstGeom prst="roundRect">
             <a:avLst>
@@ -9257,7 +9258,7 @@
         <p:spPr>
           <a:xfrm>
             <a:off x="5989320" y="1554480"/>
-            <a:ext cx="5486400" cy="722376"/>
+            <a:ext cx="5486400" cy="660000"/>
           </a:xfrm>
           <a:prstGeom prst="rect">
             <a:avLst/>
@@ -9298,8 +9299,8 @@
         </p:nvSpPr>
         <p:spPr>
           <a:xfrm>
-            <a:off x="4389120" y="2340864"/>
-            <a:ext cx="7242048" cy="722376"/>
+            <a:off x="4389120" y="2244480"/>
+            <a:ext cx="7242048" cy="660000"/>
           </a:xfrm>
           <a:prstGeom prst="roundRect">
             <a:avLst>
@@ -9327,7 +9328,7 @@
         </p:nvSpPr>
         <p:spPr>
           <a:xfrm>
-            <a:off x="4526280" y="2423160"/>
+            <a:off x="4526280" y="2326776"/>
             <a:ext cx="1417320" cy="274320"/>
           </a:xfrm>
           <a:prstGeom prst="rect">
@@ -9366,7 +9367,7 @@
         </p:nvSpPr>
         <p:spPr>
           <a:xfrm>
-            <a:off x="4526280" y="2724912"/>
+            <a:off x="4526280" y="2628528"/>
             <a:ext cx="1463040" cy="274320"/>
           </a:xfrm>
           <a:prstGeom prst="rect">
@@ -9405,8 +9406,8 @@
         </p:nvSpPr>
         <p:spPr>
           <a:xfrm>
-            <a:off x="5989320" y="2340864"/>
-            <a:ext cx="5486400" cy="722376"/>
+            <a:off x="5989320" y="2244480"/>
+            <a:ext cx="5486400" cy="660000"/>
           </a:xfrm>
           <a:prstGeom prst="rect">
             <a:avLst/>
@@ -9447,8 +9448,8 @@
         </p:nvSpPr>
         <p:spPr>
           <a:xfrm>
-            <a:off x="4389120" y="3127248"/>
-            <a:ext cx="7242048" cy="722376"/>
+            <a:off x="4389120" y="2934480"/>
+            <a:ext cx="7242048" cy="660000"/>
           </a:xfrm>
           <a:prstGeom prst="roundRect">
             <a:avLst>
@@ -9476,7 +9477,7 @@
         </p:nvSpPr>
         <p:spPr>
           <a:xfrm>
-            <a:off x="4526280" y="3209544"/>
+            <a:off x="4526280" y="3016776"/>
             <a:ext cx="1417320" cy="274320"/>
           </a:xfrm>
           <a:prstGeom prst="rect">
@@ -9515,7 +9516,7 @@
         </p:nvSpPr>
         <p:spPr>
           <a:xfrm>
-            <a:off x="4526280" y="3511296"/>
+            <a:off x="4526280" y="3318528"/>
             <a:ext cx="1463040" cy="274320"/>
           </a:xfrm>
           <a:prstGeom prst="rect">
@@ -9554,8 +9555,8 @@
         </p:nvSpPr>
         <p:spPr>
           <a:xfrm>
-            <a:off x="5989320" y="3127248"/>
-            <a:ext cx="5486400" cy="722376"/>
+            <a:off x="5989320" y="2934480"/>
+            <a:ext cx="5486400" cy="660000"/>
           </a:xfrm>
           <a:prstGeom prst="rect">
             <a:avLst/>
@@ -9596,8 +9597,8 @@
         </p:nvSpPr>
         <p:spPr>
           <a:xfrm>
-            <a:off x="4389120" y="3913632"/>
-            <a:ext cx="7242048" cy="722376"/>
+            <a:off x="4389120" y="3624480"/>
+            <a:ext cx="7242048" cy="660000"/>
           </a:xfrm>
           <a:prstGeom prst="roundRect">
             <a:avLst>
@@ -9625,7 +9626,7 @@
         </p:nvSpPr>
         <p:spPr>
           <a:xfrm>
-            <a:off x="4526280" y="3995928"/>
+            <a:off x="4526280" y="3706776"/>
             <a:ext cx="1417320" cy="274320"/>
           </a:xfrm>
           <a:prstGeom prst="rect">
@@ -9664,7 +9665,7 @@
         </p:nvSpPr>
         <p:spPr>
           <a:xfrm>
-            <a:off x="4526280" y="4297680"/>
+            <a:off x="4526280" y="4008528"/>
             <a:ext cx="1463040" cy="274320"/>
           </a:xfrm>
           <a:prstGeom prst="rect">
@@ -9703,8 +9704,8 @@
         </p:nvSpPr>
         <p:spPr>
           <a:xfrm>
-            <a:off x="5989320" y="3913632"/>
-            <a:ext cx="5486400" cy="722376"/>
+            <a:off x="5989320" y="3624480"/>
+            <a:ext cx="5486400" cy="660000"/>
           </a:xfrm>
           <a:prstGeom prst="rect">
             <a:avLst/>
@@ -9745,8 +9746,8 @@
         </p:nvSpPr>
         <p:spPr>
           <a:xfrm>
-            <a:off x="4389120" y="4700016"/>
-            <a:ext cx="7242048" cy="722376"/>
+            <a:off x="4389120" y="4314480"/>
+            <a:ext cx="7242048" cy="660000"/>
           </a:xfrm>
           <a:prstGeom prst="roundRect">
             <a:avLst>
@@ -9774,7 +9775,7 @@
         </p:nvSpPr>
         <p:spPr>
           <a:xfrm>
-            <a:off x="4526280" y="4782312"/>
+            <a:off x="4526280" y="4396776"/>
             <a:ext cx="1417320" cy="274320"/>
           </a:xfrm>
           <a:prstGeom prst="rect">
@@ -9813,7 +9814,7 @@
         </p:nvSpPr>
         <p:spPr>
           <a:xfrm>
-            <a:off x="4526280" y="5084064"/>
+            <a:off x="4526280" y="4698528"/>
             <a:ext cx="1463040" cy="274320"/>
           </a:xfrm>
           <a:prstGeom prst="rect">
@@ -9852,8 +9853,8 @@
         </p:nvSpPr>
         <p:spPr>
           <a:xfrm>
-            <a:off x="5989320" y="4700016"/>
-            <a:ext cx="5486400" cy="722376"/>
+            <a:off x="5989320" y="4314480"/>
+            <a:ext cx="5486400" cy="660000"/>
           </a:xfrm>
           <a:prstGeom prst="rect">
             <a:avLst/>
@@ -9894,8 +9895,8 @@
         </p:nvSpPr>
         <p:spPr>
           <a:xfrm>
-            <a:off x="4389120" y="5486400"/>
-            <a:ext cx="7242048" cy="722376"/>
+            <a:off x="4389120" y="5004480"/>
+            <a:ext cx="7242048" cy="660000"/>
           </a:xfrm>
           <a:prstGeom prst="roundRect">
             <a:avLst>
@@ -9923,7 +9924,7 @@
         </p:nvSpPr>
         <p:spPr>
           <a:xfrm>
-            <a:off x="4526280" y="5568696"/>
+            <a:off x="4526280" y="5086776"/>
             <a:ext cx="1417320" cy="274320"/>
           </a:xfrm>
           <a:prstGeom prst="rect">
@@ -9962,7 +9963,7 @@
         </p:nvSpPr>
         <p:spPr>
           <a:xfrm>
-            <a:off x="4526280" y="5870448"/>
+            <a:off x="4526280" y="5388528"/>
             <a:ext cx="1463040" cy="274320"/>
           </a:xfrm>
           <a:prstGeom prst="rect">
@@ -10001,8 +10002,8 @@
         </p:nvSpPr>
         <p:spPr>
           <a:xfrm>
-            <a:off x="5989320" y="5486400"/>
-            <a:ext cx="5486400" cy="722376"/>
+            <a:off x="5989320" y="5004480"/>
+            <a:ext cx="5486400" cy="660000"/>
           </a:xfrm>
           <a:prstGeom prst="rect">
             <a:avLst/>
@@ -10071,6 +10072,155 @@
               <a:t>หลักการ: generator เป็น Entity เหมือนกระสุน → อยู่ใน instance list เดียวกัน, สแปวน์/ทำลายผ่าน EntityManager เหมือนกันหมด</a:t>
             </a:r>
             <a:endParaRPr lang="en-US" sz="1150" dirty="0"/>
+          </a:p>
+        </p:txBody>
+      </p:sp>
+      <p:sp>
+        <p:nvSpPr>
+          <p:cNvPr id="32" name="Shape 25"/>
+          <p:cNvSpPr/>
+          <p:nvPr/>
+        </p:nvSpPr>
+        <p:spPr>
+          <a:xfrm>
+            <a:off x="4389120" y="5694480"/>
+            <a:ext cx="7242048" cy="660000"/>
+          </a:xfrm>
+          <a:prstGeom prst="roundRect">
+            <a:avLst>
+              <a:gd name="adj" fmla="val 6329"/>
+            </a:avLst>
+          </a:prstGeom>
+          <a:solidFill>
+            <a:srgbClr val="16181D"/>
+          </a:solidFill>
+          <a:ln w="12700">
+            <a:solidFill>
+              <a:srgbClr val="C77DFF">
+                <a:alpha val="55000"/>
+              </a:srgbClr>
+            </a:solidFill>
+            <a:prstDash val="solid"/>
+          </a:ln>
+        </p:spPr>
+      </p:sp>
+      <p:sp>
+        <p:nvSpPr>
+          <p:cNvPr id="33" name="Text 26"/>
+          <p:cNvSpPr/>
+          <p:nvPr/>
+        </p:nvSpPr>
+        <p:spPr>
+          <a:xfrm>
+            <a:off x="4526280" y="5776776"/>
+            <a:ext cx="1417320" cy="274320"/>
+          </a:xfrm>
+          <a:prstGeom prst="rect">
+            <a:avLst/>
+          </a:prstGeom>
+          <a:noFill/>
+          <a:ln/>
+        </p:spPr>
+        <p:txBody>
+          <a:bodyPr wrap="square" lIns="0" tIns="0" rIns="0" bIns="0" rtlCol="0" anchor="ctr"/>
+          <a:lstStyle/>
+          <a:p>
+            <a:pPr indent="0" marL="0">
+              <a:buNone/>
+            </a:pPr>
+            <a:r>
+              <a:rPr lang="en-US" sz="1300" b="1" dirty="0">
+                <a:solidFill>
+                  <a:srgbClr val="C77DFF"/>
+                </a:solidFill>
+                <a:latin typeface="Courier New" pitchFamily="34" charset="0"/>
+                <a:ea typeface="Courier New" pitchFamily="34" charset="-122"/>
+                <a:cs typeface="Courier New" pitchFamily="34" charset="-120"/>
+              </a:rPr>
+              <a:t>toriel/</a:t>
+            </a:r>
+            <a:endParaRPr lang="en-US" sz="1300" dirty="0"/>
+          </a:p>
+        </p:txBody>
+      </p:sp>
+      <p:sp>
+        <p:nvSpPr>
+          <p:cNvPr id="34" name="Text 27"/>
+          <p:cNvSpPr/>
+          <p:nvPr/>
+        </p:nvSpPr>
+        <p:spPr>
+          <a:xfrm>
+            <a:off x="4526280" y="6078528"/>
+            <a:ext cx="1463040" cy="274320"/>
+          </a:xfrm>
+          <a:prstGeom prst="rect">
+            <a:avLst/>
+          </a:prstGeom>
+          <a:noFill/>
+          <a:ln/>
+        </p:spPr>
+        <p:txBody>
+          <a:bodyPr wrap="square" lIns="0" tIns="0" rIns="0" bIns="0" rtlCol="0" anchor="ctr"/>
+          <a:lstStyle/>
+          <a:p>
+            <a:pPr indent="0" marL="0">
+              <a:buNone/>
+            </a:pPr>
+            <a:r>
+              <a:rPr lang="en-US" sz="950" dirty="0">
+                <a:solidFill>
+                  <a:srgbClr val="FFD43B"/>
+                </a:solidFill>
+                <a:latin typeface="Calibri" pitchFamily="34" charset="0"/>
+                <a:ea typeface="Calibri" pitchFamily="34" charset="-122"/>
+                <a:cs typeface="Calibri" pitchFamily="34" charset="-120"/>
+              </a:rPr>
+              <a:t>Toriel</a:t>
+            </a:r>
+            <a:endParaRPr lang="en-US" sz="950" dirty="0"/>
+          </a:p>
+        </p:txBody>
+      </p:sp>
+      <p:sp>
+        <p:nvSpPr>
+          <p:cNvPr id="35" name="Text 28"/>
+          <p:cNvSpPr/>
+          <p:nvPr/>
+        </p:nvSpPr>
+        <p:spPr>
+          <a:xfrm>
+            <a:off x="5989320" y="5694480"/>
+            <a:ext cx="5486400" cy="660000"/>
+          </a:xfrm>
+          <a:prstGeom prst="rect">
+            <a:avLst/>
+          </a:prstGeom>
+          <a:noFill/>
+          <a:ln/>
+        </p:spPr>
+        <p:txBody>
+          <a:bodyPr wrap="square" lIns="0" tIns="0" rIns="0" bIns="0" rtlCol="0" anchor="ctr"/>
+          <a:lstStyle/>
+          <a:p>
+            <a:pPr indent="0" marL="0">
+              <a:lnSpc>
+                <a:spcPct val="95000"/>
+              </a:lnSpc>
+              <a:buNone/>
+            </a:pPr>
+            <a:r>
+              <a:rPr lang="en-US" sz="1050" dirty="0">
+                <a:solidFill>
+                  <a:srgbClr val="FFFFFF"/>
+                </a:solidFill>
+                <a:latin typeface="Calibri" pitchFamily="34" charset="0"/>
+                <a:ea typeface="Calibri" pitchFamily="34" charset="-122"/>
+                <a:cs typeface="Calibri" pitchFamily="34" charset="-120"/>
+              </a:rPr>
+              <a:t>FireHelix(+Gen) · MiniHelix · ChaseFire · HandBullet</a:t>
+            </a:r>
+            <a:endParaRPr lang="en-US" sz="1050" dirty="0"/>
           </a:p>
         </p:txBody>
       </p:sp>
@@ -15216,7 +15366,7 @@
                 <a:ea typeface="Calibri" pitchFamily="34" charset="-122"/>
                 <a:cs typeface="Calibri" pitchFamily="34" charset="-120"/>
               </a:rPr>
-              <a:t>AttackPattern → Bullet / Generator → ตระกูลกระสุนของแต่ละบอส: bones · gaster · undyne · asgore · mettaton · muffet</a:t>
+              <a:t>AttackPattern → Bullet / Generator → ตระกูลกระสุนของแต่ละบอส: bones · gaster · undyne · asgore · mettaton · muffet · toriel</a:t>
             </a:r>
             <a:endParaRPr lang="en-US" sz="1150" dirty="0"/>
           </a:p>
@@ -15359,7 +15509,7 @@
                 <a:ea typeface="Calibri" pitchFamily="34" charset="-122"/>
                 <a:cs typeface="Calibri" pitchFamily="34" charset="-120"/>
               </a:rPr>
-              <a:t>~20 ไฟล์ · ตัวบอส 7 ตัว</a:t>
+              <a:t>~20 ไฟล์ · ตัวบอส 8 ตัว</a:t>
             </a:r>
             <a:endParaRPr lang="en-US" sz="1450" dirty="0"/>
           </a:p>
@@ -15398,7 +15548,7 @@
                 <a:ea typeface="Calibri" pitchFamily="34" charset="-122"/>
                 <a:cs typeface="Calibri" pitchFamily="34" charset="-120"/>
               </a:rPr>
-              <a:t>Boss/BossBody (controller+body) · Monster · BossRegistry · Papyrus · Sans · Undyne · Asgore · Mettaton EX/NEO · Muffet</a:t>
+              <a:t>Boss/BossBody (controller+body) · Monster · BossRegistry · Papyrus · Sans · Undyne · Asgore · Mettaton EX/NEO · Muffet · Toriel</a:t>
             </a:r>
             <a:endParaRPr lang="en-US" sz="1150" dirty="0"/>
           </a:p>
@@ -15547,7 +15697,7 @@
                 <a:ea typeface="Calibri" pitchFamily="34" charset="-122"/>
                 <a:cs typeface="Calibri" pitchFamily="34" charset="-120"/>
               </a:rPr>
-              <a:t>ฟีเจอร์รอบนี้ + code-health — สะอาด, เขียว, เทสต์ผ่าน 36</a:t>
+              <a:t>ฟีเจอร์รอบนี้ + code-health — สะอาด, เขียว, เทสต์ผ่าน 44</a:t>
             </a:r>
             <a:endParaRPr lang="en-US" sz="2800" dirty="0"/>
           </a:p>
@@ -15839,7 +15989,7 @@
                 <a:ea typeface="Courier New" pitchFamily="34" charset="-122"/>
                 <a:cs typeface="Courier New" pitchFamily="34" charset="-120"/>
               </a:rPr>
-              <a:t>⚡ ฟีเจอร์รอบนี้: หลอดเลือดบอส (อนิเมชัน)</a:t>
+              <a:t>⚡ ฟีเจอร์รอบนี้: เพิ่มบอส TORIEL — บอสตัวแรก</a:t>
             </a:r>
             <a:endParaRPr lang="en-US" sz="1350" dirty="0"/>
           </a:p>
@@ -15885,7 +16035,7 @@
                 <a:ea typeface="Calibri" pitchFamily="34" charset="-122"/>
                 <a:cs typeface="Calibri" pitchFamily="34" charset="-120"/>
               </a:rPr>
-              <a:t>เดิม: เลือดบอสเป็นข้อความ debug บรรทัดเดียวมุมบนซ้าย (ชื่อบอส + ตัวเลข HP)</a:t>
+              <a:t>ไฟล์ใหม่ boss/TorielBoss + TorielBody + bullet/toriel (FireHelix · MiniHelix · ChaseFire · HandBullet) — ไม่แตะ Core, เพิ่มแค่ 1 บรรทัดใน BossRegistry</a:t>
             </a:r>
             <a:endParaRPr lang="en-US" sz="1130" dirty="0"/>
           </a:p>
@@ -15909,7 +16059,7 @@
                 <a:ea typeface="Calibri" pitchFamily="34" charset="-122"/>
                 <a:cs typeface="Calibri" pitchFamily="34" charset="-120"/>
               </a:rPr>
-              <a:t>ใหม่: หลอดเลือดสีเขียวมุมบนขวา + เลขเลือดที่เหลือนับถอยหลัง — โดนตีแล้วหลอด ‘ไหล’ ลดลงเป็นอนิเมชัน</a:t>
+              <a:t>5 ท่าสุ่มจาก mycommand: เสาไฟ helix (กล่องสูง) + มือกวาดไฟตามเป้า (กล่องกว้าง); ตัด Faltering และ softening ตอนเลือดต่ำออก</a:t>
             </a:r>
             <a:endParaRPr lang="en-US" sz="1130" dirty="0"/>
           </a:p>
@@ -15933,7 +16083,7 @@
                 <a:ea typeface="Calibri" pitchFamily="34" charset="-122"/>
                 <a:cs typeface="Calibri" pitchFamily="34" charset="-120"/>
               </a:rPr>
-              <a:t>อยู่ใน BattleScene (โค้ดร่วม) ใช้กับบอสทุกตัว — bossHpShown ease 18%/เฟรม เข้าหา monsterhp จริง</a:t>
+              <a:t>จบได้ 2 ทาง: ปฏิเสธจะสู้ (สาย conversation = ไว้ชีวิต) และกับดัก DEF ร่วงที่ HP ≤ 150 (ฆ่า) แต่ละทางมีบทพูดของตัวเอง</a:t>
             </a:r>
             <a:endParaRPr lang="en-US" sz="1130" dirty="0"/>
           </a:p>
@@ -15957,7 +16107,7 @@
                 <a:ea typeface="Calibri" pitchFamily="34" charset="-122"/>
                 <a:cs typeface="Calibri" pitchFamily="34" charset="-120"/>
               </a:rPr>
-              <a:t>ข้าม Mettaton EX ที่วาดมิเตอร์เอง (hideHpHeader) · HP เพิ่มตอนเปลี่ยนเฟส = snap ทันที</a:t>
+              <a:t>เพิ่มเทสต์ TorielBossTest 9 เคส (สเตตัส · ทุกท่า · ไว้ชีวิต · ฆ่า · genocide · render) — รวมเป็น 44 เทสต์เขียว</a:t>
             </a:r>
             <a:endParaRPr lang="en-US" sz="1130" dirty="0"/>
           </a:p>
@@ -16032,7 +16182,7 @@
                 <a:ea typeface="Courier New" pitchFamily="34" charset="-122"/>
                 <a:cs typeface="Courier New" pitchFamily="34" charset="-120"/>
               </a:rPr>
-              <a:t>BUILD SUCCESSFUL   ·   TESTS: 36 run, 0 failed, 0 errored, 0 skipped   ·   RESULT: PASS</a:t>
+              <a:t>BUILD SUCCESSFUL   ·   TESTS: 44 run, 0 failed, 0 errored, 0 skipped   ·   RESULT: PASS</a:t>
             </a:r>
             <a:endParaRPr lang="en-US" sz="1700" dirty="0"/>
           </a:p>
@@ -16071,7 +16221,7 @@
                 <a:ea typeface="Calibri" pitchFamily="34" charset="-122"/>
                 <a:cs typeface="Calibri" pitchFamily="34" charset="-120"/>
               </a:rPr>
-              <a:t>ยืนยันก่อน-หลังแก้: เทสต์ผ่านเท่าเดิม (36) — ฟีเจอร์เพิ่มเข้ามาโดยไม่กระทบตรรกะเดิม</a:t>
+              <a:t>ยืนยันก่อน-หลังแก้: 36 → 44 เทสต์ผ่าน — บอสใหม่เสียบผ่าน registry ไม่แตะ Core</a:t>
             </a:r>
             <a:endParaRPr lang="en-US" sz="1300" dirty="0"/>
           </a:p>
@@ -16110,9 +16260,844 @@
                 <a:ea typeface="Calibri" pitchFamily="34" charset="-122"/>
                 <a:cs typeface="Calibri" pitchFamily="34" charset="-120"/>
               </a:rPr>
-              <a:t>เหตุผลที่ไม่รื้อคอมเมนต์ทั้ง 19k บรรทัด: โค้ดมี javadoc/คอมเมนต์ละเอียดครบอยู่แล้ว — การ re-comment ยกชุดคือ churn ที่เพิ่มความเสี่ยงโดยไม่ได้คุณค่า จึงเพิ่มคอมเมนต์เฉพาะจุดที่แก้จริง (หลอดเลือดบอสใน BattleScene)</a:t>
+              <a:t>เหตุผลที่ไม่รื้อคอมเมนต์ทั้ง 20k บรรทัด: โค้ดมี javadoc/คอมเมนต์ละเอียดครบอยู่แล้ว — การ re-comment ยกชุดคือ churn ที่เพิ่มความเสี่ยงโดยไม่ได้คุณค่า จึงเพิ่มคอมเมนต์เฉพาะจุดที่แก้จริง (ไฟล์ Toriel ที่เพิ่มใหม่)</a:t>
             </a:r>
             <a:endParaRPr lang="en-US" sz="1200" dirty="0"/>
+          </a:p>
+        </p:txBody>
+      </p:sp>
+    </p:spTree>
+  </p:cSld>
+  <p:clrMapOvr>
+    <a:masterClrMapping/>
+  </p:clrMapOvr>
+</p:sld>
+</file>
+
+<file path=ppt/slides/slide21.xml><?xml version="1.0" encoding="utf-8"?>
+<p:sld xmlns:a="http://schemas.openxmlformats.org/drawingml/2006/main" xmlns:r="http://schemas.openxmlformats.org/officeDocument/2006/relationships" xmlns:p="http://schemas.openxmlformats.org/presentationml/2006/main">
+  <p:cSld name="Slide 12">
+    <p:bg>
+      <p:bgPr>
+        <a:solidFill>
+          <a:srgbClr val="0A0A0A"/>
+        </a:solidFill>
+      </p:bgPr>
+    </p:bg>
+    <p:spTree>
+      <p:nvGrpSpPr>
+        <p:cNvPr id="1" name=""/>
+        <p:cNvGrpSpPr/>
+        <p:nvPr/>
+      </p:nvGrpSpPr>
+      <p:grpSpPr>
+        <a:xfrm>
+          <a:off x="0" y="0"/>
+          <a:ext cx="0" cy="0"/>
+          <a:chOff x="0" y="0"/>
+          <a:chExt cx="0" cy="0"/>
+        </a:xfrm>
+      </p:grpSpPr>
+      <p:sp>
+        <p:nvSpPr>
+          <p:cNvPr id="2" name="Text 0"/>
+          <p:cNvSpPr/>
+          <p:nvPr/>
+        </p:nvSpPr>
+        <p:spPr>
+          <a:xfrm>
+            <a:off x="548640" y="365760"/>
+            <a:ext cx="10058400" cy="365760"/>
+          </a:xfrm>
+          <a:prstGeom prst="rect">
+            <a:avLst/>
+          </a:prstGeom>
+          <a:noFill/>
+          <a:ln/>
+        </p:spPr>
+        <p:txBody>
+          <a:bodyPr wrap="square" lIns="0" tIns="0" rIns="0" bIns="0" rtlCol="0" anchor="ctr"/>
+          <a:lstStyle/>
+          <a:p>
+            <a:pPr indent="0" marL="0">
+              <a:buNone/>
+            </a:pPr>
+            <a:r>
+              <a:rPr lang="en-US" sz="1200" b="1" spc="300" kern="0" dirty="0">
+                <a:solidFill>
+                  <a:srgbClr val="4DA6FF"/>
+                </a:solidFill>
+                <a:latin typeface="Courier New" pitchFamily="34" charset="0"/>
+                <a:ea typeface="Courier New" pitchFamily="34" charset="-122"/>
+                <a:cs typeface="Courier New" pitchFamily="34" charset="-120"/>
+              </a:rPr>
+              <a:t>เจาะลึกบอส 1/5 — บอสตัวแรก</a:t>
+            </a:r>
+            <a:endParaRPr lang="en-US" sz="1200" dirty="0"/>
+          </a:p>
+        </p:txBody>
+      </p:sp>
+      <p:sp>
+        <p:nvSpPr>
+          <p:cNvPr id="3" name="Text 1"/>
+          <p:cNvSpPr/>
+          <p:nvPr/>
+        </p:nvSpPr>
+        <p:spPr>
+          <a:xfrm>
+            <a:off x="548640" y="658368"/>
+            <a:ext cx="11064240" cy="731520"/>
+          </a:xfrm>
+          <a:prstGeom prst="rect">
+            <a:avLst/>
+          </a:prstGeom>
+          <a:noFill/>
+          <a:ln/>
+        </p:spPr>
+        <p:txBody>
+          <a:bodyPr wrap="square" lIns="0" tIns="0" rIns="0" bIns="0" rtlCol="0" anchor="ctr"/>
+          <a:lstStyle/>
+          <a:p>
+            <a:pPr indent="0" marL="0">
+              <a:buNone/>
+            </a:pPr>
+            <a:r>
+              <a:rPr lang="en-US" sz="2800" b="1" dirty="0">
+                <a:solidFill>
+                  <a:srgbClr val="FFFFFF"/>
+                </a:solidFill>
+                <a:latin typeface="Calibri" pitchFamily="34" charset="0"/>
+                <a:ea typeface="Calibri" pitchFamily="34" charset="-122"/>
+                <a:cs typeface="Calibri" pitchFamily="34" charset="-120"/>
+              </a:rPr>
+              <a:t>Toriel (obj_torielboss) — ไฟกับมือ, มีทางออก 2 ทาง</a:t>
+            </a:r>
+            <a:endParaRPr lang="en-US" sz="2800" dirty="0"/>
+          </a:p>
+        </p:txBody>
+      </p:sp>
+      <p:sp>
+        <p:nvSpPr>
+          <p:cNvPr id="4" name="Text 2"/>
+          <p:cNvSpPr/>
+          <p:nvPr/>
+        </p:nvSpPr>
+        <p:spPr>
+          <a:xfrm>
+            <a:off x="548640" y="1444752"/>
+            <a:ext cx="11064240" cy="594360"/>
+          </a:xfrm>
+          <a:prstGeom prst="rect">
+            <a:avLst/>
+          </a:prstGeom>
+          <a:noFill/>
+          <a:ln/>
+        </p:spPr>
+        <p:txBody>
+          <a:bodyPr wrap="square" lIns="0" tIns="0" rIns="0" bIns="0" rtlCol="0" anchor="ctr"/>
+          <a:lstStyle/>
+          <a:p>
+            <a:pPr indent="0" marL="0">
+              <a:buNone/>
+            </a:pPr>
+            <a:r>
+              <a:rPr lang="en-US" sz="1250" dirty="0">
+                <a:solidFill>
+                  <a:srgbClr val="9AA1AC"/>
+                </a:solidFill>
+                <a:latin typeface="Calibri" pitchFamily="34" charset="0"/>
+                <a:ea typeface="Calibri" pitchFamily="34" charset="-122"/>
+                <a:cs typeface="Calibri" pitchFamily="34" charset="-120"/>
+              </a:rPr>
+              <a:t>HP 440 / ATK 6 / DEF 1 ด่านไฟและมือกวาดยาว ๆ มีทางผ่าน 2 ทาง: ตีจนเลือดต่ำจนกับดัก DEF ทำให้หมัดถัดไปฆ่าได้ หรือปฏิเสธที่จะสู้จนเธอยอมแพ้</a:t>
+            </a:r>
+            <a:endParaRPr lang="en-US" sz="1250" dirty="0"/>
+          </a:p>
+        </p:txBody>
+      </p:sp>
+      <p:sp>
+        <p:nvSpPr>
+          <p:cNvPr id="5" name="Shape 3"/>
+          <p:cNvSpPr/>
+          <p:nvPr/>
+        </p:nvSpPr>
+        <p:spPr>
+          <a:xfrm>
+            <a:off x="548640" y="2148840"/>
+            <a:ext cx="5532120" cy="1874520"/>
+          </a:xfrm>
+          <a:prstGeom prst="roundRect">
+            <a:avLst>
+              <a:gd name="adj" fmla="val 3415"/>
+            </a:avLst>
+          </a:prstGeom>
+          <a:solidFill>
+            <a:srgbClr val="16181D"/>
+          </a:solidFill>
+          <a:ln w="12700">
+            <a:solidFill>
+              <a:srgbClr val="4DA6FF">
+                <a:alpha val="65000"/>
+              </a:srgbClr>
+            </a:solidFill>
+            <a:prstDash val="solid"/>
+          </a:ln>
+          <a:effectLst>
+            <a:outerShdw sx="100000" sy="100000" kx="0" ky="0" algn="bl" rotWithShape="0" blurRad="101600" dist="38100" dir="5400000">
+              <a:srgbClr val="000000">
+                <a:alpha val="50000"/>
+              </a:srgbClr>
+            </a:outerShdw>
+          </a:effectLst>
+        </p:spPr>
+      </p:sp>
+      <p:sp>
+        <p:nvSpPr>
+          <p:cNvPr id="6" name="Text 4"/>
+          <p:cNvSpPr/>
+          <p:nvPr/>
+        </p:nvSpPr>
+        <p:spPr>
+          <a:xfrm>
+            <a:off x="731520" y="2258568"/>
+            <a:ext cx="5166360" cy="329184"/>
+          </a:xfrm>
+          <a:prstGeom prst="rect">
+            <a:avLst/>
+          </a:prstGeom>
+          <a:noFill/>
+          <a:ln/>
+        </p:spPr>
+        <p:txBody>
+          <a:bodyPr wrap="square" lIns="0" tIns="0" rIns="0" bIns="0" rtlCol="0" anchor="ctr"/>
+          <a:lstStyle/>
+          <a:p>
+            <a:pPr indent="0" marL="0">
+              <a:buNone/>
+            </a:pPr>
+            <a:r>
+              <a:rPr lang="en-US" sz="1350" b="1" dirty="0">
+                <a:solidFill>
+                  <a:srgbClr val="4DA6FF"/>
+                </a:solidFill>
+                <a:latin typeface="Courier New" pitchFamily="34" charset="0"/>
+                <a:ea typeface="Courier New" pitchFamily="34" charset="-122"/>
+                <a:cs typeface="Courier New" pitchFamily="34" charset="-120"/>
+              </a:rPr>
+              <a:t>กลไกหลัก</a:t>
+            </a:r>
+            <a:endParaRPr lang="en-US" sz="1350" dirty="0"/>
+          </a:p>
+        </p:txBody>
+      </p:sp>
+      <p:sp>
+        <p:nvSpPr>
+          <p:cNvPr id="7" name="Text 5"/>
+          <p:cNvSpPr/>
+          <p:nvPr/>
+        </p:nvSpPr>
+        <p:spPr>
+          <a:xfrm>
+            <a:off x="731520" y="2651760"/>
+            <a:ext cx="5166360" cy="1271016"/>
+          </a:xfrm>
+          <a:prstGeom prst="rect">
+            <a:avLst/>
+          </a:prstGeom>
+          <a:noFill/>
+          <a:ln/>
+        </p:spPr>
+        <p:txBody>
+          <a:bodyPr wrap="square" lIns="0" tIns="0" rIns="0" bIns="0" rtlCol="0" anchor="t"/>
+          <a:lstStyle/>
+          <a:p>
+            <a:pPr marL="165100" indent="-165100">
+              <a:lnSpc>
+                <a:spcPct val="100000"/>
+              </a:lnSpc>
+              <a:spcAft>
+                <a:spcPts val="400"/>
+              </a:spcAft>
+              <a:buSzPct val="100000"/>
+              <a:buChar char="•"/>
+            </a:pPr>
+            <a:r>
+              <a:rPr lang="en-US" sz="1100" dirty="0">
+                <a:solidFill>
+                  <a:srgbClr val="FFFFFF"/>
+                </a:solidFill>
+                <a:latin typeface="Calibri" pitchFamily="34" charset="0"/>
+                <a:ea typeface="Calibri" pitchFamily="34" charset="-122"/>
+                <a:cs typeface="Calibri" pitchFamily="34" charset="-120"/>
+              </a:rPr>
+              <a:t>หัวใจ RED; ทุกเทิร์นสุ่ม mycommand (0–100) → 1 ใน 5 ท่า</a:t>
+            </a:r>
+            <a:endParaRPr lang="en-US" sz="1100" dirty="0"/>
+          </a:p>
+          <a:p>
+            <a:pPr marL="165100" indent="-165100">
+              <a:lnSpc>
+                <a:spcPct val="100000"/>
+              </a:lnSpc>
+              <a:spcAft>
+                <a:spcPts val="400"/>
+              </a:spcAft>
+              <a:buSzPct val="100000"/>
+              <a:buChar char="•"/>
+            </a:pPr>
+            <a:r>
+              <a:rPr lang="en-US" sz="1100" dirty="0">
+                <a:solidFill>
+                  <a:srgbClr val="FFFFFF"/>
+                </a:solidFill>
+                <a:latin typeface="Calibri" pitchFamily="34" charset="0"/>
+                <a:ea typeface="Calibri" pitchFamily="34" charset="-122"/>
+                <a:cs typeface="Calibri" pitchFamily="34" charset="-120"/>
+              </a:rPr>
+              <a:t>fire helix / mini-helix / helix โปร่ง ในกล่องสูง (border 7); มือกวาด 1–2 ข้างในกล่องเตี้ยกว้าง (border 6)</a:t>
+            </a:r>
+            <a:endParaRPr lang="en-US" sz="1100" dirty="0"/>
+          </a:p>
+          <a:p>
+            <a:pPr marL="165100" indent="-165100">
+              <a:lnSpc>
+                <a:spcPct val="100000"/>
+              </a:lnSpc>
+              <a:spcAft>
+                <a:spcPts val="400"/>
+              </a:spcAft>
+              <a:buSzPct val="100000"/>
+              <a:buChar char="•"/>
+            </a:pPr>
+            <a:r>
+              <a:rPr lang="en-US" sz="1100" dirty="0">
+                <a:solidFill>
+                  <a:srgbClr val="FFFFFF"/>
+                </a:solidFill>
+                <a:latin typeface="Calibri" pitchFamily="34" charset="0"/>
+                <a:ea typeface="Calibri" pitchFamily="34" charset="-122"/>
+                <a:cs typeface="Calibri" pitchFamily="34" charset="-120"/>
+              </a:rPr>
+              <a:t>มือปล่อยไฟตามเป้า (chase-fire) — ภัยหลักเมื่อตัด Faltering ออก; เสาไฟไซน์เลื่อนซ้าย↔ขวา ไม่มีจุดปลอดภัย</a:t>
+            </a:r>
+            <a:endParaRPr lang="en-US" sz="1100" dirty="0"/>
+          </a:p>
+        </p:txBody>
+      </p:sp>
+      <p:sp>
+        <p:nvSpPr>
+          <p:cNvPr id="8" name="Shape 6"/>
+          <p:cNvSpPr/>
+          <p:nvPr/>
+        </p:nvSpPr>
+        <p:spPr>
+          <a:xfrm>
+            <a:off x="548640" y="4114800"/>
+            <a:ext cx="5532120" cy="2057400"/>
+          </a:xfrm>
+          <a:prstGeom prst="roundRect">
+            <a:avLst>
+              <a:gd name="adj" fmla="val 3111"/>
+            </a:avLst>
+          </a:prstGeom>
+          <a:solidFill>
+            <a:srgbClr val="16181D"/>
+          </a:solidFill>
+          <a:ln w="12700">
+            <a:solidFill>
+              <a:srgbClr val="FF922B">
+                <a:alpha val="65000"/>
+              </a:srgbClr>
+            </a:solidFill>
+            <a:prstDash val="solid"/>
+          </a:ln>
+          <a:effectLst>
+            <a:outerShdw sx="100000" sy="100000" kx="0" ky="0" algn="bl" rotWithShape="0" blurRad="101600" dist="38100" dir="5400000">
+              <a:srgbClr val="000000">
+                <a:alpha val="50000"/>
+              </a:srgbClr>
+            </a:outerShdw>
+          </a:effectLst>
+        </p:spPr>
+      </p:sp>
+      <p:sp>
+        <p:nvSpPr>
+          <p:cNvPr id="9" name="Text 7"/>
+          <p:cNvSpPr/>
+          <p:nvPr/>
+        </p:nvSpPr>
+        <p:spPr>
+          <a:xfrm>
+            <a:off x="731520" y="4224528"/>
+            <a:ext cx="5166360" cy="329184"/>
+          </a:xfrm>
+          <a:prstGeom prst="rect">
+            <a:avLst/>
+          </a:prstGeom>
+          <a:noFill/>
+          <a:ln/>
+        </p:spPr>
+        <p:txBody>
+          <a:bodyPr wrap="square" lIns="0" tIns="0" rIns="0" bIns="0" rtlCol="0" anchor="ctr"/>
+          <a:lstStyle/>
+          <a:p>
+            <a:pPr indent="0" marL="0">
+              <a:buNone/>
+            </a:pPr>
+            <a:r>
+              <a:rPr lang="en-US" sz="1350" b="1" dirty="0">
+                <a:solidFill>
+                  <a:srgbClr val="FF922B"/>
+                </a:solidFill>
+                <a:latin typeface="Courier New" pitchFamily="34" charset="0"/>
+                <a:ea typeface="Courier New" pitchFamily="34" charset="-122"/>
+                <a:cs typeface="Courier New" pitchFamily="34" charset="-120"/>
+              </a:rPr>
+              <a:t>ทางออก 2 ทาง</a:t>
+            </a:r>
+            <a:endParaRPr lang="en-US" sz="1350" dirty="0"/>
+          </a:p>
+        </p:txBody>
+      </p:sp>
+      <p:sp>
+        <p:nvSpPr>
+          <p:cNvPr id="10" name="Text 8"/>
+          <p:cNvSpPr/>
+          <p:nvPr/>
+        </p:nvSpPr>
+        <p:spPr>
+          <a:xfrm>
+            <a:off x="731520" y="4617720"/>
+            <a:ext cx="5166360" cy="1453896"/>
+          </a:xfrm>
+          <a:prstGeom prst="rect">
+            <a:avLst/>
+          </a:prstGeom>
+          <a:noFill/>
+          <a:ln/>
+        </p:spPr>
+        <p:txBody>
+          <a:bodyPr wrap="square" lIns="0" tIns="0" rIns="0" bIns="0" rtlCol="0" anchor="t"/>
+          <a:lstStyle/>
+          <a:p>
+            <a:pPr marL="165100" indent="-165100">
+              <a:lnSpc>
+                <a:spcPct val="100000"/>
+              </a:lnSpc>
+              <a:spcAft>
+                <a:spcPts val="400"/>
+              </a:spcAft>
+              <a:buSzPct val="100000"/>
+              <a:buChar char="•"/>
+            </a:pPr>
+            <a:r>
+              <a:rPr lang="en-US" sz="1100" dirty="0">
+                <a:solidFill>
+                  <a:srgbClr val="FFFFFF"/>
+                </a:solidFill>
+                <a:latin typeface="Calibri" pitchFamily="34" charset="0"/>
+                <a:ea typeface="Calibri" pitchFamily="34" charset="-122"/>
+                <a:cs typeface="Calibri" pitchFamily="34" charset="-120"/>
+              </a:rPr>
+              <a:t>ฆ่า: HP ≤ 150 ทำให้ DEF ร่วงเป็น −140 — หมัดถัดไปมักฆ่าได้ (กับดักคลาสสิก) แล้วเล่นบทพูดตอนตาย</a:t>
+            </a:r>
+            <a:endParaRPr lang="en-US" sz="1100" dirty="0"/>
+          </a:p>
+          <a:p>
+            <a:pPr marL="165100" indent="-165100">
+              <a:lnSpc>
+                <a:spcPct val="100000"/>
+              </a:lnSpc>
+              <a:spcAft>
+                <a:spcPts val="400"/>
+              </a:spcAft>
+              <a:buSzPct val="100000"/>
+              <a:buChar char="•"/>
+            </a:pPr>
+            <a:r>
+              <a:rPr lang="en-US" sz="1100" dirty="0">
+                <a:solidFill>
+                  <a:srgbClr val="FFFFFF"/>
+                </a:solidFill>
+                <a:latin typeface="Calibri" pitchFamily="34" charset="0"/>
+                <a:ea typeface="Calibri" pitchFamily="34" charset="-122"/>
+                <a:cs typeface="Calibri" pitchFamily="34" charset="-120"/>
+              </a:rPr>
+              <a:t>ไว้ชีวิต: กดปุ่ม SPARE ไม่ได้ (mercymod −20000); ปฏิเสธจะสู้ ตัวนับ conversation จะไต่บทพูดเร่งเร้า</a:t>
+            </a:r>
+            <a:endParaRPr lang="en-US" sz="1100" dirty="0"/>
+          </a:p>
+          <a:p>
+            <a:pPr marL="165100" indent="-165100">
+              <a:lnSpc>
+                <a:spcPct val="100000"/>
+              </a:lnSpc>
+              <a:spcAft>
+                <a:spcPts val="400"/>
+              </a:spcAft>
+              <a:buSzPct val="100000"/>
+              <a:buChar char="•"/>
+            </a:pPr>
+            <a:r>
+              <a:rPr lang="en-US" sz="1100" dirty="0">
+                <a:solidFill>
+                  <a:srgbClr val="FFFFFF"/>
+                </a:solidFill>
+                <a:latin typeface="Calibri" pitchFamily="34" charset="0"/>
+                <a:ea typeface="Calibri" pitchFamily="34" charset="-122"/>
+                <a:cs typeface="Calibri" pitchFamily="34" charset="-120"/>
+              </a:rPr>
+              <a:t>ที่ conversation 13 เธอหยุดโจมตีและเล่นบทยอมแพ้ → ชนะด้วยความเมตตา</a:t>
+            </a:r>
+            <a:endParaRPr lang="en-US" sz="1100" dirty="0"/>
+          </a:p>
+        </p:txBody>
+      </p:sp>
+      <p:sp>
+        <p:nvSpPr>
+          <p:cNvPr id="11" name="Shape 9"/>
+          <p:cNvSpPr/>
+          <p:nvPr/>
+        </p:nvSpPr>
+        <p:spPr>
+          <a:xfrm>
+            <a:off x="6172200" y="2148840"/>
+            <a:ext cx="5440680" cy="4023360"/>
+          </a:xfrm>
+          <a:prstGeom prst="roundRect">
+            <a:avLst>
+              <a:gd name="adj" fmla="val 1591"/>
+            </a:avLst>
+          </a:prstGeom>
+          <a:solidFill>
+            <a:srgbClr val="16181D"/>
+          </a:solidFill>
+          <a:ln w="12700">
+            <a:solidFill>
+              <a:srgbClr val="5BE584">
+                <a:alpha val="65000"/>
+              </a:srgbClr>
+            </a:solidFill>
+            <a:prstDash val="solid"/>
+          </a:ln>
+          <a:effectLst>
+            <a:outerShdw sx="100000" sy="100000" kx="0" ky="0" algn="bl" rotWithShape="0" blurRad="101600" dist="38100" dir="5400000">
+              <a:srgbClr val="000000">
+                <a:alpha val="50000"/>
+              </a:srgbClr>
+            </a:outerShdw>
+          </a:effectLst>
+        </p:spPr>
+      </p:sp>
+      <p:sp>
+        <p:nvSpPr>
+          <p:cNvPr id="12" name="Text 10"/>
+          <p:cNvSpPr/>
+          <p:nvPr/>
+        </p:nvSpPr>
+        <p:spPr>
+          <a:xfrm>
+            <a:off x="6355080" y="2258568"/>
+            <a:ext cx="5074920" cy="329184"/>
+          </a:xfrm>
+          <a:prstGeom prst="rect">
+            <a:avLst/>
+          </a:prstGeom>
+          <a:noFill/>
+          <a:ln/>
+        </p:spPr>
+        <p:txBody>
+          <a:bodyPr wrap="square" lIns="0" tIns="0" rIns="0" bIns="0" rtlCol="0" anchor="ctr"/>
+          <a:lstStyle/>
+          <a:p>
+            <a:pPr indent="0" marL="0">
+              <a:buNone/>
+            </a:pPr>
+            <a:r>
+              <a:rPr lang="en-US" sz="1350" b="1" dirty="0">
+                <a:solidFill>
+                  <a:srgbClr val="5BE584"/>
+                </a:solidFill>
+                <a:latin typeface="Courier New" pitchFamily="34" charset="0"/>
+                <a:ea typeface="Courier New" pitchFamily="34" charset="-122"/>
+                <a:cs typeface="Courier New" pitchFamily="34" charset="-120"/>
+              </a:rPr>
+              <a:t>เมธอดที่ override / SPI</a:t>
+            </a:r>
+            <a:endParaRPr lang="en-US" sz="1350" dirty="0"/>
+          </a:p>
+        </p:txBody>
+      </p:sp>
+      <p:sp>
+        <p:nvSpPr>
+          <p:cNvPr id="13" name="Text 11"/>
+          <p:cNvSpPr/>
+          <p:nvPr/>
+        </p:nvSpPr>
+        <p:spPr>
+          <a:xfrm>
+            <a:off x="6355080" y="2651760"/>
+            <a:ext cx="5074920" cy="3419856"/>
+          </a:xfrm>
+          <a:prstGeom prst="rect">
+            <a:avLst/>
+          </a:prstGeom>
+          <a:noFill/>
+          <a:ln/>
+        </p:spPr>
+        <p:txBody>
+          <a:bodyPr wrap="square" lIns="0" tIns="0" rIns="0" bIns="0" rtlCol="0" anchor="t"/>
+          <a:lstStyle/>
+          <a:p>
+            <a:pPr marL="165100" indent="-165100">
+              <a:lnSpc>
+                <a:spcPct val="100000"/>
+              </a:lnSpc>
+              <a:spcAft>
+                <a:spcPts val="400"/>
+              </a:spcAft>
+              <a:buSzPct val="100000"/>
+              <a:buChar char="•"/>
+            </a:pPr>
+            <a:r>
+              <a:rPr lang="en-US" sz="1100" dirty="0">
+                <a:solidFill>
+                  <a:srgbClr val="FFFFFF"/>
+                </a:solidFill>
+                <a:latin typeface="Calibri" pitchFamily="34" charset="0"/>
+                <a:ea typeface="Calibri" pitchFamily="34" charset="-122"/>
+                <a:cs typeface="Calibri" pitchFamily="34" charset="-120"/>
+              </a:rPr>
+              <a:t>musicPath() — ธีม Heartache</a:t>
+            </a:r>
+            <a:endParaRPr lang="en-US" sz="1100" dirty="0"/>
+          </a:p>
+          <a:p>
+            <a:pPr marL="165100" indent="-165100">
+              <a:lnSpc>
+                <a:spcPct val="100000"/>
+              </a:lnSpc>
+              <a:spcAft>
+                <a:spcPts val="400"/>
+              </a:spcAft>
+              <a:buSzPct val="100000"/>
+              <a:buChar char="•"/>
+            </a:pPr>
+            <a:r>
+              <a:rPr lang="en-US" sz="1100" dirty="0">
+                <a:solidFill>
+                  <a:srgbClr val="FFFFFF"/>
+                </a:solidFill>
+                <a:latin typeface="Calibri" pitchFamily="34" charset="0"/>
+                <a:ea typeface="Calibri" pitchFamily="34" charset="-122"/>
+                <a:cs typeface="Calibri" pitchFamily="34" charset="-120"/>
+              </a:rPr>
+              <a:t>setup() — HP 440, หัวใจ RED, border 6, mercymod −20000</a:t>
+            </a:r>
+            <a:endParaRPr lang="en-US" sz="1100" dirty="0"/>
+          </a:p>
+          <a:p>
+            <a:pPr marL="165100" indent="-165100">
+              <a:lnSpc>
+                <a:spcPct val="100000"/>
+              </a:lnSpc>
+              <a:spcAft>
+                <a:spcPts val="400"/>
+              </a:spcAft>
+              <a:buSzPct val="100000"/>
+              <a:buChar char="•"/>
+            </a:pPr>
+            <a:r>
+              <a:rPr lang="en-US" sz="1100" dirty="0">
+                <a:solidFill>
+                  <a:srgbClr val="FFFFFF"/>
+                </a:solidFill>
+                <a:latin typeface="Calibri" pitchFamily="34" charset="0"/>
+                <a:ea typeface="Calibri" pitchFamily="34" charset="-122"/>
+                <a:cs typeface="Calibri" pitchFamily="34" charset="-120"/>
+              </a:rPr>
+              <a:t>chooseAttack() — สุ่ม mycommand, เลือกกล่อง + ท่า</a:t>
+            </a:r>
+            <a:endParaRPr lang="en-US" sz="1100" dirty="0"/>
+          </a:p>
+          <a:p>
+            <a:pPr marL="165100" indent="-165100">
+              <a:lnSpc>
+                <a:spcPct val="100000"/>
+              </a:lnSpc>
+              <a:spcAft>
+                <a:spcPts val="400"/>
+              </a:spcAft>
+              <a:buSzPct val="100000"/>
+              <a:buChar char="•"/>
+            </a:pPr>
+            <a:r>
+              <a:rPr lang="en-US" sz="1100" dirty="0">
+                <a:solidFill>
+                  <a:srgbClr val="FFFFFF"/>
+                </a:solidFill>
+                <a:latin typeface="Calibri" pitchFamily="34" charset="0"/>
+                <a:ea typeface="Calibri" pitchFamily="34" charset="-122"/>
+                <a:cs typeface="Calibri" pitchFamily="34" charset="-120"/>
+              </a:rPr>
+              <a:t>onDamaged() — สั่นตอนเจ็บ; HP ≤ 150 → DEF −140</a:t>
+            </a:r>
+            <a:endParaRPr lang="en-US" sz="1100" dirty="0"/>
+          </a:p>
+          <a:p>
+            <a:pPr marL="165100" indent="-165100">
+              <a:lnSpc>
+                <a:spcPct val="100000"/>
+              </a:lnSpc>
+              <a:spcAft>
+                <a:spcPts val="400"/>
+              </a:spcAft>
+              <a:buSzPct val="100000"/>
+              <a:buChar char="•"/>
+            </a:pPr>
+            <a:r>
+              <a:rPr lang="en-US" sz="1100" dirty="0">
+                <a:solidFill>
+                  <a:srgbClr val="FFFFFF"/>
+                </a:solidFill>
+                <a:latin typeface="Calibri" pitchFamily="34" charset="0"/>
+                <a:ea typeface="Calibri" pitchFamily="34" charset="-122"/>
+                <a:cs typeface="Calibri" pitchFamily="34" charset="-120"/>
+              </a:rPr>
+              <a:t>onAct() — Check / Talk (flavor; ใช้เทิร์นทั้งคู่)</a:t>
+            </a:r>
+            <a:endParaRPr lang="en-US" sz="1100" dirty="0"/>
+          </a:p>
+          <a:p>
+            <a:pPr marL="165100" indent="-165100">
+              <a:lnSpc>
+                <a:spcPct val="100000"/>
+              </a:lnSpc>
+              <a:spcAft>
+                <a:spcPts val="400"/>
+              </a:spcAft>
+              <a:buSzPct val="100000"/>
+              <a:buChar char="•"/>
+            </a:pPr>
+            <a:r>
+              <a:rPr lang="en-US" sz="1100" dirty="0">
+                <a:solidFill>
+                  <a:srgbClr val="FFFFFF"/>
+                </a:solidFill>
+                <a:latin typeface="Calibri" pitchFamily="34" charset="0"/>
+                <a:ea typeface="Calibri" pitchFamily="34" charset="-122"/>
+                <a:cs typeface="Calibri" pitchFamily="34" charset="-120"/>
+              </a:rPr>
+              <a:t>onDefeat() — คัตซีนบทพูดตอนตาย</a:t>
+            </a:r>
+            <a:endParaRPr lang="en-US" sz="1100" dirty="0"/>
+          </a:p>
+          <a:p>
+            <a:pPr marL="165100" indent="-165100">
+              <a:lnSpc>
+                <a:spcPct val="100000"/>
+              </a:lnSpc>
+              <a:spcAft>
+                <a:spcPts val="400"/>
+              </a:spcAft>
+              <a:buSzPct val="100000"/>
+              <a:buChar char="•"/>
+            </a:pPr>
+            <a:r>
+              <a:rPr lang="en-US" sz="1100" dirty="0">
+                <a:solidFill>
+                  <a:srgbClr val="FFFFFF"/>
+                </a:solidFill>
+                <a:latin typeface="Calibri" pitchFamily="34" charset="0"/>
+                <a:ea typeface="Calibri" pitchFamily="34" charset="-122"/>
+                <a:cs typeface="Calibri" pitchFamily="34" charset="-120"/>
+              </a:rPr>
+              <a:t>update() — ขับบทพูดยอมแพ้ / ตอนตาย</a:t>
+            </a:r>
+            <a:endParaRPr lang="en-US" sz="1100" dirty="0"/>
+          </a:p>
+          <a:p>
+            <a:pPr marL="165100" indent="-165100">
+              <a:lnSpc>
+                <a:spcPct val="100000"/>
+              </a:lnSpc>
+              <a:spcAft>
+                <a:spcPts val="400"/>
+              </a:spcAft>
+              <a:buSzPct val="100000"/>
+              <a:buChar char="•"/>
+            </a:pPr>
+            <a:r>
+              <a:rPr lang="en-US" sz="1100" dirty="0">
+                <a:solidFill>
+                  <a:srgbClr val="FFFFFF"/>
+                </a:solidFill>
+                <a:latin typeface="Calibri" pitchFamily="34" charset="0"/>
+                <a:ea typeface="Calibri" pitchFamily="34" charset="-122"/>
+                <a:cs typeface="Calibri" pitchFamily="34" charset="-120"/>
+              </a:rPr>
+              <a:t>render() — ตัว body (TorielBody) เป็นคนวาด</a:t>
+            </a:r>
+            <a:endParaRPr lang="en-US" sz="1100" dirty="0"/>
+          </a:p>
+          <a:p>
+            <a:pPr indent="0" marL="0">
+              <a:lnSpc>
+                <a:spcPct val="100000"/>
+              </a:lnSpc>
+              <a:buNone/>
+            </a:pPr>
+            <a:r>
+              <a:rPr lang="en-US" sz="1050" i="1" dirty="0">
+                <a:solidFill>
+                  <a:srgbClr val="FFD43B"/>
+                </a:solidFill>
+                <a:latin typeface="Calibri" pitchFamily="34" charset="0"/>
+                <a:ea typeface="Calibri" pitchFamily="34" charset="-122"/>
+                <a:cs typeface="Calibri" pitchFamily="34" charset="-120"/>
+              </a:rPr>
+              <a:t>GENOCIDE: murderlv ≥ 1 → DEF −9999, ฆ่าได้หมัดเดียว + บทพูดตอนตายแบบเย็นชา 'เกลียดฉันถึงขนาดนั้นเลยหรือ?'</a:t>
+            </a:r>
+            <a:endParaRPr lang="en-US" sz="1100" dirty="0"/>
+          </a:p>
+        </p:txBody>
+      </p:sp>
+      <p:sp>
+        <p:nvSpPr>
+          <p:cNvPr id="14" name="Text 12"/>
+          <p:cNvSpPr/>
+          <p:nvPr/>
+        </p:nvSpPr>
+        <p:spPr>
+          <a:xfrm>
+            <a:off x="548640" y="6382512"/>
+            <a:ext cx="11064240" cy="384048"/>
+          </a:xfrm>
+          <a:prstGeom prst="rect">
+            <a:avLst/>
+          </a:prstGeom>
+          <a:noFill/>
+          <a:ln/>
+        </p:spPr>
+        <p:txBody>
+          <a:bodyPr wrap="square" lIns="0" tIns="0" rIns="0" bIns="0" rtlCol="0" anchor="ctr"/>
+          <a:lstStyle/>
+          <a:p>
+            <a:pPr algn="ctr" indent="0" marL="0">
+              <a:buNone/>
+            </a:pPr>
+            <a:r>
+              <a:rPr lang="en-US" sz="1150" i="1" dirty="0">
+                <a:solidFill>
+                  <a:srgbClr val="FFD43B"/>
+                </a:solidFill>
+                <a:latin typeface="Courier New" pitchFamily="34" charset="0"/>
+                <a:ea typeface="Courier New" pitchFamily="34" charset="-122"/>
+                <a:cs typeface="Courier New" pitchFamily="34" charset="-120"/>
+              </a:rPr>
+              <a:t>438 บรรทัด — บอสตัวแรก · พอร์ต fire-helix + มือกวาดครบ · bullet/toriel (FireHelix · MiniHelix · ChaseFire · HandBullet) · เส้นทางไว้ชีวิตแบบปฏิเสธจะสู้</a:t>
+            </a:r>
+            <a:endParaRPr lang="en-US" sz="1150" dirty="0"/>
           </a:p>
         </p:txBody>
       </p:sp>
@@ -18350,7 +19335,7 @@
                 <a:ea typeface="Calibri" pitchFamily="34" charset="-122"/>
                 <a:cs typeface="Calibri" pitchFamily="34" charset="-120"/>
               </a:rPr>
-              <a:t>กฎเหล็ก: </a:t>
+              <a:t xml:space="preserve">กฎเหล็ก: </a:t>
             </a:r>
             <a:endParaRPr lang="en-US" sz="1300" dirty="0"/>
           </a:p>

--- a/UndertaleBossFight_CodeOverview.pptx
+++ b/UndertaleBossFight_CodeOverview.pptx
@@ -21,6 +21,7 @@
     <p:sldId id="268" r:id="rId14"/>
     <p:sldId id="269" r:id="rId15"/>
     <p:sldId id="270" r:id="rId16"/>
+    <p:sldId id="277" r:id="rId28"/>
     <p:sldId id="271" r:id="rId17"/>
     <p:sldId id="272" r:id="rId18"/>
     <p:sldId id="273" r:id="rId19"/>
@@ -2593,6 +2594,10 @@
             <a:prstDash val="solid"/>
           </a:ln>
         </p:spPr>
+        <p:txBody>
+          <a:bodyPr/>
+          <a:p/>
+        </p:txBody>
       </p:sp>
       <p:sp>
         <p:nvSpPr>
@@ -2620,6 +2625,10 @@
             <a:prstDash val="solid"/>
           </a:ln>
         </p:spPr>
+        <p:txBody>
+          <a:bodyPr/>
+          <a:p/>
+        </p:txBody>
       </p:sp>
       <p:sp>
         <p:nvSpPr>
@@ -2647,6 +2656,10 @@
             <a:prstDash val="solid"/>
           </a:ln>
         </p:spPr>
+        <p:txBody>
+          <a:bodyPr/>
+          <a:p/>
+        </p:txBody>
       </p:sp>
       <p:sp>
         <p:nvSpPr>
@@ -2674,6 +2687,10 @@
             <a:prstDash val="solid"/>
           </a:ln>
         </p:spPr>
+        <p:txBody>
+          <a:bodyPr/>
+          <a:p/>
+        </p:txBody>
       </p:sp>
       <p:sp>
         <p:nvSpPr>
@@ -2701,6 +2718,10 @@
             <a:prstDash val="solid"/>
           </a:ln>
         </p:spPr>
+        <p:txBody>
+          <a:bodyPr/>
+          <a:p/>
+        </p:txBody>
       </p:sp>
       <p:sp>
         <p:nvSpPr>
@@ -2728,6 +2749,10 @@
             <a:prstDash val="solid"/>
           </a:ln>
         </p:spPr>
+        <p:txBody>
+          <a:bodyPr/>
+          <a:p/>
+        </p:txBody>
       </p:sp>
       <p:sp>
         <p:nvSpPr>
@@ -2755,6 +2780,10 @@
             <a:prstDash val="solid"/>
           </a:ln>
         </p:spPr>
+        <p:txBody>
+          <a:bodyPr/>
+          <a:p/>
+        </p:txBody>
       </p:sp>
       <p:sp>
         <p:nvSpPr>
@@ -2782,6 +2811,10 @@
             <a:prstDash val="solid"/>
           </a:ln>
         </p:spPr>
+        <p:txBody>
+          <a:bodyPr/>
+          <a:p/>
+        </p:txBody>
       </p:sp>
       <p:sp>
         <p:nvSpPr>
@@ -2809,6 +2842,10 @@
             <a:prstDash val="solid"/>
           </a:ln>
         </p:spPr>
+        <p:txBody>
+          <a:bodyPr/>
+          <a:p/>
+        </p:txBody>
       </p:sp>
       <p:sp>
         <p:nvSpPr>
@@ -2962,6 +2999,10 @@
             </a:outerShdw>
           </a:effectLst>
         </p:spPr>
+        <p:txBody>
+          <a:bodyPr/>
+          <a:p/>
+        </p:txBody>
       </p:sp>
       <p:sp>
         <p:nvSpPr>
@@ -2996,7 +3037,7 @@
                 <a:ea typeface="Calibri" pitchFamily="34" charset="-122"/>
                 <a:cs typeface="Calibri" pitchFamily="34" charset="-120"/>
               </a:rPr>
-              <a:t>120+</a:t>
+              <a:t>160+</a:t>
             </a:r>
             <a:endParaRPr lang="en-US" sz="3000" dirty="0"/>
           </a:p>
@@ -3076,6 +3117,10 @@
             </a:outerShdw>
           </a:effectLst>
         </p:spPr>
+        <p:txBody>
+          <a:bodyPr/>
+          <a:p/>
+        </p:txBody>
       </p:sp>
       <p:sp>
         <p:nvSpPr>
@@ -3110,7 +3155,7 @@
                 <a:ea typeface="Calibri" pitchFamily="34" charset="-122"/>
                 <a:cs typeface="Calibri" pitchFamily="34" charset="-120"/>
               </a:rPr>
-              <a:t>~20,400</a:t>
+              <a:t>~26,800</a:t>
             </a:r>
             <a:endParaRPr lang="en-US" sz="3000" dirty="0"/>
           </a:p>
@@ -3190,6 +3235,10 @@
             </a:outerShdw>
           </a:effectLst>
         </p:spPr>
+        <p:txBody>
+          <a:bodyPr/>
+          <a:p/>
+        </p:txBody>
       </p:sp>
       <p:sp>
         <p:nvSpPr>
@@ -3304,6 +3353,10 @@
             </a:outerShdw>
           </a:effectLst>
         </p:spPr>
+        <p:txBody>
+          <a:bodyPr/>
+          <a:p/>
+        </p:txBody>
       </p:sp>
       <p:sp>
         <p:nvSpPr>
@@ -3338,7 +3391,7 @@
                 <a:ea typeface="Calibri" pitchFamily="34" charset="-122"/>
                 <a:cs typeface="Calibri" pitchFamily="34" charset="-120"/>
               </a:rPr>
-              <a:t>8</a:t>
+              <a:t>9</a:t>
             </a:r>
             <a:endParaRPr lang="en-US" sz="3000" dirty="0"/>
           </a:p>
@@ -3418,6 +3471,10 @@
             </a:outerShdw>
           </a:effectLst>
         </p:spPr>
+        <p:txBody>
+          <a:bodyPr/>
+          <a:p/>
+        </p:txBody>
       </p:sp>
       <p:sp>
         <p:nvSpPr>
@@ -3452,7 +3509,7 @@
                 <a:ea typeface="Calibri" pitchFamily="34" charset="-122"/>
                 <a:cs typeface="Calibri" pitchFamily="34" charset="-120"/>
               </a:rPr>
-              <a:t>44 ✓</a:t>
+              <a:t>49 ✓</a:t>
             </a:r>
             <a:endParaRPr lang="en-US" sz="3000" dirty="0"/>
           </a:p>
@@ -3530,7 +3587,7 @@
                 <a:ea typeface="Calibri" pitchFamily="34" charset="-122"/>
                 <a:cs typeface="Calibri" pitchFamily="34" charset="-120"/>
               </a:rPr>
-              <a:t>เป้าหมาย: พอร์ตฉากต่อสู้บอส Undertale (GML) → เกม Java ยืนเดี่ยว เลือกสู้บอสได้ทันที · build เขียว 44 เทสต์ผ่าน · โค้ดมี javadoc ครบทุกคลาส</a:t>
+              <a:t>เป้าหมาย: พอร์ตฉากต่อสู้บอส Undertale (GML) → เกม Java ยืนเดี่ยว เลือกสู้บอสได้ทันที · build เขียว 49 เทสต์ผ่าน · โค้ดมี javadoc ครบทุกคลาส</a:t>
             </a:r>
             <a:endParaRPr lang="en-US" sz="1300" dirty="0"/>
           </a:p>
@@ -3681,6 +3738,10 @@
             </a:outerShdw>
           </a:effectLst>
         </p:spPr>
+        <p:txBody>
+          <a:bodyPr/>
+          <a:p/>
+        </p:txBody>
       </p:sp>
       <p:sp>
         <p:nvSpPr>
@@ -3798,6 +3859,10 @@
             </a:outerShdw>
           </a:effectLst>
         </p:spPr>
+        <p:txBody>
+          <a:bodyPr/>
+          <a:p/>
+        </p:txBody>
       </p:sp>
       <p:sp>
         <p:nvSpPr>
@@ -3915,6 +3980,10 @@
             </a:outerShdw>
           </a:effectLst>
         </p:spPr>
+        <p:txBody>
+          <a:bodyPr/>
+          <a:p/>
+        </p:txBody>
       </p:sp>
       <p:sp>
         <p:nvSpPr>
@@ -4032,6 +4101,10 @@
             </a:outerShdw>
           </a:effectLst>
         </p:spPr>
+        <p:txBody>
+          <a:bodyPr/>
+          <a:p/>
+        </p:txBody>
       </p:sp>
       <p:sp>
         <p:nvSpPr>
@@ -4149,6 +4222,10 @@
             </a:outerShdw>
           </a:effectLst>
         </p:spPr>
+        <p:txBody>
+          <a:bodyPr/>
+          <a:p/>
+        </p:txBody>
       </p:sp>
       <p:sp>
         <p:nvSpPr>
@@ -4266,6 +4343,10 @@
             </a:outerShdw>
           </a:effectLst>
         </p:spPr>
+        <p:txBody>
+          <a:bodyPr/>
+          <a:p/>
+        </p:txBody>
       </p:sp>
       <p:sp>
         <p:nvSpPr>
@@ -4493,6 +4574,10 @@
             </a:outerShdw>
           </a:effectLst>
         </p:spPr>
+        <p:txBody>
+          <a:bodyPr/>
+          <a:p/>
+        </p:txBody>
       </p:sp>
       <p:sp>
         <p:nvSpPr>
@@ -4730,6 +4815,10 @@
             </a:outerShdw>
           </a:effectLst>
         </p:spPr>
+        <p:txBody>
+          <a:bodyPr/>
+          <a:p/>
+        </p:txBody>
       </p:sp>
       <p:sp>
         <p:nvSpPr>
@@ -4943,6 +5032,10 @@
             </a:outerShdw>
           </a:effectLst>
         </p:spPr>
+        <p:txBody>
+          <a:bodyPr/>
+          <a:p/>
+        </p:txBody>
       </p:sp>
       <p:sp>
         <p:nvSpPr>
@@ -5136,6 +5229,10 @@
             </a:outerShdw>
           </a:effectLst>
         </p:spPr>
+        <p:txBody>
+          <a:bodyPr/>
+          <a:p/>
+        </p:txBody>
       </p:sp>
       <p:sp>
         <p:nvSpPr>
@@ -5288,7 +5385,7 @@
                 <a:ea typeface="Calibri" pitchFamily="34" charset="-122"/>
                 <a:cs typeface="Calibri" pitchFamily="34" charset="-120"/>
               </a:rPr>
-              <a:t>5=NEO 6=EX 7=Muffet 8=Toriel</a:t>
+              <a:t>5=NEO 6=EX 7=Muffet 8=Toriel 9=Asriel</a:t>
             </a:r>
             <a:endParaRPr lang="en-US" sz="1100" dirty="0"/>
           </a:p>
@@ -5329,6 +5426,10 @@
             </a:outerShdw>
           </a:effectLst>
         </p:spPr>
+        <p:txBody>
+          <a:bodyPr/>
+          <a:p/>
+        </p:txBody>
       </p:sp>
       <p:sp>
         <p:nvSpPr>
@@ -5476,7 +5577,7 @@
                 <a:ea typeface="Courier New" pitchFamily="34" charset="-122"/>
                 <a:cs typeface="Courier New" pitchFamily="34" charset="-120"/>
               </a:rPr>
-              <a:t>เจาะลึกบอส 2/5 — หัวใจสีฟ้า</a:t>
+              <a:t>เจาะลึกบอส 1/6 — บอสตัวแรก</a:t>
             </a:r>
             <a:endParaRPr lang="en-US" sz="1200" dirty="0"/>
           </a:p>
@@ -5515,7 +5616,7 @@
                 <a:ea typeface="Calibri" pitchFamily="34" charset="-122"/>
                 <a:cs typeface="Calibri" pitchFamily="34" charset="-120"/>
               </a:rPr>
-              <a:t>Papyrus (obj_papyrusboss) — แนะนำ BLUE SOUL</a:t>
+              <a:t>Toriel (obj_torielboss) — ไฟกับมือ, มีทางออก 2 ทาง</a:t>
             </a:r>
             <a:endParaRPr lang="en-US" sz="2800" dirty="0"/>
           </a:p>
@@ -5554,7 +5655,7 @@
                 <a:ea typeface="Calibri" pitchFamily="34" charset="-122"/>
                 <a:cs typeface="Calibri" pitchFamily="34" charset="-120"/>
               </a:rPr>
-              <a:t>ATK 20 / DEF 20 (โชว์) แต่โจมตีแทบไม่เจ็บ และ 'ชนะด้วย FIGHT ไม่ได้' — เป็นด่านกระดูกที่จบเมื่อ Papyrus หมดท่า แล้วยอมไว้ชีวิต (MERCY)</a:t>
+              <a:t>HP 440 / ATK 6 / DEF 1 ด่านไฟและมือกวาดยาว ๆ มีทางผ่าน 2 ทาง: ตีจนเลือดต่ำจนกับดัก DEF ทำให้หมัดถัดไปฆ่าได้ หรือปฏิเสธที่จะสู้จนเธอยอมแพ้</a:t>
             </a:r>
             <a:endParaRPr lang="en-US" sz="1250" dirty="0"/>
           </a:p>
@@ -5595,6 +5696,10 @@
             </a:outerShdw>
           </a:effectLst>
         </p:spPr>
+        <p:txBody>
+          <a:bodyPr/>
+          <a:p/>
+        </p:txBody>
       </p:sp>
       <p:sp>
         <p:nvSpPr>
@@ -5675,7 +5780,7 @@
                 <a:ea typeface="Calibri" pitchFamily="34" charset="-122"/>
                 <a:cs typeface="Calibri" pitchFamily="34" charset="-120"/>
               </a:rPr>
-              <a:t>ตัวนับ fighto (−1 → 17): เลือก layout กระดูกแต่ละเทิร์น แล้ว self-advance (ตรงกับ mnfight==2 ของ GML)</a:t>
+              <a:t>หัวใจ RED; ทุกเทิร์นสุ่ม mycommand (0–100) → 1 ใน 5 ท่า</a:t>
             </a:r>
             <a:endParaRPr lang="en-US" sz="1100" dirty="0"/>
           </a:p>
@@ -5699,7 +5804,7 @@
                 <a:ea typeface="Calibri" pitchFamily="34" charset="-122"/>
                 <a:cs typeface="Calibri" pitchFamily="34" charset="-120"/>
               </a:rPr>
-              <a:t>BLUE SOUL ครั้งแรก: แรงโน้มถ่วงลง + กดขึ้นกระโดดข้ามกระดูก</a:t>
+              <a:t>fire helix / mini-helix / helix โปร่ง ในกล่องสูง (border 7); มือกวาด 1–2 ข้างในกล่องเตี้ยกว้าง (border 6)</a:t>
             </a:r>
             <a:endParaRPr lang="en-US" sz="1100" dirty="0"/>
           </a:p>
@@ -5723,7 +5828,7 @@
                 <a:ea typeface="Calibri" pitchFamily="34" charset="-122"/>
                 <a:cs typeface="Calibri" pitchFamily="34" charset="-120"/>
               </a:rPr>
-              <a:t>controller สแปวน์กระดูกเอง (body เป็นภาพล้วน), layout ถอดพิกัดตรงจาก enumb 3</a:t>
+              <a:t>มือปล่อยไฟตามเป้า (chase-fire) — ภัยหลักเมื่อตัด Faltering ออก; เสาไฟไซน์เลื่อนซ้าย↔ขวา ไม่มีจุดปลอดภัย</a:t>
             </a:r>
             <a:endParaRPr lang="en-US" sz="1100" dirty="0"/>
           </a:p>
@@ -5764,6 +5869,10 @@
             </a:outerShdw>
           </a:effectLst>
         </p:spPr>
+        <p:txBody>
+          <a:bodyPr/>
+          <a:p/>
+        </p:txBody>
       </p:sp>
       <p:sp>
         <p:nvSpPr>
@@ -5798,7 +5907,7 @@
                 <a:ea typeface="Courier New" pitchFamily="34" charset="-122"/>
                 <a:cs typeface="Courier New" pitchFamily="34" charset="-120"/>
               </a:rPr>
-              <a:t>คัตซีน Annoying Dog (special attack)</a:t>
+              <a:t>ทางออก 2 ทาง</a:t>
             </a:r>
             <a:endParaRPr lang="en-US" sz="1350" dirty="0"/>
           </a:p>
@@ -5844,7 +5953,7 @@
                 <a:ea typeface="Calibri" pitchFamily="34" charset="-122"/>
                 <a:cs typeface="Calibri" pitchFamily="34" charset="-120"/>
               </a:rPr>
-              <a:t>blt_tobydogbone: หมาขโมยกระดูก 'special attack'</a:t>
+              <a:t>ฆ่า: HP ≤ 150 ทำให้ DEF ร่วงเป็น −140 — หมัดถัดไปมักฆ่าได้ (กับดักคลาสสิก) แล้วเล่นบทพูดตอนตาย</a:t>
             </a:r>
             <a:endParaRPr lang="en-US" sz="1100" dirty="0"/>
           </a:p>
@@ -5868,7 +5977,7 @@
                 <a:ea typeface="Calibri" pitchFamily="34" charset="-122"/>
                 <a:cs typeface="Calibri" pitchFamily="34" charset="-120"/>
               </a:rPr>
-              <a:t>ขับด้วย bonetalk state machine + AnnoyingDog (EAT→SURPRISE→SCOOT)</a:t>
+              <a:t>ไว้ชีวิต: กดปุ่ม SPARE ไม่ได้ (mercymod −20000); ปฏิเสธจะสู้ ตัวนับ conversation จะไต่บทพูดเร่งเร้า</a:t>
             </a:r>
             <a:endParaRPr lang="en-US" sz="1100" dirty="0"/>
           </a:p>
@@ -5892,7 +6001,7 @@
                 <a:ea typeface="Calibri" pitchFamily="34" charset="-122"/>
                 <a:cs typeface="Calibri" pitchFamily="34" charset="-120"/>
               </a:rPr>
-              <a:t>จบด้วย 'regular attack' แล้ว Papyrus ยอมไว้ชีวิต</a:t>
+              <a:t>ที่ conversation 13 เธอหยุดโจมตีและเล่นบทยอมแพ้ → ชนะด้วยความเมตตา</a:t>
             </a:r>
             <a:endParaRPr lang="en-US" sz="1100" dirty="0"/>
           </a:p>
@@ -5933,6 +6042,10 @@
             </a:outerShdw>
           </a:effectLst>
         </p:spPr>
+        <p:txBody>
+          <a:bodyPr/>
+          <a:p/>
+        </p:txBody>
       </p:sp>
       <p:sp>
         <p:nvSpPr>
@@ -5967,7 +6080,7 @@
                 <a:ea typeface="Courier New" pitchFamily="34" charset="-122"/>
                 <a:cs typeface="Courier New" pitchFamily="34" charset="-120"/>
               </a:rPr>
-              <a:t>เมธอด/SPI ที่ override</a:t>
+              <a:t>เมธอดที่ override / SPI</a:t>
             </a:r>
             <a:endParaRPr lang="en-US" sz="1350" dirty="0"/>
           </a:p>
@@ -6013,7 +6126,7 @@
                 <a:ea typeface="Calibri" pitchFamily="34" charset="-122"/>
                 <a:cs typeface="Calibri" pitchFamily="34" charset="-120"/>
               </a:rPr>
-              <a:t>musicPath() — เพลง Bonetrousle</a:t>
+              <a:t>musicPath() — ธีม Heartache</a:t>
             </a:r>
             <a:endParaRPr lang="en-US" sz="1100" dirty="0"/>
           </a:p>
@@ -6037,7 +6150,7 @@
                 <a:ea typeface="Calibri" pitchFamily="34" charset="-122"/>
                 <a:cs typeface="Calibri" pitchFamily="34" charset="-120"/>
               </a:rPr>
-              <a:t>chooseAttack() — เลือก layout ตาม fighto</a:t>
+              <a:t>setup() — HP 440, หัวใจ RED, border 6, mercymod −20000</a:t>
             </a:r>
             <a:endParaRPr lang="en-US" sz="1100" dirty="0"/>
           </a:p>
@@ -6061,7 +6174,7 @@
                 <a:ea typeface="Calibri" pitchFamily="34" charset="-122"/>
                 <a:cs typeface="Calibri" pitchFamily="34" charset="-120"/>
               </a:rPr>
-              <a:t>update() — ขับคัตซีน bonetalk/หมา</a:t>
+              <a:t>chooseAttack() — สุ่ม mycommand, เลือกกล่อง + ท่า</a:t>
             </a:r>
             <a:endParaRPr lang="en-US" sz="1100" dirty="0"/>
           </a:p>
@@ -6085,7 +6198,7 @@
                 <a:ea typeface="Calibri" pitchFamily="34" charset="-122"/>
                 <a:cs typeface="Calibri" pitchFamily="34" charset="-120"/>
               </a:rPr>
-              <a:t>onAct(whatiheard) — กราฟ ACT (flirt ฯลฯ)</a:t>
+              <a:t>onDamaged() — สั่นตอนเจ็บ; HP ≤ 150 → DEF −140</a:t>
             </a:r>
             <a:endParaRPr lang="en-US" sz="1100" dirty="0"/>
           </a:p>
@@ -6109,7 +6222,7 @@
                 <a:ea typeface="Calibri" pitchFamily="34" charset="-122"/>
                 <a:cs typeface="Calibri" pitchFamily="34" charset="-120"/>
               </a:rPr>
-              <a:t>onSpare() — รับการไว้ชีวิต</a:t>
+              <a:t>onAct() — Check / Talk (flavor; ใช้เทิร์นทั้งคู่)</a:t>
             </a:r>
             <a:endParaRPr lang="en-US" sz="1100" dirty="0"/>
           </a:p>
@@ -6133,7 +6246,7 @@
                 <a:ea typeface="Calibri" pitchFamily="34" charset="-122"/>
                 <a:cs typeface="Calibri" pitchFamily="34" charset="-120"/>
               </a:rPr>
-              <a:t>onDefeat() — คัตซีนหัวขาด (decapitation) ก่อนจบเอง</a:t>
+              <a:t>onDefeat() — คัตซีนบทพูดตอนตาย</a:t>
             </a:r>
             <a:endParaRPr lang="en-US" sz="1100" dirty="0"/>
           </a:p>
@@ -6157,7 +6270,7 @@
                 <a:ea typeface="Calibri" pitchFamily="34" charset="-122"/>
                 <a:cs typeface="Calibri" pitchFamily="34" charset="-120"/>
               </a:rPr>
-              <a:t>introComplete() — เปิดเมนูเมื่ออินโทรจบ</a:t>
+              <a:t>update() — ขับบทพูดยอมแพ้ / ตอนตาย</a:t>
             </a:r>
             <a:endParaRPr lang="en-US" sz="1100" dirty="0"/>
           </a:p>
@@ -6181,7 +6294,7 @@
                 <a:ea typeface="Calibri" pitchFamily="34" charset="-122"/>
                 <a:cs typeface="Calibri" pitchFamily="34" charset="-120"/>
               </a:rPr>
-              <a:t>render() — วาดบอส + กระดูก (~500 บรรทัด)</a:t>
+              <a:t>render() — ตัว body (TorielBody) เป็นคนวาด</a:t>
             </a:r>
             <a:endParaRPr lang="en-US" sz="1100" dirty="0"/>
           </a:p>
@@ -6201,7 +6314,7 @@
                 <a:ea typeface="Calibri" pitchFamily="34" charset="-122"/>
                 <a:cs typeface="Calibri" pitchFamily="34" charset="-120"/>
               </a:rPr>
-              <a:t>โหมด GENOCIDE: murderlv ≥ 7 → ล้มหมัดเดียว + บทพูด 'I believe in you' เปลี่ยนไป</a:t>
+              <a:t>GENOCIDE: murderlv ≥ 1 → DEF −9999, ฆ่าได้หมัดเดียว + บทพูดตอนตายแบบเย็นชา 'เกลียดฉันถึงขนาดนั้นเลยหรือ?'</a:t>
             </a:r>
             <a:endParaRPr lang="en-US" sz="1100" dirty="0"/>
           </a:p>
@@ -6240,7 +6353,7 @@
                 <a:ea typeface="Courier New" pitchFamily="34" charset="-122"/>
                 <a:cs typeface="Courier New" pitchFamily="34" charset="-120"/>
               </a:rPr>
-              <a:t>868 บรรทัด — ใช้ระบบ Core ครบ: BLUE soul · fighto state machine · Sequence (bonetalk) · AnnoyingDog entity · กระดูกจาก bullet/bones</a:t>
+              <a:t>438 บรรทัด — บอสตัวแรก · พอร์ต fire-helix + มือกวาดครบ · bullet/toriel (FireHelix · MiniHelix · ChaseFire · HandBullet) · เส้นทางไว้ชีวิตแบบปฏิเสธจะสู้</a:t>
             </a:r>
             <a:endParaRPr lang="en-US" sz="1150" dirty="0"/>
           </a:p>
@@ -6255,6 +6368,853 @@
 </file>
 
 <file path=ppt/slides/slide13.xml><?xml version="1.0" encoding="utf-8"?>
+<p:sld xmlns:a="http://schemas.openxmlformats.org/drawingml/2006/main" xmlns:r="http://schemas.openxmlformats.org/officeDocument/2006/relationships" xmlns:p="http://schemas.openxmlformats.org/presentationml/2006/main">
+  <p:cSld name="Slide 12">
+    <p:bg>
+      <p:bgPr>
+        <a:solidFill>
+          <a:srgbClr val="0A0A0A"/>
+        </a:solidFill>
+      </p:bgPr>
+    </p:bg>
+    <p:spTree>
+      <p:nvGrpSpPr>
+        <p:cNvPr id="1" name=""/>
+        <p:cNvGrpSpPr/>
+        <p:nvPr/>
+      </p:nvGrpSpPr>
+      <p:grpSpPr>
+        <a:xfrm>
+          <a:off x="0" y="0"/>
+          <a:ext cx="0" cy="0"/>
+          <a:chOff x="0" y="0"/>
+          <a:chExt cx="0" cy="0"/>
+        </a:xfrm>
+      </p:grpSpPr>
+      <p:sp>
+        <p:nvSpPr>
+          <p:cNvPr id="2" name="Text 0"/>
+          <p:cNvSpPr/>
+          <p:nvPr/>
+        </p:nvSpPr>
+        <p:spPr>
+          <a:xfrm>
+            <a:off x="548640" y="365760"/>
+            <a:ext cx="10058400" cy="365760"/>
+          </a:xfrm>
+          <a:prstGeom prst="rect">
+            <a:avLst/>
+          </a:prstGeom>
+          <a:noFill/>
+          <a:ln/>
+        </p:spPr>
+        <p:txBody>
+          <a:bodyPr wrap="square" lIns="0" tIns="0" rIns="0" bIns="0" rtlCol="0" anchor="ctr"/>
+          <a:lstStyle/>
+          <a:p>
+            <a:pPr indent="0" marL="0">
+              <a:buNone/>
+            </a:pPr>
+            <a:r>
+              <a:rPr lang="en-US" sz="1200" b="1" spc="300" kern="0" dirty="0">
+                <a:solidFill>
+                  <a:srgbClr val="4DA6FF"/>
+                </a:solidFill>
+                <a:latin typeface="Courier New" pitchFamily="34" charset="0"/>
+                <a:ea typeface="Courier New" pitchFamily="34" charset="-122"/>
+                <a:cs typeface="Courier New" pitchFamily="34" charset="-120"/>
+              </a:rPr>
+              <a:t>เจาะลึกบอส 2/6 — หัวใจสีฟ้า</a:t>
+            </a:r>
+            <a:endParaRPr lang="en-US" sz="1200" dirty="0"/>
+          </a:p>
+        </p:txBody>
+      </p:sp>
+      <p:sp>
+        <p:nvSpPr>
+          <p:cNvPr id="3" name="Text 1"/>
+          <p:cNvSpPr/>
+          <p:nvPr/>
+        </p:nvSpPr>
+        <p:spPr>
+          <a:xfrm>
+            <a:off x="548640" y="658368"/>
+            <a:ext cx="11064240" cy="731520"/>
+          </a:xfrm>
+          <a:prstGeom prst="rect">
+            <a:avLst/>
+          </a:prstGeom>
+          <a:noFill/>
+          <a:ln/>
+        </p:spPr>
+        <p:txBody>
+          <a:bodyPr wrap="square" lIns="0" tIns="0" rIns="0" bIns="0" rtlCol="0" anchor="ctr"/>
+          <a:lstStyle/>
+          <a:p>
+            <a:pPr indent="0" marL="0">
+              <a:buNone/>
+            </a:pPr>
+            <a:r>
+              <a:rPr lang="en-US" sz="2800" b="1" dirty="0">
+                <a:solidFill>
+                  <a:srgbClr val="FFFFFF"/>
+                </a:solidFill>
+                <a:latin typeface="Calibri" pitchFamily="34" charset="0"/>
+                <a:ea typeface="Calibri" pitchFamily="34" charset="-122"/>
+                <a:cs typeface="Calibri" pitchFamily="34" charset="-120"/>
+              </a:rPr>
+              <a:t>Papyrus (obj_papyrusboss) — แนะนำ BLUE SOUL</a:t>
+            </a:r>
+            <a:endParaRPr lang="en-US" sz="2800" dirty="0"/>
+          </a:p>
+        </p:txBody>
+      </p:sp>
+      <p:sp>
+        <p:nvSpPr>
+          <p:cNvPr id="4" name="Text 2"/>
+          <p:cNvSpPr/>
+          <p:nvPr/>
+        </p:nvSpPr>
+        <p:spPr>
+          <a:xfrm>
+            <a:off x="548640" y="1444752"/>
+            <a:ext cx="11064240" cy="594360"/>
+          </a:xfrm>
+          <a:prstGeom prst="rect">
+            <a:avLst/>
+          </a:prstGeom>
+          <a:noFill/>
+          <a:ln/>
+        </p:spPr>
+        <p:txBody>
+          <a:bodyPr wrap="square" lIns="0" tIns="0" rIns="0" bIns="0" rtlCol="0" anchor="ctr"/>
+          <a:lstStyle/>
+          <a:p>
+            <a:pPr indent="0" marL="0">
+              <a:buNone/>
+            </a:pPr>
+            <a:r>
+              <a:rPr lang="en-US" sz="1250" dirty="0">
+                <a:solidFill>
+                  <a:srgbClr val="9AA1AC"/>
+                </a:solidFill>
+                <a:latin typeface="Calibri" pitchFamily="34" charset="0"/>
+                <a:ea typeface="Calibri" pitchFamily="34" charset="-122"/>
+                <a:cs typeface="Calibri" pitchFamily="34" charset="-120"/>
+              </a:rPr>
+              <a:t>ATK 20 / DEF 20 (โชว์) แต่โจมตีแทบไม่เจ็บ และ 'ชนะด้วย FIGHT ไม่ได้' — เป็นด่านกระดูกที่จบเมื่อ Papyrus หมดท่า แล้วยอมไว้ชีวิต (MERCY)</a:t>
+            </a:r>
+            <a:endParaRPr lang="en-US" sz="1250" dirty="0"/>
+          </a:p>
+        </p:txBody>
+      </p:sp>
+      <p:sp>
+        <p:nvSpPr>
+          <p:cNvPr id="5" name="Shape 3"/>
+          <p:cNvSpPr/>
+          <p:nvPr/>
+        </p:nvSpPr>
+        <p:spPr>
+          <a:xfrm>
+            <a:off x="548640" y="2148840"/>
+            <a:ext cx="5532120" cy="1874520"/>
+          </a:xfrm>
+          <a:prstGeom prst="roundRect">
+            <a:avLst>
+              <a:gd name="adj" fmla="val 3415"/>
+            </a:avLst>
+          </a:prstGeom>
+          <a:solidFill>
+            <a:srgbClr val="16181D"/>
+          </a:solidFill>
+          <a:ln w="12700">
+            <a:solidFill>
+              <a:srgbClr val="4DA6FF">
+                <a:alpha val="65000"/>
+              </a:srgbClr>
+            </a:solidFill>
+            <a:prstDash val="solid"/>
+          </a:ln>
+          <a:effectLst>
+            <a:outerShdw sx="100000" sy="100000" kx="0" ky="0" algn="bl" rotWithShape="0" blurRad="101600" dist="38100" dir="5400000">
+              <a:srgbClr val="000000">
+                <a:alpha val="50000"/>
+              </a:srgbClr>
+            </a:outerShdw>
+          </a:effectLst>
+        </p:spPr>
+        <p:txBody>
+          <a:bodyPr/>
+          <a:p/>
+        </p:txBody>
+      </p:sp>
+      <p:sp>
+        <p:nvSpPr>
+          <p:cNvPr id="6" name="Text 4"/>
+          <p:cNvSpPr/>
+          <p:nvPr/>
+        </p:nvSpPr>
+        <p:spPr>
+          <a:xfrm>
+            <a:off x="731520" y="2258568"/>
+            <a:ext cx="5166360" cy="329184"/>
+          </a:xfrm>
+          <a:prstGeom prst="rect">
+            <a:avLst/>
+          </a:prstGeom>
+          <a:noFill/>
+          <a:ln/>
+        </p:spPr>
+        <p:txBody>
+          <a:bodyPr wrap="square" lIns="0" tIns="0" rIns="0" bIns="0" rtlCol="0" anchor="ctr"/>
+          <a:lstStyle/>
+          <a:p>
+            <a:pPr indent="0" marL="0">
+              <a:buNone/>
+            </a:pPr>
+            <a:r>
+              <a:rPr lang="en-US" sz="1350" b="1" dirty="0">
+                <a:solidFill>
+                  <a:srgbClr val="4DA6FF"/>
+                </a:solidFill>
+                <a:latin typeface="Courier New" pitchFamily="34" charset="0"/>
+                <a:ea typeface="Courier New" pitchFamily="34" charset="-122"/>
+                <a:cs typeface="Courier New" pitchFamily="34" charset="-120"/>
+              </a:rPr>
+              <a:t>กลไกหลัก</a:t>
+            </a:r>
+            <a:endParaRPr lang="en-US" sz="1350" dirty="0"/>
+          </a:p>
+        </p:txBody>
+      </p:sp>
+      <p:sp>
+        <p:nvSpPr>
+          <p:cNvPr id="7" name="Text 5"/>
+          <p:cNvSpPr/>
+          <p:nvPr/>
+        </p:nvSpPr>
+        <p:spPr>
+          <a:xfrm>
+            <a:off x="731520" y="2651760"/>
+            <a:ext cx="5166360" cy="1271016"/>
+          </a:xfrm>
+          <a:prstGeom prst="rect">
+            <a:avLst/>
+          </a:prstGeom>
+          <a:noFill/>
+          <a:ln/>
+        </p:spPr>
+        <p:txBody>
+          <a:bodyPr wrap="square" lIns="0" tIns="0" rIns="0" bIns="0" rtlCol="0" anchor="t"/>
+          <a:lstStyle/>
+          <a:p>
+            <a:pPr marL="165100" indent="-165100">
+              <a:lnSpc>
+                <a:spcPct val="100000"/>
+              </a:lnSpc>
+              <a:spcAft>
+                <a:spcPts val="400"/>
+              </a:spcAft>
+              <a:buSzPct val="100000"/>
+              <a:buChar char="•"/>
+            </a:pPr>
+            <a:r>
+              <a:rPr lang="en-US" sz="1100" dirty="0">
+                <a:solidFill>
+                  <a:srgbClr val="FFFFFF"/>
+                </a:solidFill>
+                <a:latin typeface="Calibri" pitchFamily="34" charset="0"/>
+                <a:ea typeface="Calibri" pitchFamily="34" charset="-122"/>
+                <a:cs typeface="Calibri" pitchFamily="34" charset="-120"/>
+              </a:rPr>
+              <a:t>ตัวนับ fighto (−1 → 17): เลือก layout กระดูกแต่ละเทิร์น แล้ว self-advance (ตรงกับ mnfight==2 ของ GML)</a:t>
+            </a:r>
+            <a:endParaRPr lang="en-US" sz="1100" dirty="0"/>
+          </a:p>
+          <a:p>
+            <a:pPr marL="165100" indent="-165100">
+              <a:lnSpc>
+                <a:spcPct val="100000"/>
+              </a:lnSpc>
+              <a:spcAft>
+                <a:spcPts val="400"/>
+              </a:spcAft>
+              <a:buSzPct val="100000"/>
+              <a:buChar char="•"/>
+            </a:pPr>
+            <a:r>
+              <a:rPr lang="en-US" sz="1100" dirty="0">
+                <a:solidFill>
+                  <a:srgbClr val="FFFFFF"/>
+                </a:solidFill>
+                <a:latin typeface="Calibri" pitchFamily="34" charset="0"/>
+                <a:ea typeface="Calibri" pitchFamily="34" charset="-122"/>
+                <a:cs typeface="Calibri" pitchFamily="34" charset="-120"/>
+              </a:rPr>
+              <a:t>BLUE SOUL ครั้งแรก: แรงโน้มถ่วงลง + กดขึ้นกระโดดข้ามกระดูก</a:t>
+            </a:r>
+            <a:endParaRPr lang="en-US" sz="1100" dirty="0"/>
+          </a:p>
+          <a:p>
+            <a:pPr marL="165100" indent="-165100">
+              <a:lnSpc>
+                <a:spcPct val="100000"/>
+              </a:lnSpc>
+              <a:spcAft>
+                <a:spcPts val="400"/>
+              </a:spcAft>
+              <a:buSzPct val="100000"/>
+              <a:buChar char="•"/>
+            </a:pPr>
+            <a:r>
+              <a:rPr lang="en-US" sz="1100" dirty="0">
+                <a:solidFill>
+                  <a:srgbClr val="FFFFFF"/>
+                </a:solidFill>
+                <a:latin typeface="Calibri" pitchFamily="34" charset="0"/>
+                <a:ea typeface="Calibri" pitchFamily="34" charset="-122"/>
+                <a:cs typeface="Calibri" pitchFamily="34" charset="-120"/>
+              </a:rPr>
+              <a:t>controller สแปวน์กระดูกเอง (body เป็นภาพล้วน), layout ถอดพิกัดตรงจาก enumb 3</a:t>
+            </a:r>
+            <a:endParaRPr lang="en-US" sz="1100" dirty="0"/>
+          </a:p>
+        </p:txBody>
+      </p:sp>
+      <p:sp>
+        <p:nvSpPr>
+          <p:cNvPr id="8" name="Shape 6"/>
+          <p:cNvSpPr/>
+          <p:nvPr/>
+        </p:nvSpPr>
+        <p:spPr>
+          <a:xfrm>
+            <a:off x="548640" y="4114800"/>
+            <a:ext cx="5532120" cy="2057400"/>
+          </a:xfrm>
+          <a:prstGeom prst="roundRect">
+            <a:avLst>
+              <a:gd name="adj" fmla="val 3111"/>
+            </a:avLst>
+          </a:prstGeom>
+          <a:solidFill>
+            <a:srgbClr val="16181D"/>
+          </a:solidFill>
+          <a:ln w="12700">
+            <a:solidFill>
+              <a:srgbClr val="FF922B">
+                <a:alpha val="65000"/>
+              </a:srgbClr>
+            </a:solidFill>
+            <a:prstDash val="solid"/>
+          </a:ln>
+          <a:effectLst>
+            <a:outerShdw sx="100000" sy="100000" kx="0" ky="0" algn="bl" rotWithShape="0" blurRad="101600" dist="38100" dir="5400000">
+              <a:srgbClr val="000000">
+                <a:alpha val="50000"/>
+              </a:srgbClr>
+            </a:outerShdw>
+          </a:effectLst>
+        </p:spPr>
+        <p:txBody>
+          <a:bodyPr/>
+          <a:p/>
+        </p:txBody>
+      </p:sp>
+      <p:sp>
+        <p:nvSpPr>
+          <p:cNvPr id="9" name="Text 7"/>
+          <p:cNvSpPr/>
+          <p:nvPr/>
+        </p:nvSpPr>
+        <p:spPr>
+          <a:xfrm>
+            <a:off x="731520" y="4224528"/>
+            <a:ext cx="5166360" cy="329184"/>
+          </a:xfrm>
+          <a:prstGeom prst="rect">
+            <a:avLst/>
+          </a:prstGeom>
+          <a:noFill/>
+          <a:ln/>
+        </p:spPr>
+        <p:txBody>
+          <a:bodyPr wrap="square" lIns="0" tIns="0" rIns="0" bIns="0" rtlCol="0" anchor="ctr"/>
+          <a:lstStyle/>
+          <a:p>
+            <a:pPr indent="0" marL="0">
+              <a:buNone/>
+            </a:pPr>
+            <a:r>
+              <a:rPr lang="en-US" sz="1350" b="1" dirty="0">
+                <a:solidFill>
+                  <a:srgbClr val="FF922B"/>
+                </a:solidFill>
+                <a:latin typeface="Courier New" pitchFamily="34" charset="0"/>
+                <a:ea typeface="Courier New" pitchFamily="34" charset="-122"/>
+                <a:cs typeface="Courier New" pitchFamily="34" charset="-120"/>
+              </a:rPr>
+              <a:t>คัตซีน Annoying Dog (special attack)</a:t>
+            </a:r>
+            <a:endParaRPr lang="en-US" sz="1350" dirty="0"/>
+          </a:p>
+        </p:txBody>
+      </p:sp>
+      <p:sp>
+        <p:nvSpPr>
+          <p:cNvPr id="10" name="Text 8"/>
+          <p:cNvSpPr/>
+          <p:nvPr/>
+        </p:nvSpPr>
+        <p:spPr>
+          <a:xfrm>
+            <a:off x="731520" y="4617720"/>
+            <a:ext cx="5166360" cy="1453896"/>
+          </a:xfrm>
+          <a:prstGeom prst="rect">
+            <a:avLst/>
+          </a:prstGeom>
+          <a:noFill/>
+          <a:ln/>
+        </p:spPr>
+        <p:txBody>
+          <a:bodyPr wrap="square" lIns="0" tIns="0" rIns="0" bIns="0" rtlCol="0" anchor="t"/>
+          <a:lstStyle/>
+          <a:p>
+            <a:pPr marL="165100" indent="-165100">
+              <a:lnSpc>
+                <a:spcPct val="100000"/>
+              </a:lnSpc>
+              <a:spcAft>
+                <a:spcPts val="400"/>
+              </a:spcAft>
+              <a:buSzPct val="100000"/>
+              <a:buChar char="•"/>
+            </a:pPr>
+            <a:r>
+              <a:rPr lang="en-US" sz="1100" dirty="0">
+                <a:solidFill>
+                  <a:srgbClr val="FFFFFF"/>
+                </a:solidFill>
+                <a:latin typeface="Calibri" pitchFamily="34" charset="0"/>
+                <a:ea typeface="Calibri" pitchFamily="34" charset="-122"/>
+                <a:cs typeface="Calibri" pitchFamily="34" charset="-120"/>
+              </a:rPr>
+              <a:t>blt_tobydogbone: หมาขโมยกระดูก 'special attack'</a:t>
+            </a:r>
+            <a:endParaRPr lang="en-US" sz="1100" dirty="0"/>
+          </a:p>
+          <a:p>
+            <a:pPr marL="165100" indent="-165100">
+              <a:lnSpc>
+                <a:spcPct val="100000"/>
+              </a:lnSpc>
+              <a:spcAft>
+                <a:spcPts val="400"/>
+              </a:spcAft>
+              <a:buSzPct val="100000"/>
+              <a:buChar char="•"/>
+            </a:pPr>
+            <a:r>
+              <a:rPr lang="en-US" sz="1100" dirty="0">
+                <a:solidFill>
+                  <a:srgbClr val="FFFFFF"/>
+                </a:solidFill>
+                <a:latin typeface="Calibri" pitchFamily="34" charset="0"/>
+                <a:ea typeface="Calibri" pitchFamily="34" charset="-122"/>
+                <a:cs typeface="Calibri" pitchFamily="34" charset="-120"/>
+              </a:rPr>
+              <a:t>ขับด้วย bonetalk state machine + AnnoyingDog (EAT→SURPRISE→SCOOT)</a:t>
+            </a:r>
+            <a:endParaRPr lang="en-US" sz="1100" dirty="0"/>
+          </a:p>
+          <a:p>
+            <a:pPr marL="165100" indent="-165100">
+              <a:lnSpc>
+                <a:spcPct val="100000"/>
+              </a:lnSpc>
+              <a:spcAft>
+                <a:spcPts val="400"/>
+              </a:spcAft>
+              <a:buSzPct val="100000"/>
+              <a:buChar char="•"/>
+            </a:pPr>
+            <a:r>
+              <a:rPr lang="en-US" sz="1100" dirty="0">
+                <a:solidFill>
+                  <a:srgbClr val="FFFFFF"/>
+                </a:solidFill>
+                <a:latin typeface="Calibri" pitchFamily="34" charset="0"/>
+                <a:ea typeface="Calibri" pitchFamily="34" charset="-122"/>
+                <a:cs typeface="Calibri" pitchFamily="34" charset="-120"/>
+              </a:rPr>
+              <a:t>จบด้วย 'regular attack' แล้ว Papyrus ยอมไว้ชีวิต</a:t>
+            </a:r>
+            <a:endParaRPr lang="en-US" sz="1100" dirty="0"/>
+          </a:p>
+        </p:txBody>
+      </p:sp>
+      <p:sp>
+        <p:nvSpPr>
+          <p:cNvPr id="11" name="Shape 9"/>
+          <p:cNvSpPr/>
+          <p:nvPr/>
+        </p:nvSpPr>
+        <p:spPr>
+          <a:xfrm>
+            <a:off x="6172200" y="2148840"/>
+            <a:ext cx="5440680" cy="4023360"/>
+          </a:xfrm>
+          <a:prstGeom prst="roundRect">
+            <a:avLst>
+              <a:gd name="adj" fmla="val 1591"/>
+            </a:avLst>
+          </a:prstGeom>
+          <a:solidFill>
+            <a:srgbClr val="16181D"/>
+          </a:solidFill>
+          <a:ln w="12700">
+            <a:solidFill>
+              <a:srgbClr val="5BE584">
+                <a:alpha val="65000"/>
+              </a:srgbClr>
+            </a:solidFill>
+            <a:prstDash val="solid"/>
+          </a:ln>
+          <a:effectLst>
+            <a:outerShdw sx="100000" sy="100000" kx="0" ky="0" algn="bl" rotWithShape="0" blurRad="101600" dist="38100" dir="5400000">
+              <a:srgbClr val="000000">
+                <a:alpha val="50000"/>
+              </a:srgbClr>
+            </a:outerShdw>
+          </a:effectLst>
+        </p:spPr>
+        <p:txBody>
+          <a:bodyPr/>
+          <a:p/>
+        </p:txBody>
+      </p:sp>
+      <p:sp>
+        <p:nvSpPr>
+          <p:cNvPr id="12" name="Text 10"/>
+          <p:cNvSpPr/>
+          <p:nvPr/>
+        </p:nvSpPr>
+        <p:spPr>
+          <a:xfrm>
+            <a:off x="6355080" y="2258568"/>
+            <a:ext cx="5074920" cy="329184"/>
+          </a:xfrm>
+          <a:prstGeom prst="rect">
+            <a:avLst/>
+          </a:prstGeom>
+          <a:noFill/>
+          <a:ln/>
+        </p:spPr>
+        <p:txBody>
+          <a:bodyPr wrap="square" lIns="0" tIns="0" rIns="0" bIns="0" rtlCol="0" anchor="ctr"/>
+          <a:lstStyle/>
+          <a:p>
+            <a:pPr indent="0" marL="0">
+              <a:buNone/>
+            </a:pPr>
+            <a:r>
+              <a:rPr lang="en-US" sz="1350" b="1" dirty="0">
+                <a:solidFill>
+                  <a:srgbClr val="5BE584"/>
+                </a:solidFill>
+                <a:latin typeface="Courier New" pitchFamily="34" charset="0"/>
+                <a:ea typeface="Courier New" pitchFamily="34" charset="-122"/>
+                <a:cs typeface="Courier New" pitchFamily="34" charset="-120"/>
+              </a:rPr>
+              <a:t>เมธอด/SPI ที่ override</a:t>
+            </a:r>
+            <a:endParaRPr lang="en-US" sz="1350" dirty="0"/>
+          </a:p>
+        </p:txBody>
+      </p:sp>
+      <p:sp>
+        <p:nvSpPr>
+          <p:cNvPr id="13" name="Text 11"/>
+          <p:cNvSpPr/>
+          <p:nvPr/>
+        </p:nvSpPr>
+        <p:spPr>
+          <a:xfrm>
+            <a:off x="6355080" y="2651760"/>
+            <a:ext cx="5074920" cy="3419856"/>
+          </a:xfrm>
+          <a:prstGeom prst="rect">
+            <a:avLst/>
+          </a:prstGeom>
+          <a:noFill/>
+          <a:ln/>
+        </p:spPr>
+        <p:txBody>
+          <a:bodyPr wrap="square" lIns="0" tIns="0" rIns="0" bIns="0" rtlCol="0" anchor="t"/>
+          <a:lstStyle/>
+          <a:p>
+            <a:pPr marL="165100" indent="-165100">
+              <a:lnSpc>
+                <a:spcPct val="100000"/>
+              </a:lnSpc>
+              <a:spcAft>
+                <a:spcPts val="400"/>
+              </a:spcAft>
+              <a:buSzPct val="100000"/>
+              <a:buChar char="•"/>
+            </a:pPr>
+            <a:r>
+              <a:rPr lang="en-US" sz="1100" dirty="0">
+                <a:solidFill>
+                  <a:srgbClr val="FFFFFF"/>
+                </a:solidFill>
+                <a:latin typeface="Calibri" pitchFamily="34" charset="0"/>
+                <a:ea typeface="Calibri" pitchFamily="34" charset="-122"/>
+                <a:cs typeface="Calibri" pitchFamily="34" charset="-120"/>
+              </a:rPr>
+              <a:t>musicPath() — เพลง Bonetrousle</a:t>
+            </a:r>
+            <a:endParaRPr lang="en-US" sz="1100" dirty="0"/>
+          </a:p>
+          <a:p>
+            <a:pPr marL="165100" indent="-165100">
+              <a:lnSpc>
+                <a:spcPct val="100000"/>
+              </a:lnSpc>
+              <a:spcAft>
+                <a:spcPts val="400"/>
+              </a:spcAft>
+              <a:buSzPct val="100000"/>
+              <a:buChar char="•"/>
+            </a:pPr>
+            <a:r>
+              <a:rPr lang="en-US" sz="1100" dirty="0">
+                <a:solidFill>
+                  <a:srgbClr val="FFFFFF"/>
+                </a:solidFill>
+                <a:latin typeface="Calibri" pitchFamily="34" charset="0"/>
+                <a:ea typeface="Calibri" pitchFamily="34" charset="-122"/>
+                <a:cs typeface="Calibri" pitchFamily="34" charset="-120"/>
+              </a:rPr>
+              <a:t>chooseAttack() — เลือก layout ตาม fighto</a:t>
+            </a:r>
+            <a:endParaRPr lang="en-US" sz="1100" dirty="0"/>
+          </a:p>
+          <a:p>
+            <a:pPr marL="165100" indent="-165100">
+              <a:lnSpc>
+                <a:spcPct val="100000"/>
+              </a:lnSpc>
+              <a:spcAft>
+                <a:spcPts val="400"/>
+              </a:spcAft>
+              <a:buSzPct val="100000"/>
+              <a:buChar char="•"/>
+            </a:pPr>
+            <a:r>
+              <a:rPr lang="en-US" sz="1100" dirty="0">
+                <a:solidFill>
+                  <a:srgbClr val="FFFFFF"/>
+                </a:solidFill>
+                <a:latin typeface="Calibri" pitchFamily="34" charset="0"/>
+                <a:ea typeface="Calibri" pitchFamily="34" charset="-122"/>
+                <a:cs typeface="Calibri" pitchFamily="34" charset="-120"/>
+              </a:rPr>
+              <a:t>update() — ขับคัตซีน bonetalk/หมา</a:t>
+            </a:r>
+            <a:endParaRPr lang="en-US" sz="1100" dirty="0"/>
+          </a:p>
+          <a:p>
+            <a:pPr marL="165100" indent="-165100">
+              <a:lnSpc>
+                <a:spcPct val="100000"/>
+              </a:lnSpc>
+              <a:spcAft>
+                <a:spcPts val="400"/>
+              </a:spcAft>
+              <a:buSzPct val="100000"/>
+              <a:buChar char="•"/>
+            </a:pPr>
+            <a:r>
+              <a:rPr lang="en-US" sz="1100" dirty="0">
+                <a:solidFill>
+                  <a:srgbClr val="FFFFFF"/>
+                </a:solidFill>
+                <a:latin typeface="Calibri" pitchFamily="34" charset="0"/>
+                <a:ea typeface="Calibri" pitchFamily="34" charset="-122"/>
+                <a:cs typeface="Calibri" pitchFamily="34" charset="-120"/>
+              </a:rPr>
+              <a:t>onAct(whatiheard) — กราฟ ACT (flirt ฯลฯ)</a:t>
+            </a:r>
+            <a:endParaRPr lang="en-US" sz="1100" dirty="0"/>
+          </a:p>
+          <a:p>
+            <a:pPr marL="165100" indent="-165100">
+              <a:lnSpc>
+                <a:spcPct val="100000"/>
+              </a:lnSpc>
+              <a:spcAft>
+                <a:spcPts val="400"/>
+              </a:spcAft>
+              <a:buSzPct val="100000"/>
+              <a:buChar char="•"/>
+            </a:pPr>
+            <a:r>
+              <a:rPr lang="en-US" sz="1100" dirty="0">
+                <a:solidFill>
+                  <a:srgbClr val="FFFFFF"/>
+                </a:solidFill>
+                <a:latin typeface="Calibri" pitchFamily="34" charset="0"/>
+                <a:ea typeface="Calibri" pitchFamily="34" charset="-122"/>
+                <a:cs typeface="Calibri" pitchFamily="34" charset="-120"/>
+              </a:rPr>
+              <a:t>onSpare() — รับการไว้ชีวิต</a:t>
+            </a:r>
+            <a:endParaRPr lang="en-US" sz="1100" dirty="0"/>
+          </a:p>
+          <a:p>
+            <a:pPr marL="165100" indent="-165100">
+              <a:lnSpc>
+                <a:spcPct val="100000"/>
+              </a:lnSpc>
+              <a:spcAft>
+                <a:spcPts val="400"/>
+              </a:spcAft>
+              <a:buSzPct val="100000"/>
+              <a:buChar char="•"/>
+            </a:pPr>
+            <a:r>
+              <a:rPr lang="en-US" sz="1100" dirty="0">
+                <a:solidFill>
+                  <a:srgbClr val="FFFFFF"/>
+                </a:solidFill>
+                <a:latin typeface="Calibri" pitchFamily="34" charset="0"/>
+                <a:ea typeface="Calibri" pitchFamily="34" charset="-122"/>
+                <a:cs typeface="Calibri" pitchFamily="34" charset="-120"/>
+              </a:rPr>
+              <a:t>onDefeat() — คัตซีนหัวขาด (decapitation) ก่อนจบเอง</a:t>
+            </a:r>
+            <a:endParaRPr lang="en-US" sz="1100" dirty="0"/>
+          </a:p>
+          <a:p>
+            <a:pPr marL="165100" indent="-165100">
+              <a:lnSpc>
+                <a:spcPct val="100000"/>
+              </a:lnSpc>
+              <a:spcAft>
+                <a:spcPts val="400"/>
+              </a:spcAft>
+              <a:buSzPct val="100000"/>
+              <a:buChar char="•"/>
+            </a:pPr>
+            <a:r>
+              <a:rPr lang="en-US" sz="1100" dirty="0">
+                <a:solidFill>
+                  <a:srgbClr val="FFFFFF"/>
+                </a:solidFill>
+                <a:latin typeface="Calibri" pitchFamily="34" charset="0"/>
+                <a:ea typeface="Calibri" pitchFamily="34" charset="-122"/>
+                <a:cs typeface="Calibri" pitchFamily="34" charset="-120"/>
+              </a:rPr>
+              <a:t>introComplete() — เปิดเมนูเมื่ออินโทรจบ</a:t>
+            </a:r>
+            <a:endParaRPr lang="en-US" sz="1100" dirty="0"/>
+          </a:p>
+          <a:p>
+            <a:pPr marL="165100" indent="-165100">
+              <a:lnSpc>
+                <a:spcPct val="100000"/>
+              </a:lnSpc>
+              <a:spcAft>
+                <a:spcPts val="400"/>
+              </a:spcAft>
+              <a:buSzPct val="100000"/>
+              <a:buChar char="•"/>
+            </a:pPr>
+            <a:r>
+              <a:rPr lang="en-US" sz="1100" dirty="0">
+                <a:solidFill>
+                  <a:srgbClr val="FFFFFF"/>
+                </a:solidFill>
+                <a:latin typeface="Calibri" pitchFamily="34" charset="0"/>
+                <a:ea typeface="Calibri" pitchFamily="34" charset="-122"/>
+                <a:cs typeface="Calibri" pitchFamily="34" charset="-120"/>
+              </a:rPr>
+              <a:t>render() — วาดบอส + กระดูก (~500 บรรทัด)</a:t>
+            </a:r>
+            <a:endParaRPr lang="en-US" sz="1100" dirty="0"/>
+          </a:p>
+          <a:p>
+            <a:pPr indent="0" marL="0">
+              <a:lnSpc>
+                <a:spcPct val="100000"/>
+              </a:lnSpc>
+              <a:buNone/>
+            </a:pPr>
+            <a:r>
+              <a:rPr lang="en-US" sz="1050" i="1" dirty="0">
+                <a:solidFill>
+                  <a:srgbClr val="FFD43B"/>
+                </a:solidFill>
+                <a:latin typeface="Calibri" pitchFamily="34" charset="0"/>
+                <a:ea typeface="Calibri" pitchFamily="34" charset="-122"/>
+                <a:cs typeface="Calibri" pitchFamily="34" charset="-120"/>
+              </a:rPr>
+              <a:t>โหมด GENOCIDE: murderlv ≥ 7 → ล้มหมัดเดียว + บทพูด 'I believe in you' เปลี่ยนไป</a:t>
+            </a:r>
+            <a:endParaRPr lang="en-US" sz="1100" dirty="0"/>
+          </a:p>
+        </p:txBody>
+      </p:sp>
+      <p:sp>
+        <p:nvSpPr>
+          <p:cNvPr id="14" name="Text 12"/>
+          <p:cNvSpPr/>
+          <p:nvPr/>
+        </p:nvSpPr>
+        <p:spPr>
+          <a:xfrm>
+            <a:off x="548640" y="6382512"/>
+            <a:ext cx="11064240" cy="384048"/>
+          </a:xfrm>
+          <a:prstGeom prst="rect">
+            <a:avLst/>
+          </a:prstGeom>
+          <a:noFill/>
+          <a:ln/>
+        </p:spPr>
+        <p:txBody>
+          <a:bodyPr wrap="square" lIns="0" tIns="0" rIns="0" bIns="0" rtlCol="0" anchor="ctr"/>
+          <a:lstStyle/>
+          <a:p>
+            <a:pPr algn="ctr" indent="0" marL="0">
+              <a:buNone/>
+            </a:pPr>
+            <a:r>
+              <a:rPr lang="en-US" sz="1150" i="1" dirty="0">
+                <a:solidFill>
+                  <a:srgbClr val="FFD43B"/>
+                </a:solidFill>
+                <a:latin typeface="Courier New" pitchFamily="34" charset="0"/>
+                <a:ea typeface="Courier New" pitchFamily="34" charset="-122"/>
+                <a:cs typeface="Courier New" pitchFamily="34" charset="-120"/>
+              </a:rPr>
+              <a:t>868 บรรทัด — ใช้ระบบ Core ครบ: BLUE soul · fighto state machine · Sequence (bonetalk) · AnnoyingDog entity · กระดูกจาก bullet/bones</a:t>
+            </a:r>
+            <a:endParaRPr lang="en-US" sz="1150" dirty="0"/>
+          </a:p>
+        </p:txBody>
+      </p:sp>
+    </p:spTree>
+  </p:cSld>
+  <p:clrMapOvr>
+    <a:masterClrMapping/>
+  </p:clrMapOvr>
+</p:sld>
+</file>
+
+<file path=ppt/slides/slide14.xml><?xml version="1.0" encoding="utf-8"?>
 <p:sld xmlns:a="http://schemas.openxmlformats.org/drawingml/2006/main" xmlns:r="http://schemas.openxmlformats.org/officeDocument/2006/relationships" xmlns:p="http://schemas.openxmlformats.org/presentationml/2006/main">
   <p:cSld name="Slide 13">
     <p:bg>
@@ -6311,7 +7271,7 @@
                 <a:ea typeface="Courier New" pitchFamily="34" charset="-122"/>
                 <a:cs typeface="Courier New" pitchFamily="34" charset="-120"/>
               </a:rPr>
-              <a:t>เจาะลึกบอส 3/5 — ยากที่สุด</a:t>
+              <a:t>เจาะลึกบอส 3/6 — ยากที่สุด</a:t>
             </a:r>
             <a:endParaRPr lang="en-US" sz="1200" dirty="0"/>
           </a:p>
@@ -6430,6 +7390,10 @@
             </a:outerShdw>
           </a:effectLst>
         </p:spPr>
+        <p:txBody>
+          <a:bodyPr/>
+          <a:p/>
+        </p:txBody>
       </p:sp>
       <p:sp>
         <p:nvSpPr>
@@ -6671,6 +7635,10 @@
             </a:outerShdw>
           </a:effectLst>
         </p:spPr>
+        <p:txBody>
+          <a:bodyPr/>
+          <a:p/>
+        </p:txBody>
       </p:sp>
       <p:sp>
         <p:nvSpPr>
@@ -6912,6 +7880,10 @@
             </a:outerShdw>
           </a:effectLst>
         </p:spPr>
+        <p:txBody>
+          <a:bodyPr/>
+          <a:p/>
+        </p:txBody>
       </p:sp>
       <p:sp>
         <p:nvSpPr>
@@ -7165,7 +8137,7 @@
 </p:sld>
 </file>
 
-<file path=ppt/slides/slide14.xml><?xml version="1.0" encoding="utf-8"?>
+<file path=ppt/slides/slide15.xml><?xml version="1.0" encoding="utf-8"?>
 <p:sld xmlns:a="http://schemas.openxmlformats.org/drawingml/2006/main" xmlns:r="http://schemas.openxmlformats.org/officeDocument/2006/relationships" xmlns:p="http://schemas.openxmlformats.org/presentationml/2006/main">
   <p:cSld name="Slide 14">
     <p:bg>
@@ -7222,7 +8194,7 @@
                 <a:ea typeface="Courier New" pitchFamily="34" charset="-122"/>
                 <a:cs typeface="Courier New" pitchFamily="34" charset="-120"/>
               </a:rPr>
-              <a:t>เจาะลึกบอส 4/5</a:t>
+              <a:t>เจาะลึกบอส 4/6</a:t>
             </a:r>
             <a:endParaRPr lang="en-US" sz="1200" dirty="0"/>
           </a:p>
@@ -7302,6 +8274,10 @@
             </a:outerShdw>
           </a:effectLst>
         </p:spPr>
+        <p:txBody>
+          <a:bodyPr/>
+          <a:p/>
+        </p:txBody>
       </p:sp>
       <p:sp>
         <p:nvSpPr>
@@ -7607,6 +8583,10 @@
             </a:outerShdw>
           </a:effectLst>
         </p:spPr>
+        <p:txBody>
+          <a:bodyPr/>
+          <a:p/>
+        </p:txBody>
       </p:sp>
       <p:sp>
         <p:nvSpPr>
@@ -7861,7 +8841,7 @@
 </p:sld>
 </file>
 
-<file path=ppt/slides/slide15.xml><?xml version="1.0" encoding="utf-8"?>
+<file path=ppt/slides/slide16.xml><?xml version="1.0" encoding="utf-8"?>
 <p:sld xmlns:a="http://schemas.openxmlformats.org/drawingml/2006/main" xmlns:r="http://schemas.openxmlformats.org/officeDocument/2006/relationships" xmlns:p="http://schemas.openxmlformats.org/presentationml/2006/main">
   <p:cSld name="Slide 15">
     <p:bg>
@@ -7918,7 +8898,7 @@
                 <a:ea typeface="Courier New" pitchFamily="34" charset="-122"/>
                 <a:cs typeface="Courier New" pitchFamily="34" charset="-120"/>
               </a:rPr>
-              <a:t>เจาะลึกบอส 5/5</a:t>
+              <a:t>เจาะลึกบอส 5/6</a:t>
             </a:r>
             <a:endParaRPr lang="en-US" sz="1200" dirty="0"/>
           </a:p>
@@ -7998,6 +8978,10 @@
             </a:outerShdw>
           </a:effectLst>
         </p:spPr>
+        <p:txBody>
+          <a:bodyPr/>
+          <a:p/>
+        </p:txBody>
       </p:sp>
       <p:sp>
         <p:nvSpPr>
@@ -8259,6 +9243,10 @@
             </a:outerShdw>
           </a:effectLst>
         </p:spPr>
+        <p:txBody>
+          <a:bodyPr/>
+          <a:p/>
+        </p:txBody>
       </p:sp>
       <p:sp>
         <p:nvSpPr>
@@ -8516,6 +9504,10 @@
             </a:outerShdw>
           </a:effectLst>
         </p:spPr>
+        <p:txBody>
+          <a:bodyPr/>
+          <a:p/>
+        </p:txBody>
       </p:sp>
       <p:sp>
         <p:nvSpPr>
@@ -8774,7 +9766,939 @@
 </p:sld>
 </file>
 
-<file path=ppt/slides/slide16.xml><?xml version="1.0" encoding="utf-8"?>
+<file path=ppt/slides/slide17.xml><?xml version="1.0" encoding="utf-8"?>
+<p:sld xmlns:a="http://schemas.openxmlformats.org/drawingml/2006/main" xmlns:p="http://schemas.openxmlformats.org/presentationml/2006/main" xmlns:r="http://schemas.openxmlformats.org/officeDocument/2006/relationships">
+  <p:cSld>
+    <p:spTree>
+      <p:nvGrpSpPr>
+        <p:cNvPr id="1" name=""/>
+        <p:cNvGrpSpPr/>
+        <p:nvPr/>
+      </p:nvGrpSpPr>
+      <p:grpSpPr/>
+      <p:sp>
+        <p:nvSpPr>
+          <p:cNvPr id="2" name="Text 0"/>
+          <p:cNvSpPr/>
+          <p:nvPr/>
+        </p:nvSpPr>
+        <p:spPr>
+          <a:xfrm>
+            <a:off x="548640" y="365760"/>
+            <a:ext cx="10058400" cy="365760"/>
+          </a:xfrm>
+          <a:prstGeom prst="rect">
+            <a:avLst/>
+          </a:prstGeom>
+          <a:noFill/>
+          <a:ln/>
+        </p:spPr>
+        <p:txBody>
+          <a:bodyPr wrap="square" lIns="0" tIns="0" rIns="0" bIns="0" rtlCol="0" anchor="ctr"/>
+          <a:lstStyle/>
+          <a:p>
+            <a:pPr indent="0" marL="0">
+              <a:buNone/>
+            </a:pPr>
+            <a:r>
+              <a:rPr lang="en-US" sz="1200" b="1" spc="300" kern="0" dirty="0">
+                <a:solidFill>
+                  <a:srgbClr val="FFD43B"/>
+                </a:solidFill>
+                <a:latin typeface="Courier New" pitchFamily="34" charset="0"/>
+                <a:ea typeface="Courier New" pitchFamily="34" charset="-122"/>
+                <a:cs typeface="Courier New" pitchFamily="34" charset="-120"/>
+              </a:rPr>
+              <a:t>เจาะลึกบอส 6/6 — ฉากจบ</a:t>
+            </a:r>
+          </a:p>
+        </p:txBody>
+      </p:sp>
+      <p:sp>
+        <p:nvSpPr>
+          <p:cNvPr id="3" name="Text 1"/>
+          <p:cNvSpPr/>
+          <p:nvPr/>
+        </p:nvSpPr>
+        <p:spPr>
+          <a:xfrm>
+            <a:off x="548640" y="658368"/>
+            <a:ext cx="11064240" cy="731520"/>
+          </a:xfrm>
+          <a:prstGeom prst="rect">
+            <a:avLst/>
+          </a:prstGeom>
+          <a:noFill/>
+          <a:ln/>
+        </p:spPr>
+        <p:txBody>
+          <a:bodyPr wrap="square" lIns="0" tIns="0" rIns="0" bIns="0" rtlCol="0" anchor="ctr"/>
+          <a:lstStyle/>
+          <a:p>
+            <a:pPr indent="0" marL="0">
+              <a:buNone/>
+            </a:pPr>
+            <a:r>
+              <a:rPr lang="en-US" sz="2800" b="1" dirty="0">
+                <a:solidFill>
+                  <a:srgbClr val="FFFFFF"/>
+                </a:solidFill>
+                <a:latin typeface="Calibri" pitchFamily="34" charset="0"/>
+                <a:ea typeface="Calibri" pitchFamily="34" charset="-122"/>
+                <a:cs typeface="Calibri" pitchFamily="34" charset="-120"/>
+              </a:rPr>
+              <a:t>Asriel Dreemurr (obj_asrielb → obj_asrielfinal) — ฉากจบสองพาร์ต</a:t>
+            </a:r>
+          </a:p>
+        </p:txBody>
+      </p:sp>
+      <p:sp>
+        <p:nvSpPr>
+          <p:cNvPr id="4" name="Shape 2"/>
+          <p:cNvSpPr/>
+          <p:nvPr/>
+        </p:nvSpPr>
+        <p:spPr>
+          <a:xfrm>
+            <a:off x="548640" y="1572768"/>
+            <a:ext cx="3657600" cy="4617720"/>
+          </a:xfrm>
+          <a:prstGeom prst="roundRect">
+            <a:avLst>
+              <a:gd name="adj" fmla="val 1750"/>
+            </a:avLst>
+          </a:prstGeom>
+          <a:solidFill>
+            <a:srgbClr val="16181D"/>
+          </a:solidFill>
+          <a:ln w="12700">
+            <a:solidFill>
+              <a:srgbClr val="FFD43B">
+                <a:alpha val="65000"/>
+              </a:srgbClr>
+            </a:solidFill>
+            <a:prstDash val="solid"/>
+          </a:ln>
+          <a:effectLst>
+            <a:outerShdw sx="100000" sy="100000" kx="0" ky="0" algn="bl" rotWithShape="0" blurRad="101600" dist="38100" dir="5400000">
+              <a:srgbClr val="000000">
+                <a:alpha val="50000"/>
+              </a:srgbClr>
+            </a:outerShdw>
+          </a:effectLst>
+        </p:spPr>
+        <p:txBody>
+          <a:bodyPr/>
+          <a:p/>
+        </p:txBody>
+      </p:sp>
+      <p:sp>
+        <p:nvSpPr>
+          <p:cNvPr id="5" name="Text 3"/>
+          <p:cNvSpPr/>
+          <p:nvPr/>
+        </p:nvSpPr>
+        <p:spPr>
+          <a:xfrm>
+            <a:off x="731520" y="1682496"/>
+            <a:ext cx="3291840" cy="329184"/>
+          </a:xfrm>
+          <a:prstGeom prst="rect">
+            <a:avLst/>
+          </a:prstGeom>
+          <a:noFill/>
+          <a:ln/>
+        </p:spPr>
+        <p:txBody>
+          <a:bodyPr wrap="square" lIns="0" tIns="0" rIns="0" bIns="0" rtlCol="0" anchor="ctr"/>
+          <a:lstStyle/>
+          <a:p>
+            <a:pPr indent="0" marL="0">
+              <a:buNone/>
+            </a:pPr>
+            <a:r>
+              <a:rPr lang="en-US" sz="1350" b="1" dirty="0">
+                <a:solidFill>
+                  <a:srgbClr val="FFD43B"/>
+                </a:solidFill>
+                <a:latin typeface="Courier New" pitchFamily="34" charset="0"/>
+                <a:ea typeface="Courier New" pitchFamily="34" charset="-122"/>
+                <a:cs typeface="Courier New" pitchFamily="34" charset="-120"/>
+              </a:rPr>
+              <a:t>Part A — GOD of Hyperdeath (810)</a:t>
+            </a:r>
+          </a:p>
+        </p:txBody>
+      </p:sp>
+      <p:sp>
+        <p:nvSpPr>
+          <p:cNvPr id="6" name="Text 4"/>
+          <p:cNvSpPr/>
+          <p:nvPr/>
+        </p:nvSpPr>
+        <p:spPr>
+          <a:xfrm>
+            <a:off x="731520" y="2075688"/>
+            <a:ext cx="3291840" cy="4014216"/>
+          </a:xfrm>
+          <a:prstGeom prst="rect">
+            <a:avLst/>
+          </a:prstGeom>
+          <a:noFill/>
+          <a:ln/>
+        </p:spPr>
+        <p:txBody>
+          <a:bodyPr wrap="square" lIns="0" tIns="0" rIns="0" bIns="0" rtlCol="0" anchor="t">
+            <a:normAutofit/>
+          </a:bodyPr>
+          <a:lstStyle/>
+          <a:p>
+            <a:pPr indent="0" marL="0">
+              <a:lnSpc>
+                <a:spcPct val="100000"/>
+              </a:lnSpc>
+              <a:buNone/>
+            </a:pPr>
+            <a:r>
+              <a:rPr lang="en-US" sz="1080" b="1" dirty="0">
+                <a:solidFill>
+                  <a:srgbClr val="FFD43B"/>
+                </a:solidFill>
+                <a:latin typeface="Calibri" pitchFamily="34" charset="0"/>
+                <a:ea typeface="Calibri" pitchFamily="34" charset="-122"/>
+                <a:cs typeface="Calibri" pitchFamily="34" charset="-120"/>
+              </a:rPr>
+              <a:t>HP 9999 / DEF 9999 — ฆ่าไม่ได้ ไว้ชีวิตไม่ได้ (mercymod ติดลบมหาศาล)</a:t>
+            </a:r>
+          </a:p>
+          <a:p>
+            <a:pPr indent="0" marL="0">
+              <a:lnSpc>
+                <a:spcPct val="100000"/>
+              </a:lnSpc>
+              <a:buNone/>
+            </a:pPr>
+            <a:r>
+              <a:rPr lang="en-US" sz="1080" b="1" dirty="0">
+                <a:solidFill>
+                  <a:srgbClr val="FFD43B"/>
+                </a:solidFill>
+                <a:latin typeface="Calibri" pitchFamily="34" charset="0"/>
+                <a:ea typeface="Calibri" pitchFamily="34" charset="-122"/>
+                <a:cs typeface="Calibri" pitchFamily="34" charset="-120"/>
+              </a:rPr>
+              <a:t>ตัวนับ turns 0→13 ไล่ตารางท่าโจมตีตายตัว</a:t>
+            </a:r>
+          </a:p>
+          <a:p>
+            <a:pPr indent="0" marL="0">
+              <a:lnSpc>
+                <a:spcPct val="100000"/>
+              </a:lnSpc>
+              <a:buNone/>
+            </a:pPr>
+            <a:r>
+              <a:rPr lang="en-US" sz="1080" b="1" dirty="0">
+                <a:solidFill>
+                  <a:srgbClr val="FFD43B"/>
+                </a:solidFill>
+                <a:latin typeface="Calibri" pitchFamily="34" charset="0"/>
+                <a:ea typeface="Calibri" pitchFamily="34" charset="-122"/>
+                <a:cs typeface="Calibri" pitchFamily="34" charset="-120"/>
+              </a:rPr>
+              <a:t>อินโทรไฟเวทสงบ (fire-helix ขาวบนพื้นดำ) → ด่านจักรวาล</a:t>
+            </a:r>
+          </a:p>
+          <a:p>
+            <a:pPr indent="0" marL="0">
+              <a:lnSpc>
+                <a:spcPct val="100000"/>
+              </a:lnSpc>
+              <a:buNone/>
+            </a:pPr>
+            <a:r>
+              <a:rPr lang="en-US" sz="1080" b="1" dirty="0">
+                <a:solidFill>
+                  <a:srgbClr val="FFD43B"/>
+                </a:solidFill>
+                <a:latin typeface="Calibri" pitchFamily="34" charset="0"/>
+                <a:ea typeface="Calibri" pitchFamily="34" charset="-122"/>
+                <a:cs typeface="Calibri" pitchFamily="34" charset="-120"/>
+              </a:rPr>
+              <a:t>STAR / GALACTA BLAZING — ดาวรุ้งตก + ดาวใหญ่ปิดท้าย (t 0/4/9)</a:t>
+            </a:r>
+          </a:p>
+          <a:p>
+            <a:pPr indent="0" marL="0">
+              <a:lnSpc>
+                <a:spcPct val="100000"/>
+              </a:lnSpc>
+              <a:buNone/>
+            </a:pPr>
+            <a:r>
+              <a:rPr lang="en-US" sz="1080" b="1" dirty="0">
+                <a:solidFill>
+                  <a:srgbClr val="FFD43B"/>
+                </a:solidFill>
+                <a:latin typeface="Calibri" pitchFamily="34" charset="0"/>
+                <a:ea typeface="Calibri" pitchFamily="34" charset="-122"/>
+                <a:cs typeface="Calibri" pitchFamily="34" charset="-120"/>
+              </a:rPr>
+              <a:t>SHOCKER BREAKER (II) — เสาสายฟ้ารุ้ง เจ็บเฉพาะตอนวาบ</a:t>
+            </a:r>
+          </a:p>
+          <a:p>
+            <a:pPr indent="0" marL="0">
+              <a:lnSpc>
+                <a:spcPct val="100000"/>
+              </a:lnSpc>
+              <a:buNone/>
+            </a:pPr>
+            <a:r>
+              <a:rPr lang="en-US" sz="1080" b="1" dirty="0">
+                <a:solidFill>
+                  <a:srgbClr val="FFD43B"/>
+                </a:solidFill>
+                <a:latin typeface="Calibri" pitchFamily="34" charset="0"/>
+                <a:ea typeface="Calibri" pitchFamily="34" charset="-122"/>
+                <a:cs typeface="Calibri" pitchFamily="34" charset="-120"/>
+              </a:rPr>
+              <a:t>CHAOS SABER / SLICER — แขนดาบฟันในกล่องเตี้ย (t 2/6/10)</a:t>
+            </a:r>
+          </a:p>
+          <a:p>
+            <a:pPr indent="0" marL="0">
+              <a:lnSpc>
+                <a:spcPct val="100000"/>
+              </a:lnSpc>
+              <a:buNone/>
+            </a:pPr>
+            <a:r>
+              <a:rPr lang="en-US" sz="1080" b="1" dirty="0">
+                <a:solidFill>
+                  <a:srgbClr val="FFD43B"/>
+                </a:solidFill>
+                <a:latin typeface="Calibri" pitchFamily="34" charset="0"/>
+                <a:ea typeface="Calibri" pitchFamily="34" charset="-122"/>
+                <a:cs typeface="Calibri" pitchFamily="34" charset="-120"/>
+              </a:rPr>
+              <a:t>CHAOS BUSTER / BLASTER — แขนปืนยิงระลอก → ลำแสงใหญ่ (t 5/7/11)</a:t>
+            </a:r>
+          </a:p>
+          <a:p>
+            <a:pPr indent="0" marL="0">
+              <a:lnSpc>
+                <a:spcPct val="100000"/>
+              </a:lnSpc>
+              <a:buNone/>
+            </a:pPr>
+            <a:r>
+              <a:rPr lang="en-US" sz="1080" b="1" dirty="0">
+                <a:solidFill>
+                  <a:srgbClr val="FFD43B"/>
+                </a:solidFill>
+                <a:latin typeface="Calibri" pitchFamily="34" charset="0"/>
+                <a:ea typeface="Calibri" pitchFamily="34" charset="-122"/>
+                <a:cs typeface="Calibri" pitchFamily="34" charset="-120"/>
+              </a:rPr>
+              <a:t>h_mode ท่ายากเมื่อ turns ≥ 8</a:t>
+            </a:r>
+          </a:p>
+          <a:p>
+            <a:pPr indent="0" marL="0">
+              <a:lnSpc>
+                <a:spcPct val="100000"/>
+              </a:lnSpc>
+              <a:buNone/>
+            </a:pPr>
+            <a:r>
+              <a:rPr lang="en-US" sz="1080" b="1" dirty="0">
+                <a:solidFill>
+                  <a:srgbClr val="FFD43B"/>
+                </a:solidFill>
+                <a:latin typeface="Calibri" pitchFamily="34" charset="0"/>
+                <a:ea typeface="Calibri" pitchFamily="34" charset="-122"/>
+                <a:cs typeface="Calibri" pitchFamily="34" charset="-120"/>
+              </a:rPr>
+              <a:t>ACT Hope (ลด ATK 8→6 + ฮีล) / Dream (ฮีล)</a:t>
+            </a:r>
+          </a:p>
+          <a:p>
+            <a:pPr indent="0" marL="0">
+              <a:lnSpc>
+                <a:spcPct val="100000"/>
+              </a:lnSpc>
+              <a:buNone/>
+            </a:pPr>
+            <a:r>
+              <a:rPr lang="en-US" sz="1080" b="1" dirty="0">
+                <a:solidFill>
+                  <a:srgbClr val="FFD43B"/>
+                </a:solidFill>
+                <a:latin typeface="Calibri" pitchFamily="34" charset="0"/>
+                <a:ea typeface="Calibri" pitchFamily="34" charset="-122"/>
+                <a:cs typeface="Calibri" pitchFamily="34" charset="-120"/>
+              </a:rPr>
+              <a:t>t==13 HYPER GONER (กล่อง→เต็มจอ, HP ค้างที่ 1) → แปลงร่าง</a:t>
+            </a:r>
+          </a:p>
+        </p:txBody>
+      </p:sp>
+      <p:sp>
+        <p:nvSpPr>
+          <p:cNvPr id="7" name="Shape 5"/>
+          <p:cNvSpPr/>
+          <p:nvPr/>
+        </p:nvSpPr>
+        <p:spPr>
+          <a:xfrm>
+            <a:off x="4297680" y="1572768"/>
+            <a:ext cx="3657600" cy="4617720"/>
+          </a:xfrm>
+          <a:prstGeom prst="roundRect">
+            <a:avLst>
+              <a:gd name="adj" fmla="val 1750"/>
+            </a:avLst>
+          </a:prstGeom>
+          <a:solidFill>
+            <a:srgbClr val="16181D"/>
+          </a:solidFill>
+          <a:ln w="12700">
+            <a:solidFill>
+              <a:srgbClr val="FF2E2E">
+                <a:alpha val="65000"/>
+              </a:srgbClr>
+            </a:solidFill>
+            <a:prstDash val="solid"/>
+          </a:ln>
+          <a:effectLst>
+            <a:outerShdw sx="100000" sy="100000" kx="0" ky="0" algn="bl" rotWithShape="0" blurRad="101600" dist="38100" dir="5400000">
+              <a:srgbClr val="000000">
+                <a:alpha val="50000"/>
+              </a:srgbClr>
+            </a:outerShdw>
+          </a:effectLst>
+        </p:spPr>
+        <p:txBody>
+          <a:bodyPr/>
+          <a:p/>
+        </p:txBody>
+      </p:sp>
+      <p:sp>
+        <p:nvSpPr>
+          <p:cNvPr id="8" name="Text 6"/>
+          <p:cNvSpPr/>
+          <p:nvPr/>
+        </p:nvSpPr>
+        <p:spPr>
+          <a:xfrm>
+            <a:off x="4480560" y="1682496"/>
+            <a:ext cx="3291840" cy="329184"/>
+          </a:xfrm>
+          <a:prstGeom prst="rect">
+            <a:avLst/>
+          </a:prstGeom>
+          <a:noFill/>
+          <a:ln/>
+        </p:spPr>
+        <p:txBody>
+          <a:bodyPr wrap="square" lIns="0" tIns="0" rIns="0" bIns="0" rtlCol="0" anchor="ctr"/>
+          <a:lstStyle/>
+          <a:p>
+            <a:pPr indent="0" marL="0">
+              <a:buNone/>
+            </a:pPr>
+            <a:r>
+              <a:rPr lang="en-US" sz="1350" b="1" dirty="0">
+                <a:solidFill>
+                  <a:srgbClr val="FF2E2E"/>
+                </a:solidFill>
+                <a:latin typeface="Courier New" pitchFamily="34" charset="0"/>
+                <a:ea typeface="Courier New" pitchFamily="34" charset="-122"/>
+                <a:cs typeface="Courier New" pitchFamily="34" charset="-120"/>
+              </a:rPr>
+              <a:t>Part B — Angel of Death / SAVE</a:t>
+            </a:r>
+          </a:p>
+        </p:txBody>
+      </p:sp>
+      <p:sp>
+        <p:nvSpPr>
+          <p:cNvPr id="9" name="Text 7"/>
+          <p:cNvSpPr/>
+          <p:nvPr/>
+        </p:nvSpPr>
+        <p:spPr>
+          <a:xfrm>
+            <a:off x="4480560" y="2075688"/>
+            <a:ext cx="3291840" cy="4014216"/>
+          </a:xfrm>
+          <a:prstGeom prst="rect">
+            <a:avLst/>
+          </a:prstGeom>
+          <a:noFill/>
+          <a:ln/>
+        </p:spPr>
+        <p:txBody>
+          <a:bodyPr wrap="square" lIns="0" tIns="0" rIns="0" bIns="0" rtlCol="0" anchor="t">
+            <a:normAutofit/>
+          </a:bodyPr>
+          <a:lstStyle/>
+          <a:p>
+            <a:pPr indent="0" marL="0">
+              <a:lnSpc>
+                <a:spcPct val="100000"/>
+              </a:lnSpc>
+              <a:buNone/>
+            </a:pPr>
+            <a:r>
+              <a:rPr lang="en-US" sz="1080" b="1" dirty="0">
+                <a:solidFill>
+                  <a:srgbClr val="FF2E2E"/>
+                </a:solidFill>
+                <a:latin typeface="Calibri" pitchFamily="34" charset="0"/>
+                <a:ea typeface="Calibri" pitchFamily="34" charset="-122"/>
+                <a:cs typeface="Calibri" pitchFamily="34" charset="-120"/>
+              </a:rPr>
+              <a:t>แปลงร่าง → ร่างปีก Angel of Death (AsrielFinalBody)</a:t>
+            </a:r>
+          </a:p>
+          <a:p>
+            <a:pPr indent="0" marL="0">
+              <a:lnSpc>
+                <a:spcPct val="100000"/>
+              </a:lnSpc>
+              <a:buNone/>
+            </a:pPr>
+            <a:r>
+              <a:rPr lang="en-US" sz="1080" b="1" dirty="0">
+                <a:solidFill>
+                  <a:srgbClr val="FF2E2E"/>
+                </a:solidFill>
+                <a:latin typeface="Calibri" pitchFamily="34" charset="0"/>
+                <a:ea typeface="Calibri" pitchFamily="34" charset="-122"/>
+                <a:cs typeface="Calibri" pitchFamily="34" charset="-120"/>
+              </a:rPr>
+              <a:t>แพ้ไม่ได้: onLethalDamage() → “But it refused.” เติม HP</a:t>
+            </a:r>
+          </a:p>
+          <a:p>
+            <a:pPr indent="0" marL="0">
+              <a:lnSpc>
+                <a:spcPct val="100000"/>
+              </a:lnSpc>
+              <a:buNone/>
+            </a:pPr>
+            <a:r>
+              <a:rPr lang="en-US" sz="1080" b="1" dirty="0">
+                <a:solidFill>
+                  <a:srgbClr val="FF2E2E"/>
+                </a:solidFill>
+                <a:latin typeface="Calibri" pitchFamily="34" charset="0"/>
+                <a:ea typeface="Calibri" pitchFamily="34" charset="-122"/>
+                <a:cs typeface="Calibri" pitchFamily="34" charset="-120"/>
+              </a:rPr>
+              <a:t>สเตจ 0 (flag[501]==0): กระสุนคอเมต token (AngelComet, dmg 1)</a:t>
+            </a:r>
+          </a:p>
+          <a:p>
+            <a:pPr indent="0" marL="0">
+              <a:lnSpc>
+                <a:spcPct val="100000"/>
+              </a:lnSpc>
+              <a:buNone/>
+            </a:pPr>
+            <a:r>
+              <a:rPr lang="en-US" sz="1080" b="1" dirty="0">
+                <a:solidFill>
+                  <a:srgbClr val="FF2E2E"/>
+                </a:solidFill>
+                <a:latin typeface="Calibri" pitchFamily="34" charset="0"/>
+                <a:ea typeface="Calibri" pitchFamily="34" charset="-122"/>
+                <a:cs typeface="Calibri" pitchFamily="34" charset="-120"/>
+              </a:rPr>
+              <a:t>FIGHT / Check ได้แค่ดิ้น (“Can’t move your body.”)</a:t>
+            </a:r>
+          </a:p>
+          <a:p>
+            <a:pPr indent="0" marL="0">
+              <a:lnSpc>
+                <a:spcPct val="100000"/>
+              </a:lnSpc>
+              <a:buNone/>
+            </a:pPr>
+            <a:r>
+              <a:rPr lang="en-US" sz="1080" b="1" dirty="0">
+                <a:solidFill>
+                  <a:srgbClr val="FF2E2E"/>
+                </a:solidFill>
+                <a:latin typeface="Calibri" pitchFamily="34" charset="0"/>
+                <a:ea typeface="Calibri" pitchFamily="34" charset="-122"/>
+                <a:cs typeface="Calibri" pitchFamily="34" charset="-120"/>
+              </a:rPr>
+              <a:t>ดิ้น ≥4 ครั้ง → ฉาก SAVE → flag[501]=1, คืน HP</a:t>
+            </a:r>
+          </a:p>
+          <a:p>
+            <a:pPr indent="0" marL="0">
+              <a:lnSpc>
+                <a:spcPct val="100000"/>
+              </a:lnSpc>
+              <a:buNone/>
+            </a:pPr>
+            <a:r>
+              <a:rPr lang="en-US" sz="1080" b="1" dirty="0">
+                <a:solidFill>
+                  <a:srgbClr val="FF2E2E"/>
+                </a:solidFill>
+                <a:latin typeface="Calibri" pitchFamily="34" charset="0"/>
+                <a:ea typeface="Calibri" pitchFamily="34" charset="-122"/>
+                <a:cs typeface="Calibri" pitchFamily="34" charset="-120"/>
+              </a:rPr>
+              <a:t>ปุ่ม ACT กลายเป็นปุ่ม SAVE รุ้ง (wantsSaveButton())</a:t>
+            </a:r>
+          </a:p>
+          <a:p>
+            <a:pPr indent="0" marL="0">
+              <a:lnSpc>
+                <a:spcPct val="100000"/>
+              </a:lnSpc>
+              <a:buNone/>
+            </a:pPr>
+            <a:r>
+              <a:rPr lang="en-US" sz="1080" b="1" dirty="0">
+                <a:solidFill>
+                  <a:srgbClr val="FF2E2E"/>
+                </a:solidFill>
+                <a:latin typeface="Calibri" pitchFamily="34" charset="0"/>
+                <a:ea typeface="Calibri" pitchFamily="34" charset="-122"/>
+                <a:cs typeface="Calibri" pitchFamily="34" charset="-120"/>
+              </a:rPr>
+              <a:t>SAVE เพื่อน 4 รายการ → ครบ → flag[501]=2</a:t>
+            </a:r>
+          </a:p>
+          <a:p>
+            <a:pPr indent="0" marL="0">
+              <a:lnSpc>
+                <a:spcPct val="100000"/>
+              </a:lnSpc>
+              <a:buNone/>
+            </a:pPr>
+            <a:r>
+              <a:rPr lang="en-US" sz="1080" b="1" dirty="0">
+                <a:solidFill>
+                  <a:srgbClr val="FF2E2E"/>
+                </a:solidFill>
+                <a:latin typeface="Calibri" pitchFamily="34" charset="0"/>
+                <a:ea typeface="Calibri" pitchFamily="34" charset="-122"/>
+                <a:cs typeface="Calibri" pitchFamily="34" charset="-120"/>
+              </a:rPr>
+              <a:t>“Someone else” = SAVE ตัว Asriel เอง → flag[501]=3</a:t>
+            </a:r>
+          </a:p>
+          <a:p>
+            <a:pPr indent="0" marL="0">
+              <a:lnSpc>
+                <a:spcPct val="100000"/>
+              </a:lnSpc>
+              <a:buNone/>
+            </a:pPr>
+            <a:r>
+              <a:rPr lang="en-US" sz="1080" b="1" dirty="0">
+                <a:solidFill>
+                  <a:srgbClr val="FF2E2E"/>
+                </a:solidFill>
+                <a:latin typeface="Calibri" pitchFamily="34" charset="0"/>
+                <a:ea typeface="Calibri" pitchFamily="34" charset="-122"/>
+                <a:cs typeface="Calibri" pitchFamily="34" charset="-120"/>
+              </a:rPr>
+              <a:t>คัตซีนพังทลาย → การ์ดชนะ (“You SAVED ASRIEL.”)</a:t>
+            </a:r>
+          </a:p>
+        </p:txBody>
+      </p:sp>
+      <p:sp>
+        <p:nvSpPr>
+          <p:cNvPr id="10" name="Shape 8"/>
+          <p:cNvSpPr/>
+          <p:nvPr/>
+        </p:nvSpPr>
+        <p:spPr>
+          <a:xfrm>
+            <a:off x="8046720" y="1572768"/>
+            <a:ext cx="3584448" cy="4617720"/>
+          </a:xfrm>
+          <a:prstGeom prst="roundRect">
+            <a:avLst>
+              <a:gd name="adj" fmla="val 1786"/>
+            </a:avLst>
+          </a:prstGeom>
+          <a:solidFill>
+            <a:srgbClr val="16181D"/>
+          </a:solidFill>
+          <a:ln w="12700">
+            <a:solidFill>
+              <a:srgbClr val="C77DFF">
+                <a:alpha val="65000"/>
+              </a:srgbClr>
+            </a:solidFill>
+            <a:prstDash val="solid"/>
+          </a:ln>
+          <a:effectLst>
+            <a:outerShdw sx="100000" sy="100000" kx="0" ky="0" algn="bl" rotWithShape="0" blurRad="101600" dist="38100" dir="5400000">
+              <a:srgbClr val="000000">
+                <a:alpha val="50000"/>
+              </a:srgbClr>
+            </a:outerShdw>
+          </a:effectLst>
+        </p:spPr>
+        <p:txBody>
+          <a:bodyPr/>
+          <a:p/>
+        </p:txBody>
+      </p:sp>
+      <p:sp>
+        <p:nvSpPr>
+          <p:cNvPr id="11" name="Text 9"/>
+          <p:cNvSpPr/>
+          <p:nvPr/>
+        </p:nvSpPr>
+        <p:spPr>
+          <a:xfrm>
+            <a:off x="8229600" y="1682496"/>
+            <a:ext cx="3218688" cy="329184"/>
+          </a:xfrm>
+          <a:prstGeom prst="rect">
+            <a:avLst/>
+          </a:prstGeom>
+          <a:noFill/>
+          <a:ln/>
+        </p:spPr>
+        <p:txBody>
+          <a:bodyPr wrap="square" lIns="0" tIns="0" rIns="0" bIns="0" rtlCol="0" anchor="ctr"/>
+          <a:lstStyle/>
+          <a:p>
+            <a:pPr indent="0" marL="0">
+              <a:buNone/>
+            </a:pPr>
+            <a:r>
+              <a:rPr lang="en-US" sz="1350" b="1" dirty="0">
+                <a:solidFill>
+                  <a:srgbClr val="C77DFF"/>
+                </a:solidFill>
+                <a:latin typeface="Courier New" pitchFamily="34" charset="0"/>
+                <a:ea typeface="Courier New" pitchFamily="34" charset="-122"/>
+                <a:cs typeface="Courier New" pitchFamily="34" charset="-120"/>
+              </a:rPr>
+              <a:t>4 Lost Souls (boss/asriel/)</a:t>
+            </a:r>
+          </a:p>
+        </p:txBody>
+      </p:sp>
+      <p:sp>
+        <p:nvSpPr>
+          <p:cNvPr id="12" name="Text 10"/>
+          <p:cNvSpPr/>
+          <p:nvPr/>
+        </p:nvSpPr>
+        <p:spPr>
+          <a:xfrm>
+            <a:off x="8229600" y="2075688"/>
+            <a:ext cx="3218688" cy="4014216"/>
+          </a:xfrm>
+          <a:prstGeom prst="rect">
+            <a:avLst/>
+          </a:prstGeom>
+          <a:noFill/>
+          <a:ln/>
+        </p:spPr>
+        <p:txBody>
+          <a:bodyPr wrap="square" lIns="0" tIns="0" rIns="0" bIns="0" rtlCol="0" anchor="t">
+            <a:normAutofit/>
+          </a:bodyPr>
+          <a:lstStyle/>
+          <a:p>
+            <a:pPr indent="0" marL="0">
+              <a:lnSpc>
+                <a:spcPct val="100000"/>
+              </a:lnSpc>
+              <a:buNone/>
+            </a:pPr>
+            <a:r>
+              <a:rPr lang="en-US" sz="1080" b="1" dirty="0">
+                <a:solidFill>
+                  <a:srgbClr val="C77DFF"/>
+                </a:solidFill>
+                <a:latin typeface="Calibri" pitchFamily="34" charset="0"/>
+                <a:ea typeface="Calibri" pitchFamily="34" charset="-122"/>
+                <a:cs typeface="Calibri" pitchFamily="34" charset="-120"/>
+              </a:rPr>
+              <a:t>แต่ละ SAVE = มินิไฟต์เพื่อนในโหมด soul ต่างกัน</a:t>
+            </a:r>
+          </a:p>
+          <a:p>
+            <a:pPr indent="0" marL="0">
+              <a:lnSpc>
+                <a:spcPct val="100000"/>
+              </a:lnSpc>
+              <a:buNone/>
+            </a:pPr>
+            <a:r>
+              <a:rPr lang="en-US" sz="1080" b="1" dirty="0">
+                <a:solidFill>
+                  <a:srgbClr val="C77DFF"/>
+                </a:solidFill>
+                <a:latin typeface="Calibri" pitchFamily="34" charset="0"/>
+                <a:ea typeface="Calibri" pitchFamily="34" charset="-122"/>
+                <a:cs typeface="Calibri" pitchFamily="34" charset="-120"/>
+              </a:rPr>
+              <a:t>ใช้เอนจินกระสุนของบอสก่อนหน้าซ้ำ (ไม่แตะ Core)</a:t>
+            </a:r>
+          </a:p>
+          <a:p>
+            <a:pPr indent="0" marL="0">
+              <a:lnSpc>
+                <a:spcPct val="100000"/>
+              </a:lnSpc>
+              <a:buNone/>
+            </a:pPr>
+            <a:r>
+              <a:rPr lang="en-US" sz="1080" b="1" dirty="0">
+                <a:solidFill>
+                  <a:srgbClr val="C77DFF"/>
+                </a:solidFill>
+                <a:latin typeface="Calibri" pitchFamily="34" charset="0"/>
+                <a:ea typeface="Calibri" pitchFamily="34" charset="-122"/>
+                <a:cs typeface="Calibri" pitchFamily="34" charset="-120"/>
+              </a:rPr>
+              <a:t>Undyne — GREEN บล็อกโล่ (SpearBlocker)</a:t>
+            </a:r>
+          </a:p>
+          <a:p>
+            <a:pPr indent="0" marL="0">
+              <a:lnSpc>
+                <a:spcPct val="100000"/>
+              </a:lnSpc>
+              <a:buNone/>
+            </a:pPr>
+            <a:r>
+              <a:rPr lang="en-US" sz="1080" b="1" dirty="0">
+                <a:solidFill>
+                  <a:srgbClr val="C77DFF"/>
+                </a:solidFill>
+                <a:latin typeface="Calibri" pitchFamily="34" charset="0"/>
+                <a:ea typeface="Calibri" pitchFamily="34" charset="-122"/>
+                <a:cs typeface="Calibri" pitchFamily="34" charset="-120"/>
+              </a:rPr>
+              <a:t>Alphys — YELLOW ยิง + ร่มมินิ-Mettaton (ParasolGen)</a:t>
+            </a:r>
+          </a:p>
+          <a:p>
+            <a:pPr indent="0" marL="0">
+              <a:lnSpc>
+                <a:spcPct val="100000"/>
+              </a:lnSpc>
+              <a:buNone/>
+            </a:pPr>
+            <a:r>
+              <a:rPr lang="en-US" sz="1080" b="1" dirty="0">
+                <a:solidFill>
+                  <a:srgbClr val="C77DFF"/>
+                </a:solidFill>
+                <a:latin typeface="Calibri" pitchFamily="34" charset="0"/>
+                <a:ea typeface="Calibri" pitchFamily="34" charset="-122"/>
+                <a:cs typeface="Calibri" pitchFamily="34" charset="-120"/>
+              </a:rPr>
+              <a:t>Sans &amp; Papyrus — BLUE กระดูก (SizeBone)</a:t>
+            </a:r>
+          </a:p>
+          <a:p>
+            <a:pPr indent="0" marL="0">
+              <a:lnSpc>
+                <a:spcPct val="100000"/>
+              </a:lnSpc>
+              <a:buNone/>
+            </a:pPr>
+            <a:r>
+              <a:rPr lang="en-US" sz="1080" b="1" dirty="0">
+                <a:solidFill>
+                  <a:srgbClr val="C77DFF"/>
+                </a:solidFill>
+                <a:latin typeface="Calibri" pitchFamily="34" charset="0"/>
+                <a:ea typeface="Calibri" pitchFamily="34" charset="-122"/>
+                <a:cs typeface="Calibri" pitchFamily="34" charset="-120"/>
+              </a:rPr>
+              <a:t>Toriel &amp; Asgore — RED ไฟวนเกลียว + มือ (ConvergingFireGen)</a:t>
+            </a:r>
+          </a:p>
+          <a:p>
+            <a:pPr indent="0" marL="0">
+              <a:lnSpc>
+                <a:spcPct val="100000"/>
+              </a:lnSpc>
+              <a:buNone/>
+            </a:pPr>
+            <a:r>
+              <a:rPr lang="en-US" sz="1080" b="1" dirty="0">
+                <a:solidFill>
+                  <a:srgbClr val="C77DFF"/>
+                </a:solidFill>
+                <a:latin typeface="Calibri" pitchFamily="34" charset="0"/>
+                <a:ea typeface="Calibri" pitchFamily="34" charset="-122"/>
+                <a:cs typeface="Calibri" pitchFamily="34" charset="-120"/>
+              </a:rPr>
+              <a:t>ปลดเพื่อน (3–4 ACT) → ตั้ง flag[505..508]</a:t>
+            </a:r>
+          </a:p>
+          <a:p>
+            <a:pPr indent="0" marL="0">
+              <a:lnSpc>
+                <a:spcPct val="100000"/>
+              </a:lnSpc>
+              <a:buNone/>
+            </a:pPr>
+            <a:r>
+              <a:rPr lang="en-US" sz="1080" b="1" dirty="0">
+                <a:solidFill>
+                  <a:srgbClr val="C77DFF"/>
+                </a:solidFill>
+                <a:latin typeface="Calibri" pitchFamily="34" charset="0"/>
+                <a:ea typeface="Calibri" pitchFamily="34" charset="-122"/>
+                <a:cs typeface="Calibri" pitchFamily="34" charset="-120"/>
+              </a:rPr>
+              <a:t>LostSoul (abstract) + LostSoulBody — เงาเทา</a:t>
+            </a:r>
+          </a:p>
+          <a:p>
+            <a:pPr indent="0" marL="0">
+              <a:lnSpc>
+                <a:spcPct val="100000"/>
+              </a:lnSpc>
+              <a:buNone/>
+            </a:pPr>
+            <a:r>
+              <a:rPr lang="en-US" sz="1080" b="1" dirty="0">
+                <a:solidFill>
+                  <a:srgbClr val="C77DFF"/>
+                </a:solidFill>
+                <a:latin typeface="Calibri" pitchFamily="34" charset="0"/>
+                <a:ea typeface="Calibri" pitchFamily="34" charset="-122"/>
+                <a:cs typeface="Calibri" pitchFamily="34" charset="-120"/>
+              </a:rPr>
+              <a:t>เฟรมเวิร์กอยู่ใน boss/asriel/, ขับโดย AsrielBoss</a:t>
+            </a:r>
+          </a:p>
+        </p:txBody>
+      </p:sp>
+    </p:spTree>
+  </p:cSld>
+  <p:clrMapOvr>
+    <a:masterClrMapping/>
+  </p:clrMapOvr>
+</p:sld>
+</file>
+
+<file path=ppt/slides/slide18.xml><?xml version="1.0" encoding="utf-8"?>
 <p:sld xmlns:a="http://schemas.openxmlformats.org/drawingml/2006/main" xmlns:r="http://schemas.openxmlformats.org/officeDocument/2006/relationships" xmlns:p="http://schemas.openxmlformats.org/presentationml/2006/main">
   <p:cSld name="Slide 16">
     <p:bg>
@@ -9151,7 +11075,7 @@
         <p:spPr>
           <a:xfrm>
             <a:off x="4389120" y="1554480"/>
-            <a:ext cx="7242048" cy="660000"/>
+            <a:ext cx="7242048" cy="548640"/>
           </a:xfrm>
           <a:prstGeom prst="roundRect">
             <a:avLst>
@@ -9170,6 +11094,10 @@
             <a:prstDash val="solid"/>
           </a:ln>
         </p:spPr>
+        <p:txBody>
+          <a:bodyPr/>
+          <a:p/>
+        </p:txBody>
       </p:sp>
       <p:sp>
         <p:nvSpPr>
@@ -9258,7 +11186,7 @@
         <p:spPr>
           <a:xfrm>
             <a:off x="5989320" y="1554480"/>
-            <a:ext cx="5486400" cy="660000"/>
+            <a:ext cx="5486400" cy="548640"/>
           </a:xfrm>
           <a:prstGeom prst="rect">
             <a:avLst/>
@@ -9299,8 +11227,8 @@
         </p:nvSpPr>
         <p:spPr>
           <a:xfrm>
-            <a:off x="4389120" y="2244480"/>
-            <a:ext cx="7242048" cy="660000"/>
+            <a:off x="4389120" y="2153412"/>
+            <a:ext cx="7242048" cy="548640"/>
           </a:xfrm>
           <a:prstGeom prst="roundRect">
             <a:avLst>
@@ -9319,6 +11247,10 @@
             <a:prstDash val="solid"/>
           </a:ln>
         </p:spPr>
+        <p:txBody>
+          <a:bodyPr/>
+          <a:p/>
+        </p:txBody>
       </p:sp>
       <p:sp>
         <p:nvSpPr>
@@ -9328,7 +11260,7 @@
         </p:nvSpPr>
         <p:spPr>
           <a:xfrm>
-            <a:off x="4526280" y="2326776"/>
+            <a:off x="4526280" y="2235708"/>
             <a:ext cx="1417320" cy="274320"/>
           </a:xfrm>
           <a:prstGeom prst="rect">
@@ -9367,7 +11299,7 @@
         </p:nvSpPr>
         <p:spPr>
           <a:xfrm>
-            <a:off x="4526280" y="2628528"/>
+            <a:off x="4526280" y="2537460"/>
             <a:ext cx="1463040" cy="274320"/>
           </a:xfrm>
           <a:prstGeom prst="rect">
@@ -9406,8 +11338,8 @@
         </p:nvSpPr>
         <p:spPr>
           <a:xfrm>
-            <a:off x="5989320" y="2244480"/>
-            <a:ext cx="5486400" cy="660000"/>
+            <a:off x="5989320" y="2153412"/>
+            <a:ext cx="5486400" cy="548640"/>
           </a:xfrm>
           <a:prstGeom prst="rect">
             <a:avLst/>
@@ -9448,8 +11380,8 @@
         </p:nvSpPr>
         <p:spPr>
           <a:xfrm>
-            <a:off x="4389120" y="2934480"/>
-            <a:ext cx="7242048" cy="660000"/>
+            <a:off x="4389120" y="2752344"/>
+            <a:ext cx="7242048" cy="548640"/>
           </a:xfrm>
           <a:prstGeom prst="roundRect">
             <a:avLst>
@@ -9468,6 +11400,10 @@
             <a:prstDash val="solid"/>
           </a:ln>
         </p:spPr>
+        <p:txBody>
+          <a:bodyPr/>
+          <a:p/>
+        </p:txBody>
       </p:sp>
       <p:sp>
         <p:nvSpPr>
@@ -9477,7 +11413,7 @@
         </p:nvSpPr>
         <p:spPr>
           <a:xfrm>
-            <a:off x="4526280" y="3016776"/>
+            <a:off x="4526280" y="2834640"/>
             <a:ext cx="1417320" cy="274320"/>
           </a:xfrm>
           <a:prstGeom prst="rect">
@@ -9516,7 +11452,7 @@
         </p:nvSpPr>
         <p:spPr>
           <a:xfrm>
-            <a:off x="4526280" y="3318528"/>
+            <a:off x="4526280" y="3136392"/>
             <a:ext cx="1463040" cy="274320"/>
           </a:xfrm>
           <a:prstGeom prst="rect">
@@ -9555,8 +11491,8 @@
         </p:nvSpPr>
         <p:spPr>
           <a:xfrm>
-            <a:off x="5989320" y="2934480"/>
-            <a:ext cx="5486400" cy="660000"/>
+            <a:off x="5989320" y="2752344"/>
+            <a:ext cx="5486400" cy="548640"/>
           </a:xfrm>
           <a:prstGeom prst="rect">
             <a:avLst/>
@@ -9597,8 +11533,8 @@
         </p:nvSpPr>
         <p:spPr>
           <a:xfrm>
-            <a:off x="4389120" y="3624480"/>
-            <a:ext cx="7242048" cy="660000"/>
+            <a:off x="4389120" y="3351276"/>
+            <a:ext cx="7242048" cy="548640"/>
           </a:xfrm>
           <a:prstGeom prst="roundRect">
             <a:avLst>
@@ -9617,6 +11553,10 @@
             <a:prstDash val="solid"/>
           </a:ln>
         </p:spPr>
+        <p:txBody>
+          <a:bodyPr/>
+          <a:p/>
+        </p:txBody>
       </p:sp>
       <p:sp>
         <p:nvSpPr>
@@ -9626,7 +11566,7 @@
         </p:nvSpPr>
         <p:spPr>
           <a:xfrm>
-            <a:off x="4526280" y="3706776"/>
+            <a:off x="4526280" y="3433572"/>
             <a:ext cx="1417320" cy="274320"/>
           </a:xfrm>
           <a:prstGeom prst="rect">
@@ -9665,7 +11605,7 @@
         </p:nvSpPr>
         <p:spPr>
           <a:xfrm>
-            <a:off x="4526280" y="4008528"/>
+            <a:off x="4526280" y="3735324"/>
             <a:ext cx="1463040" cy="274320"/>
           </a:xfrm>
           <a:prstGeom prst="rect">
@@ -9704,8 +11644,8 @@
         </p:nvSpPr>
         <p:spPr>
           <a:xfrm>
-            <a:off x="5989320" y="3624480"/>
-            <a:ext cx="5486400" cy="660000"/>
+            <a:off x="5989320" y="3351276"/>
+            <a:ext cx="5486400" cy="548640"/>
           </a:xfrm>
           <a:prstGeom prst="rect">
             <a:avLst/>
@@ -9746,8 +11686,8 @@
         </p:nvSpPr>
         <p:spPr>
           <a:xfrm>
-            <a:off x="4389120" y="4314480"/>
-            <a:ext cx="7242048" cy="660000"/>
+            <a:off x="4389120" y="3950208"/>
+            <a:ext cx="7242048" cy="548640"/>
           </a:xfrm>
           <a:prstGeom prst="roundRect">
             <a:avLst>
@@ -9766,6 +11706,10 @@
             <a:prstDash val="solid"/>
           </a:ln>
         </p:spPr>
+        <p:txBody>
+          <a:bodyPr/>
+          <a:p/>
+        </p:txBody>
       </p:sp>
       <p:sp>
         <p:nvSpPr>
@@ -9775,7 +11719,7 @@
         </p:nvSpPr>
         <p:spPr>
           <a:xfrm>
-            <a:off x="4526280" y="4396776"/>
+            <a:off x="4526280" y="4032504"/>
             <a:ext cx="1417320" cy="274320"/>
           </a:xfrm>
           <a:prstGeom prst="rect">
@@ -9814,7 +11758,7 @@
         </p:nvSpPr>
         <p:spPr>
           <a:xfrm>
-            <a:off x="4526280" y="4698528"/>
+            <a:off x="4526280" y="4334256"/>
             <a:ext cx="1463040" cy="274320"/>
           </a:xfrm>
           <a:prstGeom prst="rect">
@@ -9853,8 +11797,8 @@
         </p:nvSpPr>
         <p:spPr>
           <a:xfrm>
-            <a:off x="5989320" y="4314480"/>
-            <a:ext cx="5486400" cy="660000"/>
+            <a:off x="5989320" y="3950208"/>
+            <a:ext cx="5486400" cy="548640"/>
           </a:xfrm>
           <a:prstGeom prst="rect">
             <a:avLst/>
@@ -9895,8 +11839,8 @@
         </p:nvSpPr>
         <p:spPr>
           <a:xfrm>
-            <a:off x="4389120" y="5004480"/>
-            <a:ext cx="7242048" cy="660000"/>
+            <a:off x="4389120" y="4549140"/>
+            <a:ext cx="7242048" cy="548640"/>
           </a:xfrm>
           <a:prstGeom prst="roundRect">
             <a:avLst>
@@ -9915,6 +11859,10 @@
             <a:prstDash val="solid"/>
           </a:ln>
         </p:spPr>
+        <p:txBody>
+          <a:bodyPr/>
+          <a:p/>
+        </p:txBody>
       </p:sp>
       <p:sp>
         <p:nvSpPr>
@@ -9924,7 +11872,7 @@
         </p:nvSpPr>
         <p:spPr>
           <a:xfrm>
-            <a:off x="4526280" y="5086776"/>
+            <a:off x="4526280" y="4631436"/>
             <a:ext cx="1417320" cy="274320"/>
           </a:xfrm>
           <a:prstGeom prst="rect">
@@ -9963,7 +11911,7 @@
         </p:nvSpPr>
         <p:spPr>
           <a:xfrm>
-            <a:off x="4526280" y="5388528"/>
+            <a:off x="4526280" y="4933188"/>
             <a:ext cx="1463040" cy="274320"/>
           </a:xfrm>
           <a:prstGeom prst="rect">
@@ -10002,8 +11950,8 @@
         </p:nvSpPr>
         <p:spPr>
           <a:xfrm>
-            <a:off x="5989320" y="5004480"/>
-            <a:ext cx="5486400" cy="660000"/>
+            <a:off x="5989320" y="4549140"/>
+            <a:ext cx="5486400" cy="548640"/>
           </a:xfrm>
           <a:prstGeom prst="rect">
             <a:avLst/>
@@ -10083,8 +12031,8 @@
         </p:nvSpPr>
         <p:spPr>
           <a:xfrm>
-            <a:off x="4389120" y="5694480"/>
-            <a:ext cx="7242048" cy="660000"/>
+            <a:off x="4389120" y="5148072"/>
+            <a:ext cx="7242048" cy="548640"/>
           </a:xfrm>
           <a:prstGeom prst="roundRect">
             <a:avLst>
@@ -10103,6 +12051,10 @@
             <a:prstDash val="solid"/>
           </a:ln>
         </p:spPr>
+        <p:txBody>
+          <a:bodyPr/>
+          <a:p/>
+        </p:txBody>
       </p:sp>
       <p:sp>
         <p:nvSpPr>
@@ -10112,7 +12064,7 @@
         </p:nvSpPr>
         <p:spPr>
           <a:xfrm>
-            <a:off x="4526280" y="5776776"/>
+            <a:off x="4526280" y="5230368"/>
             <a:ext cx="1417320" cy="274320"/>
           </a:xfrm>
           <a:prstGeom prst="rect">
@@ -10151,7 +12103,7 @@
         </p:nvSpPr>
         <p:spPr>
           <a:xfrm>
-            <a:off x="4526280" y="6078528"/>
+            <a:off x="4526280" y="5532120"/>
             <a:ext cx="1463040" cy="274320"/>
           </a:xfrm>
           <a:prstGeom prst="rect">
@@ -10190,8 +12142,8 @@
         </p:nvSpPr>
         <p:spPr>
           <a:xfrm>
-            <a:off x="5989320" y="5694480"/>
-            <a:ext cx="5486400" cy="660000"/>
+            <a:off x="5989320" y="5148072"/>
+            <a:ext cx="5486400" cy="548640"/>
           </a:xfrm>
           <a:prstGeom prst="rect">
             <a:avLst/>
@@ -10221,6 +12173,160 @@
               <a:t>FireHelix(+Gen) · MiniHelix · ChaseFire · HandBullet</a:t>
             </a:r>
             <a:endParaRPr lang="en-US" sz="1050" dirty="0"/>
+          </a:p>
+        </p:txBody>
+      </p:sp>
+      <p:sp>
+        <p:nvSpPr>
+          <p:cNvPr id="36" name="Text 27"/>
+          <p:cNvSpPr/>
+          <p:nvPr/>
+        </p:nvSpPr>
+        <p:spPr>
+          <a:xfrm>
+            <a:off x="4526280" y="6131052"/>
+            <a:ext cx="1463040" cy="274320"/>
+          </a:xfrm>
+          <a:prstGeom prst="rect">
+            <a:avLst/>
+          </a:prstGeom>
+          <a:noFill/>
+          <a:ln/>
+        </p:spPr>
+        <p:txBody>
+          <a:bodyPr wrap="square" lIns="0" tIns="0" rIns="0" bIns="0" rtlCol="0" anchor="ctr">
+            <a:normAutofit/>
+          </a:bodyPr>
+          <a:lstStyle/>
+          <a:p>
+            <a:pPr indent="0" marL="0">
+              <a:buNone/>
+            </a:pPr>
+            <a:r>
+              <a:rPr lang="en-US" sz="950" dirty="0">
+                <a:solidFill>
+                  <a:srgbClr val="FFD43B"/>
+                </a:solidFill>
+                <a:latin typeface="Calibri" pitchFamily="34" charset="0"/>
+                <a:ea typeface="Calibri" pitchFamily="34" charset="-122"/>
+                <a:cs typeface="Calibri" pitchFamily="34" charset="-120"/>
+              </a:rPr>
+              <a:t>Asriel</a:t>
+            </a:r>
+          </a:p>
+        </p:txBody>
+      </p:sp>
+      <p:sp>
+        <p:nvSpPr>
+          <p:cNvPr id="37" name="Shape 25"/>
+          <p:cNvSpPr/>
+          <p:nvPr/>
+        </p:nvSpPr>
+        <p:spPr>
+          <a:xfrm>
+            <a:off x="4389120" y="5747004"/>
+            <a:ext cx="7242048" cy="548640"/>
+          </a:xfrm>
+          <a:prstGeom prst="roundRect">
+            <a:avLst>
+              <a:gd name="adj" fmla="val 6329"/>
+            </a:avLst>
+          </a:prstGeom>
+          <a:solidFill>
+            <a:srgbClr val="16181D"/>
+          </a:solidFill>
+          <a:ln w="12700">
+            <a:solidFill>
+              <a:srgbClr val="C77DFF">
+                <a:alpha val="55000"/>
+              </a:srgbClr>
+            </a:solidFill>
+            <a:prstDash val="solid"/>
+          </a:ln>
+        </p:spPr>
+        <p:txBody>
+          <a:bodyPr/>
+          <a:p/>
+        </p:txBody>
+      </p:sp>
+      <p:sp>
+        <p:nvSpPr>
+          <p:cNvPr id="38" name="Text 26"/>
+          <p:cNvSpPr/>
+          <p:nvPr/>
+        </p:nvSpPr>
+        <p:spPr>
+          <a:xfrm>
+            <a:off x="4526280" y="5829300"/>
+            <a:ext cx="1417320" cy="274320"/>
+          </a:xfrm>
+          <a:prstGeom prst="rect">
+            <a:avLst/>
+          </a:prstGeom>
+          <a:noFill/>
+          <a:ln/>
+        </p:spPr>
+        <p:txBody>
+          <a:bodyPr wrap="square" lIns="0" tIns="0" rIns="0" bIns="0" rtlCol="0" anchor="ctr"/>
+          <a:lstStyle/>
+          <a:p>
+            <a:pPr indent="0" marL="0">
+              <a:buNone/>
+            </a:pPr>
+            <a:r>
+              <a:rPr lang="en-US" sz="1300" b="1" dirty="0">
+                <a:solidFill>
+                  <a:srgbClr val="C77DFF"/>
+                </a:solidFill>
+                <a:latin typeface="Courier New" pitchFamily="34" charset="0"/>
+                <a:ea typeface="Courier New" pitchFamily="34" charset="-122"/>
+                <a:cs typeface="Courier New" pitchFamily="34" charset="-120"/>
+              </a:rPr>
+              <a:t>asriel/</a:t>
+            </a:r>
+          </a:p>
+        </p:txBody>
+      </p:sp>
+      <p:sp>
+        <p:nvSpPr>
+          <p:cNvPr id="39" name="Text 28"/>
+          <p:cNvSpPr/>
+          <p:nvPr/>
+        </p:nvSpPr>
+        <p:spPr>
+          <a:xfrm>
+            <a:off x="5989320" y="5747004"/>
+            <a:ext cx="5486400" cy="548640"/>
+          </a:xfrm>
+          <a:prstGeom prst="rect">
+            <a:avLst/>
+          </a:prstGeom>
+          <a:noFill/>
+          <a:ln/>
+        </p:spPr>
+        <p:txBody>
+          <a:bodyPr wrap="square" lIns="0" tIns="0" rIns="0" bIns="0" rtlCol="0" anchor="ctr">
+            <a:normAutofit/>
+          </a:bodyPr>
+          <a:lstStyle/>
+          <a:p>
+            <a:pPr indent="0" marL="0">
+              <a:lnSpc>
+                <a:spcPct val="95000"/>
+              </a:lnSpc>
+              <a:buNone/>
+            </a:pPr>
+            <a:r>
+              <a:rPr lang="en-US" sz="1050" dirty="0">
+                <a:solidFill>
+                  <a:srgbClr val="FFFFFF"/>
+                </a:solidFill>
+                <a:latin typeface="Calibri" pitchFamily="34" charset="0"/>
+                <a:ea typeface="Calibri" pitchFamily="34" charset="-122"/>
+                <a:cs typeface="Calibri" pitchFamily="34" charset="-120"/>
+              </a:rPr>
+              <a:t>StarBlazing · StormStar · ShockerBreaker · ChaosSaber · SwordArm · ChaosBuster · HyperGoner · AngelComet</a:t>
+            </a:r>
           </a:p>
         </p:txBody>
       </p:sp>
@@ -10232,7 +12338,7 @@
 </p:sld>
 </file>
 
-<file path=ppt/slides/slide17.xml><?xml version="1.0" encoding="utf-8"?>
+<file path=ppt/slides/slide19.xml><?xml version="1.0" encoding="utf-8"?>
 <p:sld xmlns:a="http://schemas.openxmlformats.org/drawingml/2006/main" xmlns:r="http://schemas.openxmlformats.org/officeDocument/2006/relationships" xmlns:p="http://schemas.openxmlformats.org/presentationml/2006/main">
   <p:cSld name="Slide 17">
     <p:bg>
@@ -11114,7 +13220,1110 @@
 </p:sld>
 </file>
 
-<file path=ppt/slides/slide18.xml><?xml version="1.0" encoding="utf-8"?>
+<file path=ppt/slides/slide2.xml><?xml version="1.0" encoding="utf-8"?>
+<p:sld xmlns:a="http://schemas.openxmlformats.org/drawingml/2006/main" xmlns:r="http://schemas.openxmlformats.org/officeDocument/2006/relationships" xmlns:p="http://schemas.openxmlformats.org/presentationml/2006/main">
+  <p:cSld name="Slide 2">
+    <p:bg>
+      <p:bgPr>
+        <a:solidFill>
+          <a:srgbClr val="0A0A0A"/>
+        </a:solidFill>
+      </p:bgPr>
+    </p:bg>
+    <p:spTree>
+      <p:nvGrpSpPr>
+        <p:cNvPr id="1" name=""/>
+        <p:cNvGrpSpPr/>
+        <p:nvPr/>
+      </p:nvGrpSpPr>
+      <p:grpSpPr>
+        <a:xfrm>
+          <a:off x="0" y="0"/>
+          <a:ext cx="0" cy="0"/>
+          <a:chOff x="0" y="0"/>
+          <a:chExt cx="0" cy="0"/>
+        </a:xfrm>
+      </p:grpSpPr>
+      <p:sp>
+        <p:nvSpPr>
+          <p:cNvPr id="2" name="Text 0"/>
+          <p:cNvSpPr/>
+          <p:nvPr/>
+        </p:nvSpPr>
+        <p:spPr>
+          <a:xfrm>
+            <a:off x="548640" y="365760"/>
+            <a:ext cx="10058400" cy="365760"/>
+          </a:xfrm>
+          <a:prstGeom prst="rect">
+            <a:avLst/>
+          </a:prstGeom>
+          <a:noFill/>
+          <a:ln/>
+        </p:spPr>
+        <p:txBody>
+          <a:bodyPr wrap="square" lIns="0" tIns="0" rIns="0" bIns="0" rtlCol="0" anchor="ctr"/>
+          <a:lstStyle/>
+          <a:p>
+            <a:pPr indent="0" marL="0">
+              <a:buNone/>
+            </a:pPr>
+            <a:r>
+              <a:rPr lang="en-US" sz="1200" b="1" spc="300" kern="0" dirty="0">
+                <a:solidFill>
+                  <a:srgbClr val="FFD43B"/>
+                </a:solidFill>
+                <a:latin typeface="Courier New" pitchFamily="34" charset="0"/>
+                <a:ea typeface="Courier New" pitchFamily="34" charset="-122"/>
+                <a:cs typeface="Courier New" pitchFamily="34" charset="-120"/>
+              </a:rPr>
+              <a:t>ภาพรวมสถาปัตยกรรม</a:t>
+            </a:r>
+            <a:endParaRPr lang="en-US" sz="1200" dirty="0"/>
+          </a:p>
+        </p:txBody>
+      </p:sp>
+      <p:sp>
+        <p:nvSpPr>
+          <p:cNvPr id="3" name="Text 1"/>
+          <p:cNvSpPr/>
+          <p:nvPr/>
+        </p:nvSpPr>
+        <p:spPr>
+          <a:xfrm>
+            <a:off x="548640" y="658368"/>
+            <a:ext cx="11064240" cy="731520"/>
+          </a:xfrm>
+          <a:prstGeom prst="rect">
+            <a:avLst/>
+          </a:prstGeom>
+          <a:noFill/>
+          <a:ln/>
+        </p:spPr>
+        <p:txBody>
+          <a:bodyPr wrap="square" lIns="0" tIns="0" rIns="0" bIns="0" rtlCol="0" anchor="ctr"/>
+          <a:lstStyle/>
+          <a:p>
+            <a:pPr indent="0" marL="0">
+              <a:buNone/>
+            </a:pPr>
+            <a:r>
+              <a:rPr lang="en-US" sz="2800" b="1" dirty="0">
+                <a:solidFill>
+                  <a:srgbClr val="FFFFFF"/>
+                </a:solidFill>
+                <a:latin typeface="Calibri" pitchFamily="34" charset="0"/>
+                <a:ea typeface="Calibri" pitchFamily="34" charset="-122"/>
+                <a:cs typeface="Calibri" pitchFamily="34" charset="-120"/>
+              </a:rPr>
+              <a:t>5 เลเยอร์ — แยกหน้าที่ชัด, พึ่งพา Core ทางเดียว</a:t>
+            </a:r>
+            <a:endParaRPr lang="en-US" sz="2800" dirty="0"/>
+          </a:p>
+        </p:txBody>
+      </p:sp>
+      <p:sp>
+        <p:nvSpPr>
+          <p:cNvPr id="4" name="Shape 2"/>
+          <p:cNvSpPr/>
+          <p:nvPr/>
+        </p:nvSpPr>
+        <p:spPr>
+          <a:xfrm>
+            <a:off x="548640" y="1572768"/>
+            <a:ext cx="11064240" cy="914400"/>
+          </a:xfrm>
+          <a:prstGeom prst="roundRect">
+            <a:avLst>
+              <a:gd name="adj" fmla="val 6000"/>
+            </a:avLst>
+          </a:prstGeom>
+          <a:solidFill>
+            <a:srgbClr val="16181D"/>
+          </a:solidFill>
+          <a:ln w="12700">
+            <a:solidFill>
+              <a:srgbClr val="FF922B">
+                <a:alpha val="65000"/>
+              </a:srgbClr>
+            </a:solidFill>
+            <a:prstDash val="solid"/>
+          </a:ln>
+          <a:effectLst>
+            <a:outerShdw sx="100000" sy="100000" kx="0" ky="0" algn="bl" rotWithShape="0" blurRad="101600" dist="38100" dir="5400000">
+              <a:srgbClr val="000000">
+                <a:alpha val="50000"/>
+              </a:srgbClr>
+            </a:outerShdw>
+          </a:effectLst>
+        </p:spPr>
+        <p:txBody>
+          <a:bodyPr/>
+          <a:p/>
+        </p:txBody>
+      </p:sp>
+      <p:sp>
+        <p:nvSpPr>
+          <p:cNvPr id="5" name="Shape 3"/>
+          <p:cNvSpPr/>
+          <p:nvPr/>
+        </p:nvSpPr>
+        <p:spPr>
+          <a:xfrm>
+            <a:off x="713232" y="1746504"/>
+            <a:ext cx="2057400" cy="566928"/>
+          </a:xfrm>
+          <a:prstGeom prst="roundRect">
+            <a:avLst>
+              <a:gd name="adj" fmla="val 8065"/>
+            </a:avLst>
+          </a:prstGeom>
+          <a:solidFill>
+            <a:srgbClr val="1E2127"/>
+          </a:solidFill>
+          <a:ln w="12700">
+            <a:solidFill>
+              <a:srgbClr val="FF922B">
+                <a:alpha val="80000"/>
+              </a:srgbClr>
+            </a:solidFill>
+            <a:prstDash val="solid"/>
+          </a:ln>
+        </p:spPr>
+        <p:txBody>
+          <a:bodyPr/>
+          <a:p/>
+        </p:txBody>
+      </p:sp>
+      <p:sp>
+        <p:nvSpPr>
+          <p:cNvPr id="6" name="Text 4"/>
+          <p:cNvSpPr/>
+          <p:nvPr/>
+        </p:nvSpPr>
+        <p:spPr>
+          <a:xfrm>
+            <a:off x="713232" y="1746504"/>
+            <a:ext cx="2057400" cy="566928"/>
+          </a:xfrm>
+          <a:prstGeom prst="rect">
+            <a:avLst/>
+          </a:prstGeom>
+          <a:noFill/>
+          <a:ln/>
+        </p:spPr>
+        <p:txBody>
+          <a:bodyPr wrap="square" lIns="0" tIns="0" rIns="0" bIns="0" rtlCol="0" anchor="ctr"/>
+          <a:lstStyle/>
+          <a:p>
+            <a:pPr algn="ctr" indent="0" marL="0">
+              <a:buNone/>
+            </a:pPr>
+            <a:r>
+              <a:rPr lang="en-US" sz="1700" b="1" dirty="0">
+                <a:solidFill>
+                  <a:srgbClr val="FF922B"/>
+                </a:solidFill>
+                <a:latin typeface="Courier New" pitchFamily="34" charset="0"/>
+                <a:ea typeface="Courier New" pitchFamily="34" charset="-122"/>
+                <a:cs typeface="Courier New" pitchFamily="34" charset="-120"/>
+              </a:rPr>
+              <a:t>util/</a:t>
+            </a:r>
+            <a:endParaRPr lang="en-US" sz="1700" dirty="0"/>
+          </a:p>
+        </p:txBody>
+      </p:sp>
+      <p:sp>
+        <p:nvSpPr>
+          <p:cNvPr id="7" name="Text 5"/>
+          <p:cNvSpPr/>
+          <p:nvPr/>
+        </p:nvSpPr>
+        <p:spPr>
+          <a:xfrm>
+            <a:off x="2971800" y="1682496"/>
+            <a:ext cx="8503920" cy="365760"/>
+          </a:xfrm>
+          <a:prstGeom prst="rect">
+            <a:avLst/>
+          </a:prstGeom>
+          <a:noFill/>
+          <a:ln/>
+        </p:spPr>
+        <p:txBody>
+          <a:bodyPr wrap="square" lIns="0" tIns="0" rIns="0" bIns="0" rtlCol="0" anchor="ctr"/>
+          <a:lstStyle/>
+          <a:p>
+            <a:pPr indent="0" marL="0">
+              <a:buNone/>
+            </a:pPr>
+            <a:r>
+              <a:rPr lang="en-US" sz="1450" b="1" dirty="0">
+                <a:solidFill>
+                  <a:srgbClr val="FFFFFF"/>
+                </a:solidFill>
+                <a:latin typeface="Calibri" pitchFamily="34" charset="0"/>
+                <a:ea typeface="Calibri" pitchFamily="34" charset="-122"/>
+                <a:cs typeface="Calibri" pitchFamily="34" charset="-120"/>
+              </a:rPr>
+              <a:t>4 ไฟล์ · เครื่องมือพื้นฐาน</a:t>
+            </a:r>
+            <a:endParaRPr lang="en-US" sz="1450" dirty="0"/>
+          </a:p>
+        </p:txBody>
+      </p:sp>
+      <p:sp>
+        <p:nvSpPr>
+          <p:cNvPr id="8" name="Text 6"/>
+          <p:cNvSpPr/>
+          <p:nvPr/>
+        </p:nvSpPr>
+        <p:spPr>
+          <a:xfrm>
+            <a:off x="2971800" y="2020824"/>
+            <a:ext cx="8412480" cy="384048"/>
+          </a:xfrm>
+          <a:prstGeom prst="rect">
+            <a:avLst/>
+          </a:prstGeom>
+          <a:noFill/>
+          <a:ln/>
+        </p:spPr>
+        <p:txBody>
+          <a:bodyPr wrap="square" lIns="0" tIns="0" rIns="0" bIns="0" rtlCol="0" anchor="ctr"/>
+          <a:lstStyle/>
+          <a:p>
+            <a:pPr indent="0" marL="0">
+              <a:buNone/>
+            </a:pPr>
+            <a:r>
+              <a:rPr lang="en-US" sz="1150" dirty="0">
+                <a:solidFill>
+                  <a:srgbClr val="9AA1AC"/>
+                </a:solidFill>
+                <a:latin typeface="Calibri" pitchFamily="34" charset="0"/>
+                <a:ea typeface="Calibri" pitchFamily="34" charset="-122"/>
+                <a:cs typeface="Calibri" pitchFamily="34" charset="-120"/>
+              </a:rPr>
+              <a:t>GMLHelper (พอร์ตฟังก์ชัน GML) · Assets (สไปรต์/เสียง) · Audio (caster_*) · Fonts (ฟอนต์พิกเซล)</a:t>
+            </a:r>
+            <a:endParaRPr lang="en-US" sz="1150" dirty="0"/>
+          </a:p>
+        </p:txBody>
+      </p:sp>
+      <p:sp>
+        <p:nvSpPr>
+          <p:cNvPr id="9" name="Shape 7"/>
+          <p:cNvSpPr/>
+          <p:nvPr/>
+        </p:nvSpPr>
+        <p:spPr>
+          <a:xfrm>
+            <a:off x="548640" y="2587752"/>
+            <a:ext cx="11064240" cy="914400"/>
+          </a:xfrm>
+          <a:prstGeom prst="roundRect">
+            <a:avLst>
+              <a:gd name="adj" fmla="val 6000"/>
+            </a:avLst>
+          </a:prstGeom>
+          <a:solidFill>
+            <a:srgbClr val="16181D"/>
+          </a:solidFill>
+          <a:ln w="12700">
+            <a:solidFill>
+              <a:srgbClr val="4DA6FF">
+                <a:alpha val="65000"/>
+              </a:srgbClr>
+            </a:solidFill>
+            <a:prstDash val="solid"/>
+          </a:ln>
+          <a:effectLst>
+            <a:outerShdw sx="100000" sy="100000" kx="0" ky="0" algn="bl" rotWithShape="0" blurRad="101600" dist="38100" dir="5400000">
+              <a:srgbClr val="000000">
+                <a:alpha val="50000"/>
+              </a:srgbClr>
+            </a:outerShdw>
+          </a:effectLst>
+        </p:spPr>
+        <p:txBody>
+          <a:bodyPr/>
+          <a:p/>
+        </p:txBody>
+      </p:sp>
+      <p:sp>
+        <p:nvSpPr>
+          <p:cNvPr id="10" name="Shape 8"/>
+          <p:cNvSpPr/>
+          <p:nvPr/>
+        </p:nvSpPr>
+        <p:spPr>
+          <a:xfrm>
+            <a:off x="713232" y="2761488"/>
+            <a:ext cx="2057400" cy="566928"/>
+          </a:xfrm>
+          <a:prstGeom prst="roundRect">
+            <a:avLst>
+              <a:gd name="adj" fmla="val 8065"/>
+            </a:avLst>
+          </a:prstGeom>
+          <a:solidFill>
+            <a:srgbClr val="1E2127"/>
+          </a:solidFill>
+          <a:ln w="12700">
+            <a:solidFill>
+              <a:srgbClr val="4DA6FF">
+                <a:alpha val="80000"/>
+              </a:srgbClr>
+            </a:solidFill>
+            <a:prstDash val="solid"/>
+          </a:ln>
+        </p:spPr>
+        <p:txBody>
+          <a:bodyPr/>
+          <a:p/>
+        </p:txBody>
+      </p:sp>
+      <p:sp>
+        <p:nvSpPr>
+          <p:cNvPr id="11" name="Text 9"/>
+          <p:cNvSpPr/>
+          <p:nvPr/>
+        </p:nvSpPr>
+        <p:spPr>
+          <a:xfrm>
+            <a:off x="713232" y="2761488"/>
+            <a:ext cx="2057400" cy="566928"/>
+          </a:xfrm>
+          <a:prstGeom prst="rect">
+            <a:avLst/>
+          </a:prstGeom>
+          <a:noFill/>
+          <a:ln/>
+        </p:spPr>
+        <p:txBody>
+          <a:bodyPr wrap="square" lIns="0" tIns="0" rIns="0" bIns="0" rtlCol="0" anchor="ctr"/>
+          <a:lstStyle/>
+          <a:p>
+            <a:pPr algn="ctr" indent="0" marL="0">
+              <a:buNone/>
+            </a:pPr>
+            <a:r>
+              <a:rPr lang="en-US" sz="1700" b="1" dirty="0">
+                <a:solidFill>
+                  <a:srgbClr val="4DA6FF"/>
+                </a:solidFill>
+                <a:latin typeface="Courier New" pitchFamily="34" charset="0"/>
+                <a:ea typeface="Courier New" pitchFamily="34" charset="-122"/>
+                <a:cs typeface="Courier New" pitchFamily="34" charset="-120"/>
+              </a:rPr>
+              <a:t>core/</a:t>
+            </a:r>
+            <a:endParaRPr lang="en-US" sz="1700" dirty="0"/>
+          </a:p>
+        </p:txBody>
+      </p:sp>
+      <p:sp>
+        <p:nvSpPr>
+          <p:cNvPr id="12" name="Text 10"/>
+          <p:cNvSpPr/>
+          <p:nvPr/>
+        </p:nvSpPr>
+        <p:spPr>
+          <a:xfrm>
+            <a:off x="2971800" y="2697480"/>
+            <a:ext cx="8503920" cy="365760"/>
+          </a:xfrm>
+          <a:prstGeom prst="rect">
+            <a:avLst/>
+          </a:prstGeom>
+          <a:noFill/>
+          <a:ln/>
+        </p:spPr>
+        <p:txBody>
+          <a:bodyPr wrap="square" lIns="0" tIns="0" rIns="0" bIns="0" rtlCol="0" anchor="ctr"/>
+          <a:lstStyle/>
+          <a:p>
+            <a:pPr indent="0" marL="0">
+              <a:buNone/>
+            </a:pPr>
+            <a:r>
+              <a:rPr lang="en-US" sz="1450" b="1" dirty="0">
+                <a:solidFill>
+                  <a:srgbClr val="FFFFFF"/>
+                </a:solidFill>
+                <a:latin typeface="Calibri" pitchFamily="34" charset="0"/>
+                <a:ea typeface="Calibri" pitchFamily="34" charset="-122"/>
+                <a:cs typeface="Calibri" pitchFamily="34" charset="-120"/>
+              </a:rPr>
+              <a:t>10 ไฟล์ · เครื่องยนต์เกม</a:t>
+            </a:r>
+            <a:endParaRPr lang="en-US" sz="1450" dirty="0"/>
+          </a:p>
+        </p:txBody>
+      </p:sp>
+      <p:sp>
+        <p:nvSpPr>
+          <p:cNvPr id="13" name="Text 11"/>
+          <p:cNvSpPr/>
+          <p:nvPr/>
+        </p:nvSpPr>
+        <p:spPr>
+          <a:xfrm>
+            <a:off x="2971800" y="3035808"/>
+            <a:ext cx="8412480" cy="384048"/>
+          </a:xfrm>
+          <a:prstGeom prst="rect">
+            <a:avLst/>
+          </a:prstGeom>
+          <a:noFill/>
+          <a:ln/>
+        </p:spPr>
+        <p:txBody>
+          <a:bodyPr wrap="square" lIns="0" tIns="0" rIns="0" bIns="0" rtlCol="0" anchor="ctr"/>
+          <a:lstStyle/>
+          <a:p>
+            <a:pPr indent="0" marL="0">
+              <a:buNone/>
+            </a:pPr>
+            <a:r>
+              <a:rPr lang="en-US" sz="1150" dirty="0">
+                <a:solidFill>
+                  <a:srgbClr val="9AA1AC"/>
+                </a:solidFill>
+                <a:latin typeface="Calibri" pitchFamily="34" charset="0"/>
+                <a:ea typeface="Calibri" pitchFamily="34" charset="-122"/>
+                <a:cs typeface="Calibri" pitchFamily="34" charset="-120"/>
+              </a:rPr>
+              <a:t>Game (loop 30 FPS) · Entity/EntityManager (instance list) · GlobalState · TurnManager · Alarm/Event/Sequence · Input · Scene</a:t>
+            </a:r>
+            <a:endParaRPr lang="en-US" sz="1150" dirty="0"/>
+          </a:p>
+        </p:txBody>
+      </p:sp>
+      <p:sp>
+        <p:nvSpPr>
+          <p:cNvPr id="14" name="Shape 12"/>
+          <p:cNvSpPr/>
+          <p:nvPr/>
+        </p:nvSpPr>
+        <p:spPr>
+          <a:xfrm>
+            <a:off x="548640" y="3602736"/>
+            <a:ext cx="11064240" cy="914400"/>
+          </a:xfrm>
+          <a:prstGeom prst="roundRect">
+            <a:avLst>
+              <a:gd name="adj" fmla="val 6000"/>
+            </a:avLst>
+          </a:prstGeom>
+          <a:solidFill>
+            <a:srgbClr val="16181D"/>
+          </a:solidFill>
+          <a:ln w="12700">
+            <a:solidFill>
+              <a:srgbClr val="5BE584">
+                <a:alpha val="65000"/>
+              </a:srgbClr>
+            </a:solidFill>
+            <a:prstDash val="solid"/>
+          </a:ln>
+          <a:effectLst>
+            <a:outerShdw sx="100000" sy="100000" kx="0" ky="0" algn="bl" rotWithShape="0" blurRad="101600" dist="38100" dir="5400000">
+              <a:srgbClr val="000000">
+                <a:alpha val="50000"/>
+              </a:srgbClr>
+            </a:outerShdw>
+          </a:effectLst>
+        </p:spPr>
+        <p:txBody>
+          <a:bodyPr/>
+          <a:p/>
+        </p:txBody>
+      </p:sp>
+      <p:sp>
+        <p:nvSpPr>
+          <p:cNvPr id="15" name="Shape 13"/>
+          <p:cNvSpPr/>
+          <p:nvPr/>
+        </p:nvSpPr>
+        <p:spPr>
+          <a:xfrm>
+            <a:off x="713232" y="3776472"/>
+            <a:ext cx="2057400" cy="566928"/>
+          </a:xfrm>
+          <a:prstGeom prst="roundRect">
+            <a:avLst>
+              <a:gd name="adj" fmla="val 8065"/>
+            </a:avLst>
+          </a:prstGeom>
+          <a:solidFill>
+            <a:srgbClr val="1E2127"/>
+          </a:solidFill>
+          <a:ln w="12700">
+            <a:solidFill>
+              <a:srgbClr val="5BE584">
+                <a:alpha val="80000"/>
+              </a:srgbClr>
+            </a:solidFill>
+            <a:prstDash val="solid"/>
+          </a:ln>
+        </p:spPr>
+        <p:txBody>
+          <a:bodyPr/>
+          <a:p/>
+        </p:txBody>
+      </p:sp>
+      <p:sp>
+        <p:nvSpPr>
+          <p:cNvPr id="16" name="Text 14"/>
+          <p:cNvSpPr/>
+          <p:nvPr/>
+        </p:nvSpPr>
+        <p:spPr>
+          <a:xfrm>
+            <a:off x="713232" y="3776472"/>
+            <a:ext cx="2057400" cy="566928"/>
+          </a:xfrm>
+          <a:prstGeom prst="rect">
+            <a:avLst/>
+          </a:prstGeom>
+          <a:noFill/>
+          <a:ln/>
+        </p:spPr>
+        <p:txBody>
+          <a:bodyPr wrap="square" lIns="0" tIns="0" rIns="0" bIns="0" rtlCol="0" anchor="ctr"/>
+          <a:lstStyle/>
+          <a:p>
+            <a:pPr algn="ctr" indent="0" marL="0">
+              <a:buNone/>
+            </a:pPr>
+            <a:r>
+              <a:rPr lang="en-US" sz="1700" b="1" dirty="0">
+                <a:solidFill>
+                  <a:srgbClr val="5BE584"/>
+                </a:solidFill>
+                <a:latin typeface="Courier New" pitchFamily="34" charset="0"/>
+                <a:ea typeface="Courier New" pitchFamily="34" charset="-122"/>
+                <a:cs typeface="Courier New" pitchFamily="34" charset="-120"/>
+              </a:rPr>
+              <a:t>battle/</a:t>
+            </a:r>
+            <a:endParaRPr lang="en-US" sz="1700" dirty="0"/>
+          </a:p>
+        </p:txBody>
+      </p:sp>
+      <p:sp>
+        <p:nvSpPr>
+          <p:cNvPr id="17" name="Text 15"/>
+          <p:cNvSpPr/>
+          <p:nvPr/>
+        </p:nvSpPr>
+        <p:spPr>
+          <a:xfrm>
+            <a:off x="2971800" y="3712464"/>
+            <a:ext cx="8503920" cy="365760"/>
+          </a:xfrm>
+          <a:prstGeom prst="rect">
+            <a:avLst/>
+          </a:prstGeom>
+          <a:noFill/>
+          <a:ln/>
+        </p:spPr>
+        <p:txBody>
+          <a:bodyPr wrap="square" lIns="0" tIns="0" rIns="0" bIns="0" rtlCol="0" anchor="ctr"/>
+          <a:lstStyle/>
+          <a:p>
+            <a:pPr indent="0" marL="0">
+              <a:buNone/>
+            </a:pPr>
+            <a:r>
+              <a:rPr lang="en-US" sz="1450" b="1" dirty="0">
+                <a:solidFill>
+                  <a:srgbClr val="FFFFFF"/>
+                </a:solidFill>
+                <a:latin typeface="Calibri" pitchFamily="34" charset="0"/>
+                <a:ea typeface="Calibri" pitchFamily="34" charset="-122"/>
+                <a:cs typeface="Calibri" pitchFamily="34" charset="-120"/>
+              </a:rPr>
+              <a:t>14 ไฟล์ · ระบบต่อสู้กลาง</a:t>
+            </a:r>
+            <a:endParaRPr lang="en-US" sz="1450" dirty="0"/>
+          </a:p>
+        </p:txBody>
+      </p:sp>
+      <p:sp>
+        <p:nvSpPr>
+          <p:cNvPr id="18" name="Text 16"/>
+          <p:cNvSpPr/>
+          <p:nvPr/>
+        </p:nvSpPr>
+        <p:spPr>
+          <a:xfrm>
+            <a:off x="2971800" y="4050792"/>
+            <a:ext cx="8412480" cy="384048"/>
+          </a:xfrm>
+          <a:prstGeom prst="rect">
+            <a:avLst/>
+          </a:prstGeom>
+          <a:noFill/>
+          <a:ln/>
+        </p:spPr>
+        <p:txBody>
+          <a:bodyPr wrap="square" lIns="0" tIns="0" rIns="0" bIns="0" rtlCol="0" anchor="ctr"/>
+          <a:lstStyle/>
+          <a:p>
+            <a:pPr indent="0" marL="0">
+              <a:buNone/>
+            </a:pPr>
+            <a:r>
+              <a:rPr lang="en-US" sz="1150" dirty="0">
+                <a:solidFill>
+                  <a:srgbClr val="9AA1AC"/>
+                </a:solidFill>
+                <a:latin typeface="Calibri" pitchFamily="34" charset="0"/>
+                <a:ea typeface="Calibri" pitchFamily="34" charset="-122"/>
+                <a:cs typeface="Calibri" pitchFamily="34" charset="-120"/>
+              </a:rPr>
+              <a:t>Soul · BulletBoard · BattleMenu · DamageSystem · MercySystem · ActDispatcher · Karma/Ratings/Web · BossSelectMenu</a:t>
+            </a:r>
+            <a:endParaRPr lang="en-US" sz="1150" dirty="0"/>
+          </a:p>
+        </p:txBody>
+      </p:sp>
+      <p:sp>
+        <p:nvSpPr>
+          <p:cNvPr id="19" name="Shape 17"/>
+          <p:cNvSpPr/>
+          <p:nvPr/>
+        </p:nvSpPr>
+        <p:spPr>
+          <a:xfrm>
+            <a:off x="548640" y="4617720"/>
+            <a:ext cx="11064240" cy="914400"/>
+          </a:xfrm>
+          <a:prstGeom prst="roundRect">
+            <a:avLst>
+              <a:gd name="adj" fmla="val 6000"/>
+            </a:avLst>
+          </a:prstGeom>
+          <a:solidFill>
+            <a:srgbClr val="16181D"/>
+          </a:solidFill>
+          <a:ln w="12700">
+            <a:solidFill>
+              <a:srgbClr val="C77DFF">
+                <a:alpha val="65000"/>
+              </a:srgbClr>
+            </a:solidFill>
+            <a:prstDash val="solid"/>
+          </a:ln>
+          <a:effectLst>
+            <a:outerShdw sx="100000" sy="100000" kx="0" ky="0" algn="bl" rotWithShape="0" blurRad="101600" dist="38100" dir="5400000">
+              <a:srgbClr val="000000">
+                <a:alpha val="50000"/>
+              </a:srgbClr>
+            </a:outerShdw>
+          </a:effectLst>
+        </p:spPr>
+        <p:txBody>
+          <a:bodyPr/>
+          <a:p/>
+        </p:txBody>
+      </p:sp>
+      <p:sp>
+        <p:nvSpPr>
+          <p:cNvPr id="20" name="Shape 18"/>
+          <p:cNvSpPr/>
+          <p:nvPr/>
+        </p:nvSpPr>
+        <p:spPr>
+          <a:xfrm>
+            <a:off x="713232" y="4791456"/>
+            <a:ext cx="2057400" cy="566928"/>
+          </a:xfrm>
+          <a:prstGeom prst="roundRect">
+            <a:avLst>
+              <a:gd name="adj" fmla="val 8065"/>
+            </a:avLst>
+          </a:prstGeom>
+          <a:solidFill>
+            <a:srgbClr val="1E2127"/>
+          </a:solidFill>
+          <a:ln w="12700">
+            <a:solidFill>
+              <a:srgbClr val="C77DFF">
+                <a:alpha val="80000"/>
+              </a:srgbClr>
+            </a:solidFill>
+            <a:prstDash val="solid"/>
+          </a:ln>
+        </p:spPr>
+        <p:txBody>
+          <a:bodyPr/>
+          <a:p/>
+        </p:txBody>
+      </p:sp>
+      <p:sp>
+        <p:nvSpPr>
+          <p:cNvPr id="21" name="Text 19"/>
+          <p:cNvSpPr/>
+          <p:nvPr/>
+        </p:nvSpPr>
+        <p:spPr>
+          <a:xfrm>
+            <a:off x="713232" y="4791456"/>
+            <a:ext cx="2057400" cy="566928"/>
+          </a:xfrm>
+          <a:prstGeom prst="rect">
+            <a:avLst/>
+          </a:prstGeom>
+          <a:noFill/>
+          <a:ln/>
+        </p:spPr>
+        <p:txBody>
+          <a:bodyPr wrap="square" lIns="0" tIns="0" rIns="0" bIns="0" rtlCol="0" anchor="ctr"/>
+          <a:lstStyle/>
+          <a:p>
+            <a:pPr algn="ctr" indent="0" marL="0">
+              <a:buNone/>
+            </a:pPr>
+            <a:r>
+              <a:rPr lang="en-US" sz="1700" b="1" dirty="0">
+                <a:solidFill>
+                  <a:srgbClr val="C77DFF"/>
+                </a:solidFill>
+                <a:latin typeface="Courier New" pitchFamily="34" charset="0"/>
+                <a:ea typeface="Courier New" pitchFamily="34" charset="-122"/>
+                <a:cs typeface="Courier New" pitchFamily="34" charset="-120"/>
+              </a:rPr>
+              <a:t>bullet/</a:t>
+            </a:r>
+            <a:endParaRPr lang="en-US" sz="1700" dirty="0"/>
+          </a:p>
+        </p:txBody>
+      </p:sp>
+      <p:sp>
+        <p:nvSpPr>
+          <p:cNvPr id="22" name="Text 20"/>
+          <p:cNvSpPr/>
+          <p:nvPr/>
+        </p:nvSpPr>
+        <p:spPr>
+          <a:xfrm>
+            <a:off x="2971800" y="4727448"/>
+            <a:ext cx="8503920" cy="365760"/>
+          </a:xfrm>
+          <a:prstGeom prst="rect">
+            <a:avLst/>
+          </a:prstGeom>
+          <a:noFill/>
+          <a:ln/>
+        </p:spPr>
+        <p:txBody>
+          <a:bodyPr wrap="square" lIns="0" tIns="0" rIns="0" bIns="0" rtlCol="0" anchor="ctr"/>
+          <a:lstStyle/>
+          <a:p>
+            <a:pPr indent="0" marL="0">
+              <a:buNone/>
+            </a:pPr>
+            <a:r>
+              <a:rPr lang="en-US" sz="1450" b="1" dirty="0">
+                <a:solidFill>
+                  <a:srgbClr val="FFFFFF"/>
+                </a:solidFill>
+                <a:latin typeface="Calibri" pitchFamily="34" charset="0"/>
+                <a:ea typeface="Calibri" pitchFamily="34" charset="-122"/>
+                <a:cs typeface="Calibri" pitchFamily="34" charset="-120"/>
+              </a:rPr>
+              <a:t>~90 ไฟล์ · กระสุน/แพตเทิร์น</a:t>
+            </a:r>
+            <a:endParaRPr lang="en-US" sz="1450" dirty="0"/>
+          </a:p>
+        </p:txBody>
+      </p:sp>
+      <p:sp>
+        <p:nvSpPr>
+          <p:cNvPr id="23" name="Text 21"/>
+          <p:cNvSpPr/>
+          <p:nvPr/>
+        </p:nvSpPr>
+        <p:spPr>
+          <a:xfrm>
+            <a:off x="2971800" y="5065776"/>
+            <a:ext cx="8412480" cy="384048"/>
+          </a:xfrm>
+          <a:prstGeom prst="rect">
+            <a:avLst/>
+          </a:prstGeom>
+          <a:noFill/>
+          <a:ln/>
+        </p:spPr>
+        <p:txBody>
+          <a:bodyPr wrap="square" lIns="0" tIns="0" rIns="0" bIns="0" rtlCol="0" anchor="ctr">
+            <a:normAutofit/>
+          </a:bodyPr>
+          <a:lstStyle/>
+          <a:p>
+            <a:pPr indent="0" marL="0">
+              <a:buNone/>
+            </a:pPr>
+            <a:r>
+              <a:rPr lang="en-US" sz="1150" dirty="0">
+                <a:solidFill>
+                  <a:srgbClr val="9AA1AC"/>
+                </a:solidFill>
+                <a:latin typeface="Calibri" pitchFamily="34" charset="0"/>
+                <a:ea typeface="Calibri" pitchFamily="34" charset="-122"/>
+                <a:cs typeface="Calibri" pitchFamily="34" charset="-120"/>
+              </a:rPr>
+              <a:t>AttackPattern → Bullet / Generator → ตระกูลกระสุนของแต่ละบอส: bones · gaster · undyne · asgore · mettaton · muffet · toriel · asriel</a:t>
+            </a:r>
+            <a:endParaRPr lang="en-US" sz="1150" dirty="0"/>
+          </a:p>
+        </p:txBody>
+      </p:sp>
+      <p:sp>
+        <p:nvSpPr>
+          <p:cNvPr id="24" name="Shape 22"/>
+          <p:cNvSpPr/>
+          <p:nvPr/>
+        </p:nvSpPr>
+        <p:spPr>
+          <a:xfrm>
+            <a:off x="548640" y="5632704"/>
+            <a:ext cx="11064240" cy="914400"/>
+          </a:xfrm>
+          <a:prstGeom prst="roundRect">
+            <a:avLst>
+              <a:gd name="adj" fmla="val 6000"/>
+            </a:avLst>
+          </a:prstGeom>
+          <a:solidFill>
+            <a:srgbClr val="16181D"/>
+          </a:solidFill>
+          <a:ln w="12700">
+            <a:solidFill>
+              <a:srgbClr val="FF2E2E">
+                <a:alpha val="65000"/>
+              </a:srgbClr>
+            </a:solidFill>
+            <a:prstDash val="solid"/>
+          </a:ln>
+          <a:effectLst>
+            <a:outerShdw sx="100000" sy="100000" kx="0" ky="0" algn="bl" rotWithShape="0" blurRad="101600" dist="38100" dir="5400000">
+              <a:srgbClr val="000000">
+                <a:alpha val="50000"/>
+              </a:srgbClr>
+            </a:outerShdw>
+          </a:effectLst>
+        </p:spPr>
+        <p:txBody>
+          <a:bodyPr/>
+          <a:p/>
+        </p:txBody>
+      </p:sp>
+      <p:sp>
+        <p:nvSpPr>
+          <p:cNvPr id="25" name="Shape 23"/>
+          <p:cNvSpPr/>
+          <p:nvPr/>
+        </p:nvSpPr>
+        <p:spPr>
+          <a:xfrm>
+            <a:off x="713232" y="5806440"/>
+            <a:ext cx="2057400" cy="566928"/>
+          </a:xfrm>
+          <a:prstGeom prst="roundRect">
+            <a:avLst>
+              <a:gd name="adj" fmla="val 8065"/>
+            </a:avLst>
+          </a:prstGeom>
+          <a:solidFill>
+            <a:srgbClr val="1E2127"/>
+          </a:solidFill>
+          <a:ln w="12700">
+            <a:solidFill>
+              <a:srgbClr val="FF2E2E">
+                <a:alpha val="80000"/>
+              </a:srgbClr>
+            </a:solidFill>
+            <a:prstDash val="solid"/>
+          </a:ln>
+        </p:spPr>
+        <p:txBody>
+          <a:bodyPr/>
+          <a:p/>
+        </p:txBody>
+      </p:sp>
+      <p:sp>
+        <p:nvSpPr>
+          <p:cNvPr id="26" name="Text 24"/>
+          <p:cNvSpPr/>
+          <p:nvPr/>
+        </p:nvSpPr>
+        <p:spPr>
+          <a:xfrm>
+            <a:off x="713232" y="5806440"/>
+            <a:ext cx="2057400" cy="566928"/>
+          </a:xfrm>
+          <a:prstGeom prst="rect">
+            <a:avLst/>
+          </a:prstGeom>
+          <a:noFill/>
+          <a:ln/>
+        </p:spPr>
+        <p:txBody>
+          <a:bodyPr wrap="square" lIns="0" tIns="0" rIns="0" bIns="0" rtlCol="0" anchor="ctr"/>
+          <a:lstStyle/>
+          <a:p>
+            <a:pPr algn="ctr" indent="0" marL="0">
+              <a:buNone/>
+            </a:pPr>
+            <a:r>
+              <a:rPr lang="en-US" sz="1700" b="1" dirty="0">
+                <a:solidFill>
+                  <a:srgbClr val="FF2E2E"/>
+                </a:solidFill>
+                <a:latin typeface="Courier New" pitchFamily="34" charset="0"/>
+                <a:ea typeface="Courier New" pitchFamily="34" charset="-122"/>
+                <a:cs typeface="Courier New" pitchFamily="34" charset="-120"/>
+              </a:rPr>
+              <a:t>boss/</a:t>
+            </a:r>
+            <a:endParaRPr lang="en-US" sz="1700" dirty="0"/>
+          </a:p>
+        </p:txBody>
+      </p:sp>
+      <p:sp>
+        <p:nvSpPr>
+          <p:cNvPr id="27" name="Text 25"/>
+          <p:cNvSpPr/>
+          <p:nvPr/>
+        </p:nvSpPr>
+        <p:spPr>
+          <a:xfrm>
+            <a:off x="2971800" y="5742432"/>
+            <a:ext cx="8503920" cy="365760"/>
+          </a:xfrm>
+          <a:prstGeom prst="rect">
+            <a:avLst/>
+          </a:prstGeom>
+          <a:noFill/>
+          <a:ln/>
+        </p:spPr>
+        <p:txBody>
+          <a:bodyPr wrap="square" lIns="0" tIns="0" rIns="0" bIns="0" rtlCol="0" anchor="ctr"/>
+          <a:lstStyle/>
+          <a:p>
+            <a:pPr indent="0" marL="0">
+              <a:buNone/>
+            </a:pPr>
+            <a:r>
+              <a:rPr lang="en-US" sz="1450" b="1" dirty="0">
+                <a:solidFill>
+                  <a:srgbClr val="FFFFFF"/>
+                </a:solidFill>
+                <a:latin typeface="Calibri" pitchFamily="34" charset="0"/>
+                <a:ea typeface="Calibri" pitchFamily="34" charset="-122"/>
+                <a:cs typeface="Calibri" pitchFamily="34" charset="-120"/>
+              </a:rPr>
+              <a:t>~33 ไฟล์ · ตัวบอส 9 ตัว</a:t>
+            </a:r>
+            <a:endParaRPr lang="en-US" sz="1450" dirty="0"/>
+          </a:p>
+        </p:txBody>
+      </p:sp>
+      <p:sp>
+        <p:nvSpPr>
+          <p:cNvPr id="28" name="Text 26"/>
+          <p:cNvSpPr/>
+          <p:nvPr/>
+        </p:nvSpPr>
+        <p:spPr>
+          <a:xfrm>
+            <a:off x="2971800" y="6080760"/>
+            <a:ext cx="8412480" cy="384048"/>
+          </a:xfrm>
+          <a:prstGeom prst="rect">
+            <a:avLst/>
+          </a:prstGeom>
+          <a:noFill/>
+          <a:ln/>
+        </p:spPr>
+        <p:txBody>
+          <a:bodyPr wrap="square" lIns="0" tIns="0" rIns="0" bIns="0" rtlCol="0" anchor="ctr">
+            <a:normAutofit/>
+          </a:bodyPr>
+          <a:lstStyle/>
+          <a:p>
+            <a:pPr indent="0" marL="0">
+              <a:buNone/>
+            </a:pPr>
+            <a:r>
+              <a:rPr lang="en-US" sz="1150" dirty="0">
+                <a:solidFill>
+                  <a:srgbClr val="9AA1AC"/>
+                </a:solidFill>
+                <a:latin typeface="Calibri" pitchFamily="34" charset="0"/>
+                <a:ea typeface="Calibri" pitchFamily="34" charset="-122"/>
+                <a:cs typeface="Calibri" pitchFamily="34" charset="-120"/>
+              </a:rPr>
+              <a:t>Boss/BossBody (controller+body) · Monster · BossRegistry · Papyrus · Sans · Undyne · Asgore · Mettaton EX/NEO · Muffet · Toriel · Asriel</a:t>
+            </a:r>
+            <a:endParaRPr lang="en-US" sz="1150" dirty="0"/>
+          </a:p>
+        </p:txBody>
+      </p:sp>
+      <p:sp>
+        <p:nvSpPr>
+          <p:cNvPr id="29" name="Text 27"/>
+          <p:cNvSpPr/>
+          <p:nvPr/>
+        </p:nvSpPr>
+        <p:spPr>
+          <a:xfrm>
+            <a:off x="548640" y="6382512"/>
+            <a:ext cx="11064240" cy="384048"/>
+          </a:xfrm>
+          <a:prstGeom prst="rect">
+            <a:avLst/>
+          </a:prstGeom>
+          <a:noFill/>
+          <a:ln/>
+        </p:spPr>
+        <p:txBody>
+          <a:bodyPr wrap="square" lIns="0" tIns="0" rIns="0" bIns="0" rtlCol="0" anchor="ctr"/>
+          <a:lstStyle/>
+          <a:p>
+            <a:pPr algn="ctr" indent="0" marL="0">
+              <a:buNone/>
+            </a:pPr>
+            <a:r>
+              <a:rPr lang="en-US" sz="1150" i="1" dirty="0">
+                <a:solidFill>
+                  <a:srgbClr val="FFD43B"/>
+                </a:solidFill>
+                <a:latin typeface="Courier New" pitchFamily="34" charset="0"/>
+                <a:ea typeface="Courier New" pitchFamily="34" charset="-122"/>
+                <a:cs typeface="Courier New" pitchFamily="34" charset="-120"/>
+              </a:rPr>
+              <a:t>ทิศพึ่งพา:  boss · bullet · battle  →  core  →  util   (เลเยอร์บนรู้จักล่าง ไม่ย้อนกลับ — เพิ่มบอสใหม่ไม่ต้องแก้ Core)</a:t>
+            </a:r>
+            <a:endParaRPr lang="en-US" sz="1150" dirty="0"/>
+          </a:p>
+        </p:txBody>
+      </p:sp>
+    </p:spTree>
+  </p:cSld>
+  <p:clrMapOvr>
+    <a:masterClrMapping/>
+  </p:clrMapOvr>
+</p:sld>
+</file>
+
+<file path=ppt/slides/slide20.xml><?xml version="1.0" encoding="utf-8"?>
 <p:sld xmlns:a="http://schemas.openxmlformats.org/drawingml/2006/main" xmlns:r="http://schemas.openxmlformats.org/officeDocument/2006/relationships" xmlns:p="http://schemas.openxmlformats.org/presentationml/2006/main">
   <p:cSld name="Slide 18">
     <p:bg>
@@ -12490,7 +15699,7 @@
 </p:sld>
 </file>
 
-<file path=ppt/slides/slide19.xml><?xml version="1.0" encoding="utf-8"?>
+<file path=ppt/slides/slide21.xml><?xml version="1.0" encoding="utf-8"?>
 <p:sld xmlns:a="http://schemas.openxmlformats.org/drawingml/2006/main" xmlns:r="http://schemas.openxmlformats.org/officeDocument/2006/relationships" xmlns:p="http://schemas.openxmlformats.org/presentationml/2006/main">
   <p:cSld name="Slide 19">
     <p:bg>
@@ -14542,1066 +17751,7 @@
 </p:sld>
 </file>
 
-<file path=ppt/slides/slide2.xml><?xml version="1.0" encoding="utf-8"?>
-<p:sld xmlns:a="http://schemas.openxmlformats.org/drawingml/2006/main" xmlns:r="http://schemas.openxmlformats.org/officeDocument/2006/relationships" xmlns:p="http://schemas.openxmlformats.org/presentationml/2006/main">
-  <p:cSld name="Slide 2">
-    <p:bg>
-      <p:bgPr>
-        <a:solidFill>
-          <a:srgbClr val="0A0A0A"/>
-        </a:solidFill>
-      </p:bgPr>
-    </p:bg>
-    <p:spTree>
-      <p:nvGrpSpPr>
-        <p:cNvPr id="1" name=""/>
-        <p:cNvGrpSpPr/>
-        <p:nvPr/>
-      </p:nvGrpSpPr>
-      <p:grpSpPr>
-        <a:xfrm>
-          <a:off x="0" y="0"/>
-          <a:ext cx="0" cy="0"/>
-          <a:chOff x="0" y="0"/>
-          <a:chExt cx="0" cy="0"/>
-        </a:xfrm>
-      </p:grpSpPr>
-      <p:sp>
-        <p:nvSpPr>
-          <p:cNvPr id="2" name="Text 0"/>
-          <p:cNvSpPr/>
-          <p:nvPr/>
-        </p:nvSpPr>
-        <p:spPr>
-          <a:xfrm>
-            <a:off x="548640" y="365760"/>
-            <a:ext cx="10058400" cy="365760"/>
-          </a:xfrm>
-          <a:prstGeom prst="rect">
-            <a:avLst/>
-          </a:prstGeom>
-          <a:noFill/>
-          <a:ln/>
-        </p:spPr>
-        <p:txBody>
-          <a:bodyPr wrap="square" lIns="0" tIns="0" rIns="0" bIns="0" rtlCol="0" anchor="ctr"/>
-          <a:lstStyle/>
-          <a:p>
-            <a:pPr indent="0" marL="0">
-              <a:buNone/>
-            </a:pPr>
-            <a:r>
-              <a:rPr lang="en-US" sz="1200" b="1" spc="300" kern="0" dirty="0">
-                <a:solidFill>
-                  <a:srgbClr val="FFD43B"/>
-                </a:solidFill>
-                <a:latin typeface="Courier New" pitchFamily="34" charset="0"/>
-                <a:ea typeface="Courier New" pitchFamily="34" charset="-122"/>
-                <a:cs typeface="Courier New" pitchFamily="34" charset="-120"/>
-              </a:rPr>
-              <a:t>ภาพรวมสถาปัตยกรรม</a:t>
-            </a:r>
-            <a:endParaRPr lang="en-US" sz="1200" dirty="0"/>
-          </a:p>
-        </p:txBody>
-      </p:sp>
-      <p:sp>
-        <p:nvSpPr>
-          <p:cNvPr id="3" name="Text 1"/>
-          <p:cNvSpPr/>
-          <p:nvPr/>
-        </p:nvSpPr>
-        <p:spPr>
-          <a:xfrm>
-            <a:off x="548640" y="658368"/>
-            <a:ext cx="11064240" cy="731520"/>
-          </a:xfrm>
-          <a:prstGeom prst="rect">
-            <a:avLst/>
-          </a:prstGeom>
-          <a:noFill/>
-          <a:ln/>
-        </p:spPr>
-        <p:txBody>
-          <a:bodyPr wrap="square" lIns="0" tIns="0" rIns="0" bIns="0" rtlCol="0" anchor="ctr"/>
-          <a:lstStyle/>
-          <a:p>
-            <a:pPr indent="0" marL="0">
-              <a:buNone/>
-            </a:pPr>
-            <a:r>
-              <a:rPr lang="en-US" sz="2800" b="1" dirty="0">
-                <a:solidFill>
-                  <a:srgbClr val="FFFFFF"/>
-                </a:solidFill>
-                <a:latin typeface="Calibri" pitchFamily="34" charset="0"/>
-                <a:ea typeface="Calibri" pitchFamily="34" charset="-122"/>
-                <a:cs typeface="Calibri" pitchFamily="34" charset="-120"/>
-              </a:rPr>
-              <a:t>5 เลเยอร์ — แยกหน้าที่ชัด, พึ่งพา Core ทางเดียว</a:t>
-            </a:r>
-            <a:endParaRPr lang="en-US" sz="2800" dirty="0"/>
-          </a:p>
-        </p:txBody>
-      </p:sp>
-      <p:sp>
-        <p:nvSpPr>
-          <p:cNvPr id="4" name="Shape 2"/>
-          <p:cNvSpPr/>
-          <p:nvPr/>
-        </p:nvSpPr>
-        <p:spPr>
-          <a:xfrm>
-            <a:off x="548640" y="1572768"/>
-            <a:ext cx="11064240" cy="914400"/>
-          </a:xfrm>
-          <a:prstGeom prst="roundRect">
-            <a:avLst>
-              <a:gd name="adj" fmla="val 6000"/>
-            </a:avLst>
-          </a:prstGeom>
-          <a:solidFill>
-            <a:srgbClr val="16181D"/>
-          </a:solidFill>
-          <a:ln w="12700">
-            <a:solidFill>
-              <a:srgbClr val="FF922B">
-                <a:alpha val="65000"/>
-              </a:srgbClr>
-            </a:solidFill>
-            <a:prstDash val="solid"/>
-          </a:ln>
-          <a:effectLst>
-            <a:outerShdw sx="100000" sy="100000" kx="0" ky="0" algn="bl" rotWithShape="0" blurRad="101600" dist="38100" dir="5400000">
-              <a:srgbClr val="000000">
-                <a:alpha val="50000"/>
-              </a:srgbClr>
-            </a:outerShdw>
-          </a:effectLst>
-        </p:spPr>
-      </p:sp>
-      <p:sp>
-        <p:nvSpPr>
-          <p:cNvPr id="5" name="Shape 3"/>
-          <p:cNvSpPr/>
-          <p:nvPr/>
-        </p:nvSpPr>
-        <p:spPr>
-          <a:xfrm>
-            <a:off x="713232" y="1746504"/>
-            <a:ext cx="2057400" cy="566928"/>
-          </a:xfrm>
-          <a:prstGeom prst="roundRect">
-            <a:avLst>
-              <a:gd name="adj" fmla="val 8065"/>
-            </a:avLst>
-          </a:prstGeom>
-          <a:solidFill>
-            <a:srgbClr val="1E2127"/>
-          </a:solidFill>
-          <a:ln w="12700">
-            <a:solidFill>
-              <a:srgbClr val="FF922B">
-                <a:alpha val="80000"/>
-              </a:srgbClr>
-            </a:solidFill>
-            <a:prstDash val="solid"/>
-          </a:ln>
-        </p:spPr>
-      </p:sp>
-      <p:sp>
-        <p:nvSpPr>
-          <p:cNvPr id="6" name="Text 4"/>
-          <p:cNvSpPr/>
-          <p:nvPr/>
-        </p:nvSpPr>
-        <p:spPr>
-          <a:xfrm>
-            <a:off x="713232" y="1746504"/>
-            <a:ext cx="2057400" cy="566928"/>
-          </a:xfrm>
-          <a:prstGeom prst="rect">
-            <a:avLst/>
-          </a:prstGeom>
-          <a:noFill/>
-          <a:ln/>
-        </p:spPr>
-        <p:txBody>
-          <a:bodyPr wrap="square" lIns="0" tIns="0" rIns="0" bIns="0" rtlCol="0" anchor="ctr"/>
-          <a:lstStyle/>
-          <a:p>
-            <a:pPr algn="ctr" indent="0" marL="0">
-              <a:buNone/>
-            </a:pPr>
-            <a:r>
-              <a:rPr lang="en-US" sz="1700" b="1" dirty="0">
-                <a:solidFill>
-                  <a:srgbClr val="FF922B"/>
-                </a:solidFill>
-                <a:latin typeface="Courier New" pitchFamily="34" charset="0"/>
-                <a:ea typeface="Courier New" pitchFamily="34" charset="-122"/>
-                <a:cs typeface="Courier New" pitchFamily="34" charset="-120"/>
-              </a:rPr>
-              <a:t>util/</a:t>
-            </a:r>
-            <a:endParaRPr lang="en-US" sz="1700" dirty="0"/>
-          </a:p>
-        </p:txBody>
-      </p:sp>
-      <p:sp>
-        <p:nvSpPr>
-          <p:cNvPr id="7" name="Text 5"/>
-          <p:cNvSpPr/>
-          <p:nvPr/>
-        </p:nvSpPr>
-        <p:spPr>
-          <a:xfrm>
-            <a:off x="2971800" y="1682496"/>
-            <a:ext cx="8503920" cy="365760"/>
-          </a:xfrm>
-          <a:prstGeom prst="rect">
-            <a:avLst/>
-          </a:prstGeom>
-          <a:noFill/>
-          <a:ln/>
-        </p:spPr>
-        <p:txBody>
-          <a:bodyPr wrap="square" lIns="0" tIns="0" rIns="0" bIns="0" rtlCol="0" anchor="ctr"/>
-          <a:lstStyle/>
-          <a:p>
-            <a:pPr indent="0" marL="0">
-              <a:buNone/>
-            </a:pPr>
-            <a:r>
-              <a:rPr lang="en-US" sz="1450" b="1" dirty="0">
-                <a:solidFill>
-                  <a:srgbClr val="FFFFFF"/>
-                </a:solidFill>
-                <a:latin typeface="Calibri" pitchFamily="34" charset="0"/>
-                <a:ea typeface="Calibri" pitchFamily="34" charset="-122"/>
-                <a:cs typeface="Calibri" pitchFamily="34" charset="-120"/>
-              </a:rPr>
-              <a:t>4 ไฟล์ · เครื่องมือพื้นฐาน</a:t>
-            </a:r>
-            <a:endParaRPr lang="en-US" sz="1450" dirty="0"/>
-          </a:p>
-        </p:txBody>
-      </p:sp>
-      <p:sp>
-        <p:nvSpPr>
-          <p:cNvPr id="8" name="Text 6"/>
-          <p:cNvSpPr/>
-          <p:nvPr/>
-        </p:nvSpPr>
-        <p:spPr>
-          <a:xfrm>
-            <a:off x="2971800" y="2020824"/>
-            <a:ext cx="8412480" cy="384048"/>
-          </a:xfrm>
-          <a:prstGeom prst="rect">
-            <a:avLst/>
-          </a:prstGeom>
-          <a:noFill/>
-          <a:ln/>
-        </p:spPr>
-        <p:txBody>
-          <a:bodyPr wrap="square" lIns="0" tIns="0" rIns="0" bIns="0" rtlCol="0" anchor="ctr"/>
-          <a:lstStyle/>
-          <a:p>
-            <a:pPr indent="0" marL="0">
-              <a:buNone/>
-            </a:pPr>
-            <a:r>
-              <a:rPr lang="en-US" sz="1150" dirty="0">
-                <a:solidFill>
-                  <a:srgbClr val="9AA1AC"/>
-                </a:solidFill>
-                <a:latin typeface="Calibri" pitchFamily="34" charset="0"/>
-                <a:ea typeface="Calibri" pitchFamily="34" charset="-122"/>
-                <a:cs typeface="Calibri" pitchFamily="34" charset="-120"/>
-              </a:rPr>
-              <a:t>GMLHelper (พอร์ตฟังก์ชัน GML) · Assets (สไปรต์/เสียง) · Audio (caster_*) · Fonts (ฟอนต์พิกเซล)</a:t>
-            </a:r>
-            <a:endParaRPr lang="en-US" sz="1150" dirty="0"/>
-          </a:p>
-        </p:txBody>
-      </p:sp>
-      <p:sp>
-        <p:nvSpPr>
-          <p:cNvPr id="9" name="Shape 7"/>
-          <p:cNvSpPr/>
-          <p:nvPr/>
-        </p:nvSpPr>
-        <p:spPr>
-          <a:xfrm>
-            <a:off x="548640" y="2587752"/>
-            <a:ext cx="11064240" cy="914400"/>
-          </a:xfrm>
-          <a:prstGeom prst="roundRect">
-            <a:avLst>
-              <a:gd name="adj" fmla="val 6000"/>
-            </a:avLst>
-          </a:prstGeom>
-          <a:solidFill>
-            <a:srgbClr val="16181D"/>
-          </a:solidFill>
-          <a:ln w="12700">
-            <a:solidFill>
-              <a:srgbClr val="4DA6FF">
-                <a:alpha val="65000"/>
-              </a:srgbClr>
-            </a:solidFill>
-            <a:prstDash val="solid"/>
-          </a:ln>
-          <a:effectLst>
-            <a:outerShdw sx="100000" sy="100000" kx="0" ky="0" algn="bl" rotWithShape="0" blurRad="101600" dist="38100" dir="5400000">
-              <a:srgbClr val="000000">
-                <a:alpha val="50000"/>
-              </a:srgbClr>
-            </a:outerShdw>
-          </a:effectLst>
-        </p:spPr>
-      </p:sp>
-      <p:sp>
-        <p:nvSpPr>
-          <p:cNvPr id="10" name="Shape 8"/>
-          <p:cNvSpPr/>
-          <p:nvPr/>
-        </p:nvSpPr>
-        <p:spPr>
-          <a:xfrm>
-            <a:off x="713232" y="2761488"/>
-            <a:ext cx="2057400" cy="566928"/>
-          </a:xfrm>
-          <a:prstGeom prst="roundRect">
-            <a:avLst>
-              <a:gd name="adj" fmla="val 8065"/>
-            </a:avLst>
-          </a:prstGeom>
-          <a:solidFill>
-            <a:srgbClr val="1E2127"/>
-          </a:solidFill>
-          <a:ln w="12700">
-            <a:solidFill>
-              <a:srgbClr val="4DA6FF">
-                <a:alpha val="80000"/>
-              </a:srgbClr>
-            </a:solidFill>
-            <a:prstDash val="solid"/>
-          </a:ln>
-        </p:spPr>
-      </p:sp>
-      <p:sp>
-        <p:nvSpPr>
-          <p:cNvPr id="11" name="Text 9"/>
-          <p:cNvSpPr/>
-          <p:nvPr/>
-        </p:nvSpPr>
-        <p:spPr>
-          <a:xfrm>
-            <a:off x="713232" y="2761488"/>
-            <a:ext cx="2057400" cy="566928"/>
-          </a:xfrm>
-          <a:prstGeom prst="rect">
-            <a:avLst/>
-          </a:prstGeom>
-          <a:noFill/>
-          <a:ln/>
-        </p:spPr>
-        <p:txBody>
-          <a:bodyPr wrap="square" lIns="0" tIns="0" rIns="0" bIns="0" rtlCol="0" anchor="ctr"/>
-          <a:lstStyle/>
-          <a:p>
-            <a:pPr algn="ctr" indent="0" marL="0">
-              <a:buNone/>
-            </a:pPr>
-            <a:r>
-              <a:rPr lang="en-US" sz="1700" b="1" dirty="0">
-                <a:solidFill>
-                  <a:srgbClr val="4DA6FF"/>
-                </a:solidFill>
-                <a:latin typeface="Courier New" pitchFamily="34" charset="0"/>
-                <a:ea typeface="Courier New" pitchFamily="34" charset="-122"/>
-                <a:cs typeface="Courier New" pitchFamily="34" charset="-120"/>
-              </a:rPr>
-              <a:t>core/</a:t>
-            </a:r>
-            <a:endParaRPr lang="en-US" sz="1700" dirty="0"/>
-          </a:p>
-        </p:txBody>
-      </p:sp>
-      <p:sp>
-        <p:nvSpPr>
-          <p:cNvPr id="12" name="Text 10"/>
-          <p:cNvSpPr/>
-          <p:nvPr/>
-        </p:nvSpPr>
-        <p:spPr>
-          <a:xfrm>
-            <a:off x="2971800" y="2697480"/>
-            <a:ext cx="8503920" cy="365760"/>
-          </a:xfrm>
-          <a:prstGeom prst="rect">
-            <a:avLst/>
-          </a:prstGeom>
-          <a:noFill/>
-          <a:ln/>
-        </p:spPr>
-        <p:txBody>
-          <a:bodyPr wrap="square" lIns="0" tIns="0" rIns="0" bIns="0" rtlCol="0" anchor="ctr"/>
-          <a:lstStyle/>
-          <a:p>
-            <a:pPr indent="0" marL="0">
-              <a:buNone/>
-            </a:pPr>
-            <a:r>
-              <a:rPr lang="en-US" sz="1450" b="1" dirty="0">
-                <a:solidFill>
-                  <a:srgbClr val="FFFFFF"/>
-                </a:solidFill>
-                <a:latin typeface="Calibri" pitchFamily="34" charset="0"/>
-                <a:ea typeface="Calibri" pitchFamily="34" charset="-122"/>
-                <a:cs typeface="Calibri" pitchFamily="34" charset="-120"/>
-              </a:rPr>
-              <a:t>11 ไฟล์ · เครื่องยนต์เกม</a:t>
-            </a:r>
-            <a:endParaRPr lang="en-US" sz="1450" dirty="0"/>
-          </a:p>
-        </p:txBody>
-      </p:sp>
-      <p:sp>
-        <p:nvSpPr>
-          <p:cNvPr id="13" name="Text 11"/>
-          <p:cNvSpPr/>
-          <p:nvPr/>
-        </p:nvSpPr>
-        <p:spPr>
-          <a:xfrm>
-            <a:off x="2971800" y="3035808"/>
-            <a:ext cx="8412480" cy="384048"/>
-          </a:xfrm>
-          <a:prstGeom prst="rect">
-            <a:avLst/>
-          </a:prstGeom>
-          <a:noFill/>
-          <a:ln/>
-        </p:spPr>
-        <p:txBody>
-          <a:bodyPr wrap="square" lIns="0" tIns="0" rIns="0" bIns="0" rtlCol="0" anchor="ctr"/>
-          <a:lstStyle/>
-          <a:p>
-            <a:pPr indent="0" marL="0">
-              <a:buNone/>
-            </a:pPr>
-            <a:r>
-              <a:rPr lang="en-US" sz="1150" dirty="0">
-                <a:solidFill>
-                  <a:srgbClr val="9AA1AC"/>
-                </a:solidFill>
-                <a:latin typeface="Calibri" pitchFamily="34" charset="0"/>
-                <a:ea typeface="Calibri" pitchFamily="34" charset="-122"/>
-                <a:cs typeface="Calibri" pitchFamily="34" charset="-120"/>
-              </a:rPr>
-              <a:t>Game (loop 30 FPS) · Entity/EntityManager (instance list) · GlobalState · TurnManager · Alarm/Event/Sequence · Input · Scene</a:t>
-            </a:r>
-            <a:endParaRPr lang="en-US" sz="1150" dirty="0"/>
-          </a:p>
-        </p:txBody>
-      </p:sp>
-      <p:sp>
-        <p:nvSpPr>
-          <p:cNvPr id="14" name="Shape 12"/>
-          <p:cNvSpPr/>
-          <p:nvPr/>
-        </p:nvSpPr>
-        <p:spPr>
-          <a:xfrm>
-            <a:off x="548640" y="3602736"/>
-            <a:ext cx="11064240" cy="914400"/>
-          </a:xfrm>
-          <a:prstGeom prst="roundRect">
-            <a:avLst>
-              <a:gd name="adj" fmla="val 6000"/>
-            </a:avLst>
-          </a:prstGeom>
-          <a:solidFill>
-            <a:srgbClr val="16181D"/>
-          </a:solidFill>
-          <a:ln w="12700">
-            <a:solidFill>
-              <a:srgbClr val="5BE584">
-                <a:alpha val="65000"/>
-              </a:srgbClr>
-            </a:solidFill>
-            <a:prstDash val="solid"/>
-          </a:ln>
-          <a:effectLst>
-            <a:outerShdw sx="100000" sy="100000" kx="0" ky="0" algn="bl" rotWithShape="0" blurRad="101600" dist="38100" dir="5400000">
-              <a:srgbClr val="000000">
-                <a:alpha val="50000"/>
-              </a:srgbClr>
-            </a:outerShdw>
-          </a:effectLst>
-        </p:spPr>
-      </p:sp>
-      <p:sp>
-        <p:nvSpPr>
-          <p:cNvPr id="15" name="Shape 13"/>
-          <p:cNvSpPr/>
-          <p:nvPr/>
-        </p:nvSpPr>
-        <p:spPr>
-          <a:xfrm>
-            <a:off x="713232" y="3776472"/>
-            <a:ext cx="2057400" cy="566928"/>
-          </a:xfrm>
-          <a:prstGeom prst="roundRect">
-            <a:avLst>
-              <a:gd name="adj" fmla="val 8065"/>
-            </a:avLst>
-          </a:prstGeom>
-          <a:solidFill>
-            <a:srgbClr val="1E2127"/>
-          </a:solidFill>
-          <a:ln w="12700">
-            <a:solidFill>
-              <a:srgbClr val="5BE584">
-                <a:alpha val="80000"/>
-              </a:srgbClr>
-            </a:solidFill>
-            <a:prstDash val="solid"/>
-          </a:ln>
-        </p:spPr>
-      </p:sp>
-      <p:sp>
-        <p:nvSpPr>
-          <p:cNvPr id="16" name="Text 14"/>
-          <p:cNvSpPr/>
-          <p:nvPr/>
-        </p:nvSpPr>
-        <p:spPr>
-          <a:xfrm>
-            <a:off x="713232" y="3776472"/>
-            <a:ext cx="2057400" cy="566928"/>
-          </a:xfrm>
-          <a:prstGeom prst="rect">
-            <a:avLst/>
-          </a:prstGeom>
-          <a:noFill/>
-          <a:ln/>
-        </p:spPr>
-        <p:txBody>
-          <a:bodyPr wrap="square" lIns="0" tIns="0" rIns="0" bIns="0" rtlCol="0" anchor="ctr"/>
-          <a:lstStyle/>
-          <a:p>
-            <a:pPr algn="ctr" indent="0" marL="0">
-              <a:buNone/>
-            </a:pPr>
-            <a:r>
-              <a:rPr lang="en-US" sz="1700" b="1" dirty="0">
-                <a:solidFill>
-                  <a:srgbClr val="5BE584"/>
-                </a:solidFill>
-                <a:latin typeface="Courier New" pitchFamily="34" charset="0"/>
-                <a:ea typeface="Courier New" pitchFamily="34" charset="-122"/>
-                <a:cs typeface="Courier New" pitchFamily="34" charset="-120"/>
-              </a:rPr>
-              <a:t>battle/</a:t>
-            </a:r>
-            <a:endParaRPr lang="en-US" sz="1700" dirty="0"/>
-          </a:p>
-        </p:txBody>
-      </p:sp>
-      <p:sp>
-        <p:nvSpPr>
-          <p:cNvPr id="17" name="Text 15"/>
-          <p:cNvSpPr/>
-          <p:nvPr/>
-        </p:nvSpPr>
-        <p:spPr>
-          <a:xfrm>
-            <a:off x="2971800" y="3712464"/>
-            <a:ext cx="8503920" cy="365760"/>
-          </a:xfrm>
-          <a:prstGeom prst="rect">
-            <a:avLst/>
-          </a:prstGeom>
-          <a:noFill/>
-          <a:ln/>
-        </p:spPr>
-        <p:txBody>
-          <a:bodyPr wrap="square" lIns="0" tIns="0" rIns="0" bIns="0" rtlCol="0" anchor="ctr"/>
-          <a:lstStyle/>
-          <a:p>
-            <a:pPr indent="0" marL="0">
-              <a:buNone/>
-            </a:pPr>
-            <a:r>
-              <a:rPr lang="en-US" sz="1450" b="1" dirty="0">
-                <a:solidFill>
-                  <a:srgbClr val="FFFFFF"/>
-                </a:solidFill>
-                <a:latin typeface="Calibri" pitchFamily="34" charset="0"/>
-                <a:ea typeface="Calibri" pitchFamily="34" charset="-122"/>
-                <a:cs typeface="Calibri" pitchFamily="34" charset="-120"/>
-              </a:rPr>
-              <a:t>15 ไฟล์ · ระบบต่อสู้กลาง</a:t>
-            </a:r>
-            <a:endParaRPr lang="en-US" sz="1450" dirty="0"/>
-          </a:p>
-        </p:txBody>
-      </p:sp>
-      <p:sp>
-        <p:nvSpPr>
-          <p:cNvPr id="18" name="Text 16"/>
-          <p:cNvSpPr/>
-          <p:nvPr/>
-        </p:nvSpPr>
-        <p:spPr>
-          <a:xfrm>
-            <a:off x="2971800" y="4050792"/>
-            <a:ext cx="8412480" cy="384048"/>
-          </a:xfrm>
-          <a:prstGeom prst="rect">
-            <a:avLst/>
-          </a:prstGeom>
-          <a:noFill/>
-          <a:ln/>
-        </p:spPr>
-        <p:txBody>
-          <a:bodyPr wrap="square" lIns="0" tIns="0" rIns="0" bIns="0" rtlCol="0" anchor="ctr"/>
-          <a:lstStyle/>
-          <a:p>
-            <a:pPr indent="0" marL="0">
-              <a:buNone/>
-            </a:pPr>
-            <a:r>
-              <a:rPr lang="en-US" sz="1150" dirty="0">
-                <a:solidFill>
-                  <a:srgbClr val="9AA1AC"/>
-                </a:solidFill>
-                <a:latin typeface="Calibri" pitchFamily="34" charset="0"/>
-                <a:ea typeface="Calibri" pitchFamily="34" charset="-122"/>
-                <a:cs typeface="Calibri" pitchFamily="34" charset="-120"/>
-              </a:rPr>
-              <a:t>Soul · BulletBoard · BattleMenu · DamageSystem · MercySystem · ActDispatcher · Karma/Ratings/Web · BossSelectMenu</a:t>
-            </a:r>
-            <a:endParaRPr lang="en-US" sz="1150" dirty="0"/>
-          </a:p>
-        </p:txBody>
-      </p:sp>
-      <p:sp>
-        <p:nvSpPr>
-          <p:cNvPr id="19" name="Shape 17"/>
-          <p:cNvSpPr/>
-          <p:nvPr/>
-        </p:nvSpPr>
-        <p:spPr>
-          <a:xfrm>
-            <a:off x="548640" y="4617720"/>
-            <a:ext cx="11064240" cy="914400"/>
-          </a:xfrm>
-          <a:prstGeom prst="roundRect">
-            <a:avLst>
-              <a:gd name="adj" fmla="val 6000"/>
-            </a:avLst>
-          </a:prstGeom>
-          <a:solidFill>
-            <a:srgbClr val="16181D"/>
-          </a:solidFill>
-          <a:ln w="12700">
-            <a:solidFill>
-              <a:srgbClr val="C77DFF">
-                <a:alpha val="65000"/>
-              </a:srgbClr>
-            </a:solidFill>
-            <a:prstDash val="solid"/>
-          </a:ln>
-          <a:effectLst>
-            <a:outerShdw sx="100000" sy="100000" kx="0" ky="0" algn="bl" rotWithShape="0" blurRad="101600" dist="38100" dir="5400000">
-              <a:srgbClr val="000000">
-                <a:alpha val="50000"/>
-              </a:srgbClr>
-            </a:outerShdw>
-          </a:effectLst>
-        </p:spPr>
-      </p:sp>
-      <p:sp>
-        <p:nvSpPr>
-          <p:cNvPr id="20" name="Shape 18"/>
-          <p:cNvSpPr/>
-          <p:nvPr/>
-        </p:nvSpPr>
-        <p:spPr>
-          <a:xfrm>
-            <a:off x="713232" y="4791456"/>
-            <a:ext cx="2057400" cy="566928"/>
-          </a:xfrm>
-          <a:prstGeom prst="roundRect">
-            <a:avLst>
-              <a:gd name="adj" fmla="val 8065"/>
-            </a:avLst>
-          </a:prstGeom>
-          <a:solidFill>
-            <a:srgbClr val="1E2127"/>
-          </a:solidFill>
-          <a:ln w="12700">
-            <a:solidFill>
-              <a:srgbClr val="C77DFF">
-                <a:alpha val="80000"/>
-              </a:srgbClr>
-            </a:solidFill>
-            <a:prstDash val="solid"/>
-          </a:ln>
-        </p:spPr>
-      </p:sp>
-      <p:sp>
-        <p:nvSpPr>
-          <p:cNvPr id="21" name="Text 19"/>
-          <p:cNvSpPr/>
-          <p:nvPr/>
-        </p:nvSpPr>
-        <p:spPr>
-          <a:xfrm>
-            <a:off x="713232" y="4791456"/>
-            <a:ext cx="2057400" cy="566928"/>
-          </a:xfrm>
-          <a:prstGeom prst="rect">
-            <a:avLst/>
-          </a:prstGeom>
-          <a:noFill/>
-          <a:ln/>
-        </p:spPr>
-        <p:txBody>
-          <a:bodyPr wrap="square" lIns="0" tIns="0" rIns="0" bIns="0" rtlCol="0" anchor="ctr"/>
-          <a:lstStyle/>
-          <a:p>
-            <a:pPr algn="ctr" indent="0" marL="0">
-              <a:buNone/>
-            </a:pPr>
-            <a:r>
-              <a:rPr lang="en-US" sz="1700" b="1" dirty="0">
-                <a:solidFill>
-                  <a:srgbClr val="C77DFF"/>
-                </a:solidFill>
-                <a:latin typeface="Courier New" pitchFamily="34" charset="0"/>
-                <a:ea typeface="Courier New" pitchFamily="34" charset="-122"/>
-                <a:cs typeface="Courier New" pitchFamily="34" charset="-120"/>
-              </a:rPr>
-              <a:t>bullet/</a:t>
-            </a:r>
-            <a:endParaRPr lang="en-US" sz="1700" dirty="0"/>
-          </a:p>
-        </p:txBody>
-      </p:sp>
-      <p:sp>
-        <p:nvSpPr>
-          <p:cNvPr id="22" name="Text 20"/>
-          <p:cNvSpPr/>
-          <p:nvPr/>
-        </p:nvSpPr>
-        <p:spPr>
-          <a:xfrm>
-            <a:off x="2971800" y="4727448"/>
-            <a:ext cx="8503920" cy="365760"/>
-          </a:xfrm>
-          <a:prstGeom prst="rect">
-            <a:avLst/>
-          </a:prstGeom>
-          <a:noFill/>
-          <a:ln/>
-        </p:spPr>
-        <p:txBody>
-          <a:bodyPr wrap="square" lIns="0" tIns="0" rIns="0" bIns="0" rtlCol="0" anchor="ctr"/>
-          <a:lstStyle/>
-          <a:p>
-            <a:pPr indent="0" marL="0">
-              <a:buNone/>
-            </a:pPr>
-            <a:r>
-              <a:rPr lang="en-US" sz="1450" b="1" dirty="0">
-                <a:solidFill>
-                  <a:srgbClr val="FFFFFF"/>
-                </a:solidFill>
-                <a:latin typeface="Calibri" pitchFamily="34" charset="0"/>
-                <a:ea typeface="Calibri" pitchFamily="34" charset="-122"/>
-                <a:cs typeface="Calibri" pitchFamily="34" charset="-120"/>
-              </a:rPr>
-              <a:t>~60 ไฟล์ · กระสุน/แพตเทิร์น</a:t>
-            </a:r>
-            <a:endParaRPr lang="en-US" sz="1450" dirty="0"/>
-          </a:p>
-        </p:txBody>
-      </p:sp>
-      <p:sp>
-        <p:nvSpPr>
-          <p:cNvPr id="23" name="Text 21"/>
-          <p:cNvSpPr/>
-          <p:nvPr/>
-        </p:nvSpPr>
-        <p:spPr>
-          <a:xfrm>
-            <a:off x="2971800" y="5065776"/>
-            <a:ext cx="8412480" cy="384048"/>
-          </a:xfrm>
-          <a:prstGeom prst="rect">
-            <a:avLst/>
-          </a:prstGeom>
-          <a:noFill/>
-          <a:ln/>
-        </p:spPr>
-        <p:txBody>
-          <a:bodyPr wrap="square" lIns="0" tIns="0" rIns="0" bIns="0" rtlCol="0" anchor="ctr"/>
-          <a:lstStyle/>
-          <a:p>
-            <a:pPr indent="0" marL="0">
-              <a:buNone/>
-            </a:pPr>
-            <a:r>
-              <a:rPr lang="en-US" sz="1150" dirty="0">
-                <a:solidFill>
-                  <a:srgbClr val="9AA1AC"/>
-                </a:solidFill>
-                <a:latin typeface="Calibri" pitchFamily="34" charset="0"/>
-                <a:ea typeface="Calibri" pitchFamily="34" charset="-122"/>
-                <a:cs typeface="Calibri" pitchFamily="34" charset="-120"/>
-              </a:rPr>
-              <a:t>AttackPattern → Bullet / Generator → ตระกูลกระสุนของแต่ละบอส: bones · gaster · undyne · asgore · mettaton · muffet · toriel</a:t>
-            </a:r>
-            <a:endParaRPr lang="en-US" sz="1150" dirty="0"/>
-          </a:p>
-        </p:txBody>
-      </p:sp>
-      <p:sp>
-        <p:nvSpPr>
-          <p:cNvPr id="24" name="Shape 22"/>
-          <p:cNvSpPr/>
-          <p:nvPr/>
-        </p:nvSpPr>
-        <p:spPr>
-          <a:xfrm>
-            <a:off x="548640" y="5632704"/>
-            <a:ext cx="11064240" cy="914400"/>
-          </a:xfrm>
-          <a:prstGeom prst="roundRect">
-            <a:avLst>
-              <a:gd name="adj" fmla="val 6000"/>
-            </a:avLst>
-          </a:prstGeom>
-          <a:solidFill>
-            <a:srgbClr val="16181D"/>
-          </a:solidFill>
-          <a:ln w="12700">
-            <a:solidFill>
-              <a:srgbClr val="FF2E2E">
-                <a:alpha val="65000"/>
-              </a:srgbClr>
-            </a:solidFill>
-            <a:prstDash val="solid"/>
-          </a:ln>
-          <a:effectLst>
-            <a:outerShdw sx="100000" sy="100000" kx="0" ky="0" algn="bl" rotWithShape="0" blurRad="101600" dist="38100" dir="5400000">
-              <a:srgbClr val="000000">
-                <a:alpha val="50000"/>
-              </a:srgbClr>
-            </a:outerShdw>
-          </a:effectLst>
-        </p:spPr>
-      </p:sp>
-      <p:sp>
-        <p:nvSpPr>
-          <p:cNvPr id="25" name="Shape 23"/>
-          <p:cNvSpPr/>
-          <p:nvPr/>
-        </p:nvSpPr>
-        <p:spPr>
-          <a:xfrm>
-            <a:off x="713232" y="5806440"/>
-            <a:ext cx="2057400" cy="566928"/>
-          </a:xfrm>
-          <a:prstGeom prst="roundRect">
-            <a:avLst>
-              <a:gd name="adj" fmla="val 8065"/>
-            </a:avLst>
-          </a:prstGeom>
-          <a:solidFill>
-            <a:srgbClr val="1E2127"/>
-          </a:solidFill>
-          <a:ln w="12700">
-            <a:solidFill>
-              <a:srgbClr val="FF2E2E">
-                <a:alpha val="80000"/>
-              </a:srgbClr>
-            </a:solidFill>
-            <a:prstDash val="solid"/>
-          </a:ln>
-        </p:spPr>
-      </p:sp>
-      <p:sp>
-        <p:nvSpPr>
-          <p:cNvPr id="26" name="Text 24"/>
-          <p:cNvSpPr/>
-          <p:nvPr/>
-        </p:nvSpPr>
-        <p:spPr>
-          <a:xfrm>
-            <a:off x="713232" y="5806440"/>
-            <a:ext cx="2057400" cy="566928"/>
-          </a:xfrm>
-          <a:prstGeom prst="rect">
-            <a:avLst/>
-          </a:prstGeom>
-          <a:noFill/>
-          <a:ln/>
-        </p:spPr>
-        <p:txBody>
-          <a:bodyPr wrap="square" lIns="0" tIns="0" rIns="0" bIns="0" rtlCol="0" anchor="ctr"/>
-          <a:lstStyle/>
-          <a:p>
-            <a:pPr algn="ctr" indent="0" marL="0">
-              <a:buNone/>
-            </a:pPr>
-            <a:r>
-              <a:rPr lang="en-US" sz="1700" b="1" dirty="0">
-                <a:solidFill>
-                  <a:srgbClr val="FF2E2E"/>
-                </a:solidFill>
-                <a:latin typeface="Courier New" pitchFamily="34" charset="0"/>
-                <a:ea typeface="Courier New" pitchFamily="34" charset="-122"/>
-                <a:cs typeface="Courier New" pitchFamily="34" charset="-120"/>
-              </a:rPr>
-              <a:t>boss/</a:t>
-            </a:r>
-            <a:endParaRPr lang="en-US" sz="1700" dirty="0"/>
-          </a:p>
-        </p:txBody>
-      </p:sp>
-      <p:sp>
-        <p:nvSpPr>
-          <p:cNvPr id="27" name="Text 25"/>
-          <p:cNvSpPr/>
-          <p:nvPr/>
-        </p:nvSpPr>
-        <p:spPr>
-          <a:xfrm>
-            <a:off x="2971800" y="5742432"/>
-            <a:ext cx="8503920" cy="365760"/>
-          </a:xfrm>
-          <a:prstGeom prst="rect">
-            <a:avLst/>
-          </a:prstGeom>
-          <a:noFill/>
-          <a:ln/>
-        </p:spPr>
-        <p:txBody>
-          <a:bodyPr wrap="square" lIns="0" tIns="0" rIns="0" bIns="0" rtlCol="0" anchor="ctr"/>
-          <a:lstStyle/>
-          <a:p>
-            <a:pPr indent="0" marL="0">
-              <a:buNone/>
-            </a:pPr>
-            <a:r>
-              <a:rPr lang="en-US" sz="1450" b="1" dirty="0">
-                <a:solidFill>
-                  <a:srgbClr val="FFFFFF"/>
-                </a:solidFill>
-                <a:latin typeface="Calibri" pitchFamily="34" charset="0"/>
-                <a:ea typeface="Calibri" pitchFamily="34" charset="-122"/>
-                <a:cs typeface="Calibri" pitchFamily="34" charset="-120"/>
-              </a:rPr>
-              <a:t>~20 ไฟล์ · ตัวบอส 8 ตัว</a:t>
-            </a:r>
-            <a:endParaRPr lang="en-US" sz="1450" dirty="0"/>
-          </a:p>
-        </p:txBody>
-      </p:sp>
-      <p:sp>
-        <p:nvSpPr>
-          <p:cNvPr id="28" name="Text 26"/>
-          <p:cNvSpPr/>
-          <p:nvPr/>
-        </p:nvSpPr>
-        <p:spPr>
-          <a:xfrm>
-            <a:off x="2971800" y="6080760"/>
-            <a:ext cx="8412480" cy="384048"/>
-          </a:xfrm>
-          <a:prstGeom prst="rect">
-            <a:avLst/>
-          </a:prstGeom>
-          <a:noFill/>
-          <a:ln/>
-        </p:spPr>
-        <p:txBody>
-          <a:bodyPr wrap="square" lIns="0" tIns="0" rIns="0" bIns="0" rtlCol="0" anchor="ctr"/>
-          <a:lstStyle/>
-          <a:p>
-            <a:pPr indent="0" marL="0">
-              <a:buNone/>
-            </a:pPr>
-            <a:r>
-              <a:rPr lang="en-US" sz="1150" dirty="0">
-                <a:solidFill>
-                  <a:srgbClr val="9AA1AC"/>
-                </a:solidFill>
-                <a:latin typeface="Calibri" pitchFamily="34" charset="0"/>
-                <a:ea typeface="Calibri" pitchFamily="34" charset="-122"/>
-                <a:cs typeface="Calibri" pitchFamily="34" charset="-120"/>
-              </a:rPr>
-              <a:t>Boss/BossBody (controller+body) · Monster · BossRegistry · Papyrus · Sans · Undyne · Asgore · Mettaton EX/NEO · Muffet · Toriel</a:t>
-            </a:r>
-            <a:endParaRPr lang="en-US" sz="1150" dirty="0"/>
-          </a:p>
-        </p:txBody>
-      </p:sp>
-      <p:sp>
-        <p:nvSpPr>
-          <p:cNvPr id="29" name="Text 27"/>
-          <p:cNvSpPr/>
-          <p:nvPr/>
-        </p:nvSpPr>
-        <p:spPr>
-          <a:xfrm>
-            <a:off x="548640" y="6382512"/>
-            <a:ext cx="11064240" cy="384048"/>
-          </a:xfrm>
-          <a:prstGeom prst="rect">
-            <a:avLst/>
-          </a:prstGeom>
-          <a:noFill/>
-          <a:ln/>
-        </p:spPr>
-        <p:txBody>
-          <a:bodyPr wrap="square" lIns="0" tIns="0" rIns="0" bIns="0" rtlCol="0" anchor="ctr"/>
-          <a:lstStyle/>
-          <a:p>
-            <a:pPr algn="ctr" indent="0" marL="0">
-              <a:buNone/>
-            </a:pPr>
-            <a:r>
-              <a:rPr lang="en-US" sz="1150" i="1" dirty="0">
-                <a:solidFill>
-                  <a:srgbClr val="FFD43B"/>
-                </a:solidFill>
-                <a:latin typeface="Courier New" pitchFamily="34" charset="0"/>
-                <a:ea typeface="Courier New" pitchFamily="34" charset="-122"/>
-                <a:cs typeface="Courier New" pitchFamily="34" charset="-120"/>
-              </a:rPr>
-              <a:t>ทิศพึ่งพา:  boss · bullet · battle  →  core  →  util   (เลเยอร์บนรู้จักล่าง ไม่ย้อนกลับ — เพิ่มบอสใหม่ไม่ต้องแก้ Core)</a:t>
-            </a:r>
-            <a:endParaRPr lang="en-US" sz="1150" dirty="0"/>
-          </a:p>
-        </p:txBody>
-      </p:sp>
-    </p:spTree>
-  </p:cSld>
-  <p:clrMapOvr>
-    <a:masterClrMapping/>
-  </p:clrMapOvr>
-</p:sld>
-</file>
-
-<file path=ppt/slides/slide20.xml><?xml version="1.0" encoding="utf-8"?>
+<file path=ppt/slides/slide22.xml><?xml version="1.0" encoding="utf-8"?>
 <p:sld xmlns:a="http://schemas.openxmlformats.org/drawingml/2006/main" xmlns:r="http://schemas.openxmlformats.org/officeDocument/2006/relationships" xmlns:p="http://schemas.openxmlformats.org/presentationml/2006/main">
   <p:cSld name="Slide 20">
     <p:bg>
@@ -15697,7 +17847,7 @@
                 <a:ea typeface="Calibri" pitchFamily="34" charset="-122"/>
                 <a:cs typeface="Calibri" pitchFamily="34" charset="-120"/>
               </a:rPr>
-              <a:t>ฟีเจอร์รอบนี้ + code-health — สะอาด, เขียว, เทสต์ผ่าน 44</a:t>
+              <a:t>ฟีเจอร์รอบนี้ + code-health — สะอาด, เขียว, เทสต์ผ่าน 49</a:t>
             </a:r>
             <a:endParaRPr lang="en-US" sz="2800" dirty="0"/>
           </a:p>
@@ -15738,6 +17888,10 @@
             </a:outerShdw>
           </a:effectLst>
         </p:spPr>
+        <p:txBody>
+          <a:bodyPr/>
+          <a:p/>
+        </p:txBody>
       </p:sp>
       <p:sp>
         <p:nvSpPr>
@@ -15796,7 +17950,9 @@
           <a:ln/>
         </p:spPr>
         <p:txBody>
-          <a:bodyPr wrap="square" lIns="0" tIns="0" rIns="0" bIns="0" rtlCol="0" anchor="t"/>
+          <a:bodyPr wrap="square" lIns="0" tIns="0" rIns="0" bIns="0" rtlCol="0" anchor="t">
+            <a:normAutofit/>
+          </a:bodyPr>
           <a:lstStyle/>
           <a:p>
             <a:pPr marL="165100" indent="-165100">
@@ -15818,9 +17974,8 @@
                 <a:ea typeface="Calibri" pitchFamily="34" charset="-122"/>
                 <a:cs typeface="Calibri" pitchFamily="34" charset="-120"/>
               </a:rPr>
-              <a:t>ไม่มี debug print หลง · ไม่มี exception ที่ถูกกลืน</a:t>
-            </a:r>
-            <a:endParaRPr lang="en-US" sz="1130" dirty="0"/>
+              <a:t>ไม่มี debug print หลง · ไม่มี exception ที่ถูกกลืน · ไม่มี dead code</a:t>
+            </a:r>
           </a:p>
           <a:p>
             <a:pPr marL="165100" indent="-165100">
@@ -15842,9 +17997,8 @@
                 <a:ea typeface="Calibri" pitchFamily="34" charset="-122"/>
                 <a:cs typeface="Calibri" pitchFamily="34" charset="-120"/>
               </a:rPr>
-              <a:t>ไม่มี dead code (intensity/fonts ตรวจแล้วใช้จริง+แคชแล้ว)</a:t>
-            </a:r>
-            <a:endParaRPr lang="en-US" sz="1130" dirty="0"/>
+              <a:t>ลบฟิลด์ตาย 1 จุด — AsrielFinalBody.bodyfader (ไม่เคยอ่าน/เขียน)</a:t>
+            </a:r>
           </a:p>
           <a:p>
             <a:pPr marL="165100" indent="-165100">
@@ -15866,9 +18020,8 @@
                 <a:ea typeface="Calibri" pitchFamily="34" charset="-122"/>
                 <a:cs typeface="Calibri" pitchFamily="34" charset="-120"/>
               </a:rPr>
-              <a:t>javadoc ครบทุกคลาส + คอมเมนต์อินไลน์ละเอียดอยู่แล้ว</a:t>
-            </a:r>
-            <a:endParaRPr lang="en-US" sz="1130" dirty="0"/>
+              <a:t>แก้ javadoc AsrielBoss ที่ล้าสมัย (เคยบอกว่าท่ายังไม่ทำ ทั้งที่ทำครบ)</a:t>
+            </a:r>
           </a:p>
           <a:p>
             <a:pPr marL="165100" indent="-165100">
@@ -15890,33 +18043,8 @@
                 <a:ea typeface="Calibri" pitchFamily="34" charset="-122"/>
                 <a:cs typeface="Calibri" pitchFamily="34" charset="-120"/>
               </a:rPr>
-              <a:t>TODO ที่เหลือ 1 จุด = หมายเหตุ branch GML ที่เข้าไม่ถึง (ตั้งใจ)</a:t>
-            </a:r>
-            <a:endParaRPr lang="en-US" sz="1130" dirty="0"/>
-          </a:p>
-          <a:p>
-            <a:pPr marL="165100" indent="-165100">
-              <a:lnSpc>
-                <a:spcPct val="100000"/>
-              </a:lnSpc>
-              <a:spcAft>
-                <a:spcPts val="400"/>
-              </a:spcAft>
-              <a:buSzPct val="100000"/>
-              <a:buChar char="•"/>
-            </a:pPr>
-            <a:r>
-              <a:rPr lang="en-US" sz="1130" dirty="0">
-                <a:solidFill>
-                  <a:srgbClr val="FFFFFF"/>
-                </a:solidFill>
-                <a:latin typeface="Calibri" pitchFamily="34" charset="0"/>
-                <a:ea typeface="Calibri" pitchFamily="34" charset="-122"/>
-                <a:cs typeface="Calibri" pitchFamily="34" charset="-120"/>
-              </a:rPr>
-              <a:t>Assets System.err = คำเตือน asset หาย (ตั้งใจ, ไม่ใช่ debug)</a:t>
-            </a:r>
-            <a:endParaRPr lang="en-US" sz="1130" dirty="0"/>
+              <a:t>javadoc ครบทุกคลาส · TODO เหลือ 1 จุด (SansBody a_type 9 เข้าไม่ถึง)</a:t>
+            </a:r>
           </a:p>
         </p:txBody>
       </p:sp>
@@ -15955,6 +18083,10 @@
             </a:outerShdw>
           </a:effectLst>
         </p:spPr>
+        <p:txBody>
+          <a:bodyPr/>
+          <a:p/>
+        </p:txBody>
       </p:sp>
       <p:sp>
         <p:nvSpPr>
@@ -15989,9 +18121,8 @@
                 <a:ea typeface="Courier New" pitchFamily="34" charset="-122"/>
                 <a:cs typeface="Courier New" pitchFamily="34" charset="-120"/>
               </a:rPr>
-              <a:t>⚡ ฟีเจอร์รอบนี้: เพิ่มบอส TORIEL — บอสตัวแรก</a:t>
-            </a:r>
-            <a:endParaRPr lang="en-US" sz="1350" dirty="0"/>
+              <a:t>⚡ บอสล่าสุด: ASRIEL DREEMURR — ฉากจบสองพาร์ต</a:t>
+            </a:r>
           </a:p>
         </p:txBody>
       </p:sp>
@@ -16013,7 +18144,9 @@
           <a:ln/>
         </p:spPr>
         <p:txBody>
-          <a:bodyPr wrap="square" lIns="0" tIns="0" rIns="0" bIns="0" rtlCol="0" anchor="t"/>
+          <a:bodyPr wrap="square" lIns="0" tIns="0" rIns="0" bIns="0" rtlCol="0" anchor="t">
+            <a:normAutofit/>
+          </a:bodyPr>
           <a:lstStyle/>
           <a:p>
             <a:pPr marL="165100" indent="-165100">
@@ -16035,9 +18168,8 @@
                 <a:ea typeface="Calibri" pitchFamily="34" charset="-122"/>
                 <a:cs typeface="Calibri" pitchFamily="34" charset="-120"/>
               </a:rPr>
-              <a:t>ไฟล์ใหม่ boss/TorielBoss + TorielBody + bullet/toriel (FireHelix · MiniHelix · ChaseFire · HandBullet) — ไม่แตะ Core, เพิ่มแค่ 1 บรรทัดใน BossRegistry</a:t>
-            </a:r>
-            <a:endParaRPr lang="en-US" sz="1130" dirty="0"/>
+              <a:t>Part A — GOD of Hyperdeath: ด่านสคริปต์ turns 0→13 (Star/Galacta Blazing · Shocker Breaker · Chaos Saber · Chaos Buster · Hyper Goner) → แปลงร่าง</a:t>
+            </a:r>
           </a:p>
           <a:p>
             <a:pPr marL="165100" indent="-165100">
@@ -16059,9 +18191,8 @@
                 <a:ea typeface="Calibri" pitchFamily="34" charset="-122"/>
                 <a:cs typeface="Calibri" pitchFamily="34" charset="-120"/>
               </a:rPr>
-              <a:t>5 ท่าสุ่มจาก mycommand: เสาไฟ helix (กล่องสูง) + มือกวาดไฟตามเป้า (กล่องกว้าง); ตัด Faltering และ softening ตอนเลือดต่ำออก</a:t>
-            </a:r>
-            <a:endParaRPr lang="en-US" sz="1130" dirty="0"/>
+              <a:t>Part B — Angel of Death: วงจรตาย → SAVE → 4 มินิไฟต์ Lost Soul (Undyne · Alphys · พี่น้องโครงกระดูก · ตระกูล Dreemurr) → SAVE Asriel → ชนะ</a:t>
+            </a:r>
           </a:p>
           <a:p>
             <a:pPr marL="165100" indent="-165100">
@@ -16083,33 +18214,8 @@
                 <a:ea typeface="Calibri" pitchFamily="34" charset="-122"/>
                 <a:cs typeface="Calibri" pitchFamily="34" charset="-120"/>
               </a:rPr>
-              <a:t>จบได้ 2 ทาง: ปฏิเสธจะสู้ (สาย conversation = ไว้ชีวิต) และกับดัก DEF ร่วงที่ HP ≤ 150 (ฆ่า) แต่ละทางมีบทพูดของตัวเอง</a:t>
-            </a:r>
-            <a:endParaRPr lang="en-US" sz="1130" dirty="0"/>
-          </a:p>
-          <a:p>
-            <a:pPr marL="165100" indent="-165100">
-              <a:lnSpc>
-                <a:spcPct val="100000"/>
-              </a:lnSpc>
-              <a:spcAft>
-                <a:spcPts val="400"/>
-              </a:spcAft>
-              <a:buSzPct val="100000"/>
-              <a:buChar char="•"/>
-            </a:pPr>
-            <a:r>
-              <a:rPr lang="en-US" sz="1130" dirty="0">
-                <a:solidFill>
-                  <a:srgbClr val="FFFFFF"/>
-                </a:solidFill>
-                <a:latin typeface="Calibri" pitchFamily="34" charset="0"/>
-                <a:ea typeface="Calibri" pitchFamily="34" charset="-122"/>
-                <a:cs typeface="Calibri" pitchFamily="34" charset="-120"/>
-              </a:rPr>
-              <a:t>เพิ่มเทสต์ TorielBossTest 9 เคส (สเตตัส · ทุกท่า · ไว้ชีวิต · ฆ่า · genocide · render) — รวมเป็น 44 เทสต์เขียว</a:t>
-            </a:r>
-            <a:endParaRPr lang="en-US" sz="1130" dirty="0"/>
+              <a:t>ไฟล์ใหม่ Asriel{Boss,Body,Background,FinalBody} + boss/asriel + bullet/asriel (16 ไฟล์) — ไม่แตะ Core, เพิ่ม registry 1 บรรทัด (9=Asriel)</a:t>
+            </a:r>
           </a:p>
         </p:txBody>
       </p:sp>
@@ -16148,6 +18254,10 @@
             </a:outerShdw>
           </a:effectLst>
         </p:spPr>
+        <p:txBody>
+          <a:bodyPr/>
+          <a:p/>
+        </p:txBody>
       </p:sp>
       <p:sp>
         <p:nvSpPr>
@@ -16182,7 +18292,7 @@
                 <a:ea typeface="Courier New" pitchFamily="34" charset="-122"/>
                 <a:cs typeface="Courier New" pitchFamily="34" charset="-120"/>
               </a:rPr>
-              <a:t>BUILD SUCCESSFUL   ·   TESTS: 44 run, 0 failed, 0 errored, 0 skipped   ·   RESULT: PASS</a:t>
+              <a:t>BUILD SUCCESSFUL   ·   TESTS: 49 run, 0 failed, 0 errored, 0 skipped   ·   RESULT: PASS</a:t>
             </a:r>
             <a:endParaRPr lang="en-US" sz="1700" dirty="0"/>
           </a:p>
@@ -16221,7 +18331,7 @@
                 <a:ea typeface="Calibri" pitchFamily="34" charset="-122"/>
                 <a:cs typeface="Calibri" pitchFamily="34" charset="-120"/>
               </a:rPr>
-              <a:t>ยืนยันก่อน-หลังแก้: 36 → 44 เทสต์ผ่าน — บอสใหม่เสียบผ่าน registry ไม่แตะ Core</a:t>
+              <a:t>ยืนยันก่อน-หลังแก้: 44 → 49 เทสต์ผ่าน — บอสใหม่เสียบผ่าน registry ไม่แตะ Core</a:t>
             </a:r>
             <a:endParaRPr lang="en-US" sz="1300" dirty="0"/>
           </a:p>
@@ -16263,841 +18373,6 @@
               <a:t>เหตุผลที่ไม่รื้อคอมเมนต์ทั้ง 20k บรรทัด: โค้ดมี javadoc/คอมเมนต์ละเอียดครบอยู่แล้ว — การ re-comment ยกชุดคือ churn ที่เพิ่มความเสี่ยงโดยไม่ได้คุณค่า จึงเพิ่มคอมเมนต์เฉพาะจุดที่แก้จริง (ไฟล์ Toriel ที่เพิ่มใหม่)</a:t>
             </a:r>
             <a:endParaRPr lang="en-US" sz="1200" dirty="0"/>
-          </a:p>
-        </p:txBody>
-      </p:sp>
-    </p:spTree>
-  </p:cSld>
-  <p:clrMapOvr>
-    <a:masterClrMapping/>
-  </p:clrMapOvr>
-</p:sld>
-</file>
-
-<file path=ppt/slides/slide21.xml><?xml version="1.0" encoding="utf-8"?>
-<p:sld xmlns:a="http://schemas.openxmlformats.org/drawingml/2006/main" xmlns:r="http://schemas.openxmlformats.org/officeDocument/2006/relationships" xmlns:p="http://schemas.openxmlformats.org/presentationml/2006/main">
-  <p:cSld name="Slide 12">
-    <p:bg>
-      <p:bgPr>
-        <a:solidFill>
-          <a:srgbClr val="0A0A0A"/>
-        </a:solidFill>
-      </p:bgPr>
-    </p:bg>
-    <p:spTree>
-      <p:nvGrpSpPr>
-        <p:cNvPr id="1" name=""/>
-        <p:cNvGrpSpPr/>
-        <p:nvPr/>
-      </p:nvGrpSpPr>
-      <p:grpSpPr>
-        <a:xfrm>
-          <a:off x="0" y="0"/>
-          <a:ext cx="0" cy="0"/>
-          <a:chOff x="0" y="0"/>
-          <a:chExt cx="0" cy="0"/>
-        </a:xfrm>
-      </p:grpSpPr>
-      <p:sp>
-        <p:nvSpPr>
-          <p:cNvPr id="2" name="Text 0"/>
-          <p:cNvSpPr/>
-          <p:nvPr/>
-        </p:nvSpPr>
-        <p:spPr>
-          <a:xfrm>
-            <a:off x="548640" y="365760"/>
-            <a:ext cx="10058400" cy="365760"/>
-          </a:xfrm>
-          <a:prstGeom prst="rect">
-            <a:avLst/>
-          </a:prstGeom>
-          <a:noFill/>
-          <a:ln/>
-        </p:spPr>
-        <p:txBody>
-          <a:bodyPr wrap="square" lIns="0" tIns="0" rIns="0" bIns="0" rtlCol="0" anchor="ctr"/>
-          <a:lstStyle/>
-          <a:p>
-            <a:pPr indent="0" marL="0">
-              <a:buNone/>
-            </a:pPr>
-            <a:r>
-              <a:rPr lang="en-US" sz="1200" b="1" spc="300" kern="0" dirty="0">
-                <a:solidFill>
-                  <a:srgbClr val="4DA6FF"/>
-                </a:solidFill>
-                <a:latin typeface="Courier New" pitchFamily="34" charset="0"/>
-                <a:ea typeface="Courier New" pitchFamily="34" charset="-122"/>
-                <a:cs typeface="Courier New" pitchFamily="34" charset="-120"/>
-              </a:rPr>
-              <a:t>เจาะลึกบอส 1/5 — บอสตัวแรก</a:t>
-            </a:r>
-            <a:endParaRPr lang="en-US" sz="1200" dirty="0"/>
-          </a:p>
-        </p:txBody>
-      </p:sp>
-      <p:sp>
-        <p:nvSpPr>
-          <p:cNvPr id="3" name="Text 1"/>
-          <p:cNvSpPr/>
-          <p:nvPr/>
-        </p:nvSpPr>
-        <p:spPr>
-          <a:xfrm>
-            <a:off x="548640" y="658368"/>
-            <a:ext cx="11064240" cy="731520"/>
-          </a:xfrm>
-          <a:prstGeom prst="rect">
-            <a:avLst/>
-          </a:prstGeom>
-          <a:noFill/>
-          <a:ln/>
-        </p:spPr>
-        <p:txBody>
-          <a:bodyPr wrap="square" lIns="0" tIns="0" rIns="0" bIns="0" rtlCol="0" anchor="ctr"/>
-          <a:lstStyle/>
-          <a:p>
-            <a:pPr indent="0" marL="0">
-              <a:buNone/>
-            </a:pPr>
-            <a:r>
-              <a:rPr lang="en-US" sz="2800" b="1" dirty="0">
-                <a:solidFill>
-                  <a:srgbClr val="FFFFFF"/>
-                </a:solidFill>
-                <a:latin typeface="Calibri" pitchFamily="34" charset="0"/>
-                <a:ea typeface="Calibri" pitchFamily="34" charset="-122"/>
-                <a:cs typeface="Calibri" pitchFamily="34" charset="-120"/>
-              </a:rPr>
-              <a:t>Toriel (obj_torielboss) — ไฟกับมือ, มีทางออก 2 ทาง</a:t>
-            </a:r>
-            <a:endParaRPr lang="en-US" sz="2800" dirty="0"/>
-          </a:p>
-        </p:txBody>
-      </p:sp>
-      <p:sp>
-        <p:nvSpPr>
-          <p:cNvPr id="4" name="Text 2"/>
-          <p:cNvSpPr/>
-          <p:nvPr/>
-        </p:nvSpPr>
-        <p:spPr>
-          <a:xfrm>
-            <a:off x="548640" y="1444752"/>
-            <a:ext cx="11064240" cy="594360"/>
-          </a:xfrm>
-          <a:prstGeom prst="rect">
-            <a:avLst/>
-          </a:prstGeom>
-          <a:noFill/>
-          <a:ln/>
-        </p:spPr>
-        <p:txBody>
-          <a:bodyPr wrap="square" lIns="0" tIns="0" rIns="0" bIns="0" rtlCol="0" anchor="ctr"/>
-          <a:lstStyle/>
-          <a:p>
-            <a:pPr indent="0" marL="0">
-              <a:buNone/>
-            </a:pPr>
-            <a:r>
-              <a:rPr lang="en-US" sz="1250" dirty="0">
-                <a:solidFill>
-                  <a:srgbClr val="9AA1AC"/>
-                </a:solidFill>
-                <a:latin typeface="Calibri" pitchFamily="34" charset="0"/>
-                <a:ea typeface="Calibri" pitchFamily="34" charset="-122"/>
-                <a:cs typeface="Calibri" pitchFamily="34" charset="-120"/>
-              </a:rPr>
-              <a:t>HP 440 / ATK 6 / DEF 1 ด่านไฟและมือกวาดยาว ๆ มีทางผ่าน 2 ทาง: ตีจนเลือดต่ำจนกับดัก DEF ทำให้หมัดถัดไปฆ่าได้ หรือปฏิเสธที่จะสู้จนเธอยอมแพ้</a:t>
-            </a:r>
-            <a:endParaRPr lang="en-US" sz="1250" dirty="0"/>
-          </a:p>
-        </p:txBody>
-      </p:sp>
-      <p:sp>
-        <p:nvSpPr>
-          <p:cNvPr id="5" name="Shape 3"/>
-          <p:cNvSpPr/>
-          <p:nvPr/>
-        </p:nvSpPr>
-        <p:spPr>
-          <a:xfrm>
-            <a:off x="548640" y="2148840"/>
-            <a:ext cx="5532120" cy="1874520"/>
-          </a:xfrm>
-          <a:prstGeom prst="roundRect">
-            <a:avLst>
-              <a:gd name="adj" fmla="val 3415"/>
-            </a:avLst>
-          </a:prstGeom>
-          <a:solidFill>
-            <a:srgbClr val="16181D"/>
-          </a:solidFill>
-          <a:ln w="12700">
-            <a:solidFill>
-              <a:srgbClr val="4DA6FF">
-                <a:alpha val="65000"/>
-              </a:srgbClr>
-            </a:solidFill>
-            <a:prstDash val="solid"/>
-          </a:ln>
-          <a:effectLst>
-            <a:outerShdw sx="100000" sy="100000" kx="0" ky="0" algn="bl" rotWithShape="0" blurRad="101600" dist="38100" dir="5400000">
-              <a:srgbClr val="000000">
-                <a:alpha val="50000"/>
-              </a:srgbClr>
-            </a:outerShdw>
-          </a:effectLst>
-        </p:spPr>
-      </p:sp>
-      <p:sp>
-        <p:nvSpPr>
-          <p:cNvPr id="6" name="Text 4"/>
-          <p:cNvSpPr/>
-          <p:nvPr/>
-        </p:nvSpPr>
-        <p:spPr>
-          <a:xfrm>
-            <a:off x="731520" y="2258568"/>
-            <a:ext cx="5166360" cy="329184"/>
-          </a:xfrm>
-          <a:prstGeom prst="rect">
-            <a:avLst/>
-          </a:prstGeom>
-          <a:noFill/>
-          <a:ln/>
-        </p:spPr>
-        <p:txBody>
-          <a:bodyPr wrap="square" lIns="0" tIns="0" rIns="0" bIns="0" rtlCol="0" anchor="ctr"/>
-          <a:lstStyle/>
-          <a:p>
-            <a:pPr indent="0" marL="0">
-              <a:buNone/>
-            </a:pPr>
-            <a:r>
-              <a:rPr lang="en-US" sz="1350" b="1" dirty="0">
-                <a:solidFill>
-                  <a:srgbClr val="4DA6FF"/>
-                </a:solidFill>
-                <a:latin typeface="Courier New" pitchFamily="34" charset="0"/>
-                <a:ea typeface="Courier New" pitchFamily="34" charset="-122"/>
-                <a:cs typeface="Courier New" pitchFamily="34" charset="-120"/>
-              </a:rPr>
-              <a:t>กลไกหลัก</a:t>
-            </a:r>
-            <a:endParaRPr lang="en-US" sz="1350" dirty="0"/>
-          </a:p>
-        </p:txBody>
-      </p:sp>
-      <p:sp>
-        <p:nvSpPr>
-          <p:cNvPr id="7" name="Text 5"/>
-          <p:cNvSpPr/>
-          <p:nvPr/>
-        </p:nvSpPr>
-        <p:spPr>
-          <a:xfrm>
-            <a:off x="731520" y="2651760"/>
-            <a:ext cx="5166360" cy="1271016"/>
-          </a:xfrm>
-          <a:prstGeom prst="rect">
-            <a:avLst/>
-          </a:prstGeom>
-          <a:noFill/>
-          <a:ln/>
-        </p:spPr>
-        <p:txBody>
-          <a:bodyPr wrap="square" lIns="0" tIns="0" rIns="0" bIns="0" rtlCol="0" anchor="t"/>
-          <a:lstStyle/>
-          <a:p>
-            <a:pPr marL="165100" indent="-165100">
-              <a:lnSpc>
-                <a:spcPct val="100000"/>
-              </a:lnSpc>
-              <a:spcAft>
-                <a:spcPts val="400"/>
-              </a:spcAft>
-              <a:buSzPct val="100000"/>
-              <a:buChar char="•"/>
-            </a:pPr>
-            <a:r>
-              <a:rPr lang="en-US" sz="1100" dirty="0">
-                <a:solidFill>
-                  <a:srgbClr val="FFFFFF"/>
-                </a:solidFill>
-                <a:latin typeface="Calibri" pitchFamily="34" charset="0"/>
-                <a:ea typeface="Calibri" pitchFamily="34" charset="-122"/>
-                <a:cs typeface="Calibri" pitchFamily="34" charset="-120"/>
-              </a:rPr>
-              <a:t>หัวใจ RED; ทุกเทิร์นสุ่ม mycommand (0–100) → 1 ใน 5 ท่า</a:t>
-            </a:r>
-            <a:endParaRPr lang="en-US" sz="1100" dirty="0"/>
-          </a:p>
-          <a:p>
-            <a:pPr marL="165100" indent="-165100">
-              <a:lnSpc>
-                <a:spcPct val="100000"/>
-              </a:lnSpc>
-              <a:spcAft>
-                <a:spcPts val="400"/>
-              </a:spcAft>
-              <a:buSzPct val="100000"/>
-              <a:buChar char="•"/>
-            </a:pPr>
-            <a:r>
-              <a:rPr lang="en-US" sz="1100" dirty="0">
-                <a:solidFill>
-                  <a:srgbClr val="FFFFFF"/>
-                </a:solidFill>
-                <a:latin typeface="Calibri" pitchFamily="34" charset="0"/>
-                <a:ea typeface="Calibri" pitchFamily="34" charset="-122"/>
-                <a:cs typeface="Calibri" pitchFamily="34" charset="-120"/>
-              </a:rPr>
-              <a:t>fire helix / mini-helix / helix โปร่ง ในกล่องสูง (border 7); มือกวาด 1–2 ข้างในกล่องเตี้ยกว้าง (border 6)</a:t>
-            </a:r>
-            <a:endParaRPr lang="en-US" sz="1100" dirty="0"/>
-          </a:p>
-          <a:p>
-            <a:pPr marL="165100" indent="-165100">
-              <a:lnSpc>
-                <a:spcPct val="100000"/>
-              </a:lnSpc>
-              <a:spcAft>
-                <a:spcPts val="400"/>
-              </a:spcAft>
-              <a:buSzPct val="100000"/>
-              <a:buChar char="•"/>
-            </a:pPr>
-            <a:r>
-              <a:rPr lang="en-US" sz="1100" dirty="0">
-                <a:solidFill>
-                  <a:srgbClr val="FFFFFF"/>
-                </a:solidFill>
-                <a:latin typeface="Calibri" pitchFamily="34" charset="0"/>
-                <a:ea typeface="Calibri" pitchFamily="34" charset="-122"/>
-                <a:cs typeface="Calibri" pitchFamily="34" charset="-120"/>
-              </a:rPr>
-              <a:t>มือปล่อยไฟตามเป้า (chase-fire) — ภัยหลักเมื่อตัด Faltering ออก; เสาไฟไซน์เลื่อนซ้าย↔ขวา ไม่มีจุดปลอดภัย</a:t>
-            </a:r>
-            <a:endParaRPr lang="en-US" sz="1100" dirty="0"/>
-          </a:p>
-        </p:txBody>
-      </p:sp>
-      <p:sp>
-        <p:nvSpPr>
-          <p:cNvPr id="8" name="Shape 6"/>
-          <p:cNvSpPr/>
-          <p:nvPr/>
-        </p:nvSpPr>
-        <p:spPr>
-          <a:xfrm>
-            <a:off x="548640" y="4114800"/>
-            <a:ext cx="5532120" cy="2057400"/>
-          </a:xfrm>
-          <a:prstGeom prst="roundRect">
-            <a:avLst>
-              <a:gd name="adj" fmla="val 3111"/>
-            </a:avLst>
-          </a:prstGeom>
-          <a:solidFill>
-            <a:srgbClr val="16181D"/>
-          </a:solidFill>
-          <a:ln w="12700">
-            <a:solidFill>
-              <a:srgbClr val="FF922B">
-                <a:alpha val="65000"/>
-              </a:srgbClr>
-            </a:solidFill>
-            <a:prstDash val="solid"/>
-          </a:ln>
-          <a:effectLst>
-            <a:outerShdw sx="100000" sy="100000" kx="0" ky="0" algn="bl" rotWithShape="0" blurRad="101600" dist="38100" dir="5400000">
-              <a:srgbClr val="000000">
-                <a:alpha val="50000"/>
-              </a:srgbClr>
-            </a:outerShdw>
-          </a:effectLst>
-        </p:spPr>
-      </p:sp>
-      <p:sp>
-        <p:nvSpPr>
-          <p:cNvPr id="9" name="Text 7"/>
-          <p:cNvSpPr/>
-          <p:nvPr/>
-        </p:nvSpPr>
-        <p:spPr>
-          <a:xfrm>
-            <a:off x="731520" y="4224528"/>
-            <a:ext cx="5166360" cy="329184"/>
-          </a:xfrm>
-          <a:prstGeom prst="rect">
-            <a:avLst/>
-          </a:prstGeom>
-          <a:noFill/>
-          <a:ln/>
-        </p:spPr>
-        <p:txBody>
-          <a:bodyPr wrap="square" lIns="0" tIns="0" rIns="0" bIns="0" rtlCol="0" anchor="ctr"/>
-          <a:lstStyle/>
-          <a:p>
-            <a:pPr indent="0" marL="0">
-              <a:buNone/>
-            </a:pPr>
-            <a:r>
-              <a:rPr lang="en-US" sz="1350" b="1" dirty="0">
-                <a:solidFill>
-                  <a:srgbClr val="FF922B"/>
-                </a:solidFill>
-                <a:latin typeface="Courier New" pitchFamily="34" charset="0"/>
-                <a:ea typeface="Courier New" pitchFamily="34" charset="-122"/>
-                <a:cs typeface="Courier New" pitchFamily="34" charset="-120"/>
-              </a:rPr>
-              <a:t>ทางออก 2 ทาง</a:t>
-            </a:r>
-            <a:endParaRPr lang="en-US" sz="1350" dirty="0"/>
-          </a:p>
-        </p:txBody>
-      </p:sp>
-      <p:sp>
-        <p:nvSpPr>
-          <p:cNvPr id="10" name="Text 8"/>
-          <p:cNvSpPr/>
-          <p:nvPr/>
-        </p:nvSpPr>
-        <p:spPr>
-          <a:xfrm>
-            <a:off x="731520" y="4617720"/>
-            <a:ext cx="5166360" cy="1453896"/>
-          </a:xfrm>
-          <a:prstGeom prst="rect">
-            <a:avLst/>
-          </a:prstGeom>
-          <a:noFill/>
-          <a:ln/>
-        </p:spPr>
-        <p:txBody>
-          <a:bodyPr wrap="square" lIns="0" tIns="0" rIns="0" bIns="0" rtlCol="0" anchor="t"/>
-          <a:lstStyle/>
-          <a:p>
-            <a:pPr marL="165100" indent="-165100">
-              <a:lnSpc>
-                <a:spcPct val="100000"/>
-              </a:lnSpc>
-              <a:spcAft>
-                <a:spcPts val="400"/>
-              </a:spcAft>
-              <a:buSzPct val="100000"/>
-              <a:buChar char="•"/>
-            </a:pPr>
-            <a:r>
-              <a:rPr lang="en-US" sz="1100" dirty="0">
-                <a:solidFill>
-                  <a:srgbClr val="FFFFFF"/>
-                </a:solidFill>
-                <a:latin typeface="Calibri" pitchFamily="34" charset="0"/>
-                <a:ea typeface="Calibri" pitchFamily="34" charset="-122"/>
-                <a:cs typeface="Calibri" pitchFamily="34" charset="-120"/>
-              </a:rPr>
-              <a:t>ฆ่า: HP ≤ 150 ทำให้ DEF ร่วงเป็น −140 — หมัดถัดไปมักฆ่าได้ (กับดักคลาสสิก) แล้วเล่นบทพูดตอนตาย</a:t>
-            </a:r>
-            <a:endParaRPr lang="en-US" sz="1100" dirty="0"/>
-          </a:p>
-          <a:p>
-            <a:pPr marL="165100" indent="-165100">
-              <a:lnSpc>
-                <a:spcPct val="100000"/>
-              </a:lnSpc>
-              <a:spcAft>
-                <a:spcPts val="400"/>
-              </a:spcAft>
-              <a:buSzPct val="100000"/>
-              <a:buChar char="•"/>
-            </a:pPr>
-            <a:r>
-              <a:rPr lang="en-US" sz="1100" dirty="0">
-                <a:solidFill>
-                  <a:srgbClr val="FFFFFF"/>
-                </a:solidFill>
-                <a:latin typeface="Calibri" pitchFamily="34" charset="0"/>
-                <a:ea typeface="Calibri" pitchFamily="34" charset="-122"/>
-                <a:cs typeface="Calibri" pitchFamily="34" charset="-120"/>
-              </a:rPr>
-              <a:t>ไว้ชีวิต: กดปุ่ม SPARE ไม่ได้ (mercymod −20000); ปฏิเสธจะสู้ ตัวนับ conversation จะไต่บทพูดเร่งเร้า</a:t>
-            </a:r>
-            <a:endParaRPr lang="en-US" sz="1100" dirty="0"/>
-          </a:p>
-          <a:p>
-            <a:pPr marL="165100" indent="-165100">
-              <a:lnSpc>
-                <a:spcPct val="100000"/>
-              </a:lnSpc>
-              <a:spcAft>
-                <a:spcPts val="400"/>
-              </a:spcAft>
-              <a:buSzPct val="100000"/>
-              <a:buChar char="•"/>
-            </a:pPr>
-            <a:r>
-              <a:rPr lang="en-US" sz="1100" dirty="0">
-                <a:solidFill>
-                  <a:srgbClr val="FFFFFF"/>
-                </a:solidFill>
-                <a:latin typeface="Calibri" pitchFamily="34" charset="0"/>
-                <a:ea typeface="Calibri" pitchFamily="34" charset="-122"/>
-                <a:cs typeface="Calibri" pitchFamily="34" charset="-120"/>
-              </a:rPr>
-              <a:t>ที่ conversation 13 เธอหยุดโจมตีและเล่นบทยอมแพ้ → ชนะด้วยความเมตตา</a:t>
-            </a:r>
-            <a:endParaRPr lang="en-US" sz="1100" dirty="0"/>
-          </a:p>
-        </p:txBody>
-      </p:sp>
-      <p:sp>
-        <p:nvSpPr>
-          <p:cNvPr id="11" name="Shape 9"/>
-          <p:cNvSpPr/>
-          <p:nvPr/>
-        </p:nvSpPr>
-        <p:spPr>
-          <a:xfrm>
-            <a:off x="6172200" y="2148840"/>
-            <a:ext cx="5440680" cy="4023360"/>
-          </a:xfrm>
-          <a:prstGeom prst="roundRect">
-            <a:avLst>
-              <a:gd name="adj" fmla="val 1591"/>
-            </a:avLst>
-          </a:prstGeom>
-          <a:solidFill>
-            <a:srgbClr val="16181D"/>
-          </a:solidFill>
-          <a:ln w="12700">
-            <a:solidFill>
-              <a:srgbClr val="5BE584">
-                <a:alpha val="65000"/>
-              </a:srgbClr>
-            </a:solidFill>
-            <a:prstDash val="solid"/>
-          </a:ln>
-          <a:effectLst>
-            <a:outerShdw sx="100000" sy="100000" kx="0" ky="0" algn="bl" rotWithShape="0" blurRad="101600" dist="38100" dir="5400000">
-              <a:srgbClr val="000000">
-                <a:alpha val="50000"/>
-              </a:srgbClr>
-            </a:outerShdw>
-          </a:effectLst>
-        </p:spPr>
-      </p:sp>
-      <p:sp>
-        <p:nvSpPr>
-          <p:cNvPr id="12" name="Text 10"/>
-          <p:cNvSpPr/>
-          <p:nvPr/>
-        </p:nvSpPr>
-        <p:spPr>
-          <a:xfrm>
-            <a:off x="6355080" y="2258568"/>
-            <a:ext cx="5074920" cy="329184"/>
-          </a:xfrm>
-          <a:prstGeom prst="rect">
-            <a:avLst/>
-          </a:prstGeom>
-          <a:noFill/>
-          <a:ln/>
-        </p:spPr>
-        <p:txBody>
-          <a:bodyPr wrap="square" lIns="0" tIns="0" rIns="0" bIns="0" rtlCol="0" anchor="ctr"/>
-          <a:lstStyle/>
-          <a:p>
-            <a:pPr indent="0" marL="0">
-              <a:buNone/>
-            </a:pPr>
-            <a:r>
-              <a:rPr lang="en-US" sz="1350" b="1" dirty="0">
-                <a:solidFill>
-                  <a:srgbClr val="5BE584"/>
-                </a:solidFill>
-                <a:latin typeface="Courier New" pitchFamily="34" charset="0"/>
-                <a:ea typeface="Courier New" pitchFamily="34" charset="-122"/>
-                <a:cs typeface="Courier New" pitchFamily="34" charset="-120"/>
-              </a:rPr>
-              <a:t>เมธอดที่ override / SPI</a:t>
-            </a:r>
-            <a:endParaRPr lang="en-US" sz="1350" dirty="0"/>
-          </a:p>
-        </p:txBody>
-      </p:sp>
-      <p:sp>
-        <p:nvSpPr>
-          <p:cNvPr id="13" name="Text 11"/>
-          <p:cNvSpPr/>
-          <p:nvPr/>
-        </p:nvSpPr>
-        <p:spPr>
-          <a:xfrm>
-            <a:off x="6355080" y="2651760"/>
-            <a:ext cx="5074920" cy="3419856"/>
-          </a:xfrm>
-          <a:prstGeom prst="rect">
-            <a:avLst/>
-          </a:prstGeom>
-          <a:noFill/>
-          <a:ln/>
-        </p:spPr>
-        <p:txBody>
-          <a:bodyPr wrap="square" lIns="0" tIns="0" rIns="0" bIns="0" rtlCol="0" anchor="t"/>
-          <a:lstStyle/>
-          <a:p>
-            <a:pPr marL="165100" indent="-165100">
-              <a:lnSpc>
-                <a:spcPct val="100000"/>
-              </a:lnSpc>
-              <a:spcAft>
-                <a:spcPts val="400"/>
-              </a:spcAft>
-              <a:buSzPct val="100000"/>
-              <a:buChar char="•"/>
-            </a:pPr>
-            <a:r>
-              <a:rPr lang="en-US" sz="1100" dirty="0">
-                <a:solidFill>
-                  <a:srgbClr val="FFFFFF"/>
-                </a:solidFill>
-                <a:latin typeface="Calibri" pitchFamily="34" charset="0"/>
-                <a:ea typeface="Calibri" pitchFamily="34" charset="-122"/>
-                <a:cs typeface="Calibri" pitchFamily="34" charset="-120"/>
-              </a:rPr>
-              <a:t>musicPath() — ธีม Heartache</a:t>
-            </a:r>
-            <a:endParaRPr lang="en-US" sz="1100" dirty="0"/>
-          </a:p>
-          <a:p>
-            <a:pPr marL="165100" indent="-165100">
-              <a:lnSpc>
-                <a:spcPct val="100000"/>
-              </a:lnSpc>
-              <a:spcAft>
-                <a:spcPts val="400"/>
-              </a:spcAft>
-              <a:buSzPct val="100000"/>
-              <a:buChar char="•"/>
-            </a:pPr>
-            <a:r>
-              <a:rPr lang="en-US" sz="1100" dirty="0">
-                <a:solidFill>
-                  <a:srgbClr val="FFFFFF"/>
-                </a:solidFill>
-                <a:latin typeface="Calibri" pitchFamily="34" charset="0"/>
-                <a:ea typeface="Calibri" pitchFamily="34" charset="-122"/>
-                <a:cs typeface="Calibri" pitchFamily="34" charset="-120"/>
-              </a:rPr>
-              <a:t>setup() — HP 440, หัวใจ RED, border 6, mercymod −20000</a:t>
-            </a:r>
-            <a:endParaRPr lang="en-US" sz="1100" dirty="0"/>
-          </a:p>
-          <a:p>
-            <a:pPr marL="165100" indent="-165100">
-              <a:lnSpc>
-                <a:spcPct val="100000"/>
-              </a:lnSpc>
-              <a:spcAft>
-                <a:spcPts val="400"/>
-              </a:spcAft>
-              <a:buSzPct val="100000"/>
-              <a:buChar char="•"/>
-            </a:pPr>
-            <a:r>
-              <a:rPr lang="en-US" sz="1100" dirty="0">
-                <a:solidFill>
-                  <a:srgbClr val="FFFFFF"/>
-                </a:solidFill>
-                <a:latin typeface="Calibri" pitchFamily="34" charset="0"/>
-                <a:ea typeface="Calibri" pitchFamily="34" charset="-122"/>
-                <a:cs typeface="Calibri" pitchFamily="34" charset="-120"/>
-              </a:rPr>
-              <a:t>chooseAttack() — สุ่ม mycommand, เลือกกล่อง + ท่า</a:t>
-            </a:r>
-            <a:endParaRPr lang="en-US" sz="1100" dirty="0"/>
-          </a:p>
-          <a:p>
-            <a:pPr marL="165100" indent="-165100">
-              <a:lnSpc>
-                <a:spcPct val="100000"/>
-              </a:lnSpc>
-              <a:spcAft>
-                <a:spcPts val="400"/>
-              </a:spcAft>
-              <a:buSzPct val="100000"/>
-              <a:buChar char="•"/>
-            </a:pPr>
-            <a:r>
-              <a:rPr lang="en-US" sz="1100" dirty="0">
-                <a:solidFill>
-                  <a:srgbClr val="FFFFFF"/>
-                </a:solidFill>
-                <a:latin typeface="Calibri" pitchFamily="34" charset="0"/>
-                <a:ea typeface="Calibri" pitchFamily="34" charset="-122"/>
-                <a:cs typeface="Calibri" pitchFamily="34" charset="-120"/>
-              </a:rPr>
-              <a:t>onDamaged() — สั่นตอนเจ็บ; HP ≤ 150 → DEF −140</a:t>
-            </a:r>
-            <a:endParaRPr lang="en-US" sz="1100" dirty="0"/>
-          </a:p>
-          <a:p>
-            <a:pPr marL="165100" indent="-165100">
-              <a:lnSpc>
-                <a:spcPct val="100000"/>
-              </a:lnSpc>
-              <a:spcAft>
-                <a:spcPts val="400"/>
-              </a:spcAft>
-              <a:buSzPct val="100000"/>
-              <a:buChar char="•"/>
-            </a:pPr>
-            <a:r>
-              <a:rPr lang="en-US" sz="1100" dirty="0">
-                <a:solidFill>
-                  <a:srgbClr val="FFFFFF"/>
-                </a:solidFill>
-                <a:latin typeface="Calibri" pitchFamily="34" charset="0"/>
-                <a:ea typeface="Calibri" pitchFamily="34" charset="-122"/>
-                <a:cs typeface="Calibri" pitchFamily="34" charset="-120"/>
-              </a:rPr>
-              <a:t>onAct() — Check / Talk (flavor; ใช้เทิร์นทั้งคู่)</a:t>
-            </a:r>
-            <a:endParaRPr lang="en-US" sz="1100" dirty="0"/>
-          </a:p>
-          <a:p>
-            <a:pPr marL="165100" indent="-165100">
-              <a:lnSpc>
-                <a:spcPct val="100000"/>
-              </a:lnSpc>
-              <a:spcAft>
-                <a:spcPts val="400"/>
-              </a:spcAft>
-              <a:buSzPct val="100000"/>
-              <a:buChar char="•"/>
-            </a:pPr>
-            <a:r>
-              <a:rPr lang="en-US" sz="1100" dirty="0">
-                <a:solidFill>
-                  <a:srgbClr val="FFFFFF"/>
-                </a:solidFill>
-                <a:latin typeface="Calibri" pitchFamily="34" charset="0"/>
-                <a:ea typeface="Calibri" pitchFamily="34" charset="-122"/>
-                <a:cs typeface="Calibri" pitchFamily="34" charset="-120"/>
-              </a:rPr>
-              <a:t>onDefeat() — คัตซีนบทพูดตอนตาย</a:t>
-            </a:r>
-            <a:endParaRPr lang="en-US" sz="1100" dirty="0"/>
-          </a:p>
-          <a:p>
-            <a:pPr marL="165100" indent="-165100">
-              <a:lnSpc>
-                <a:spcPct val="100000"/>
-              </a:lnSpc>
-              <a:spcAft>
-                <a:spcPts val="400"/>
-              </a:spcAft>
-              <a:buSzPct val="100000"/>
-              <a:buChar char="•"/>
-            </a:pPr>
-            <a:r>
-              <a:rPr lang="en-US" sz="1100" dirty="0">
-                <a:solidFill>
-                  <a:srgbClr val="FFFFFF"/>
-                </a:solidFill>
-                <a:latin typeface="Calibri" pitchFamily="34" charset="0"/>
-                <a:ea typeface="Calibri" pitchFamily="34" charset="-122"/>
-                <a:cs typeface="Calibri" pitchFamily="34" charset="-120"/>
-              </a:rPr>
-              <a:t>update() — ขับบทพูดยอมแพ้ / ตอนตาย</a:t>
-            </a:r>
-            <a:endParaRPr lang="en-US" sz="1100" dirty="0"/>
-          </a:p>
-          <a:p>
-            <a:pPr marL="165100" indent="-165100">
-              <a:lnSpc>
-                <a:spcPct val="100000"/>
-              </a:lnSpc>
-              <a:spcAft>
-                <a:spcPts val="400"/>
-              </a:spcAft>
-              <a:buSzPct val="100000"/>
-              <a:buChar char="•"/>
-            </a:pPr>
-            <a:r>
-              <a:rPr lang="en-US" sz="1100" dirty="0">
-                <a:solidFill>
-                  <a:srgbClr val="FFFFFF"/>
-                </a:solidFill>
-                <a:latin typeface="Calibri" pitchFamily="34" charset="0"/>
-                <a:ea typeface="Calibri" pitchFamily="34" charset="-122"/>
-                <a:cs typeface="Calibri" pitchFamily="34" charset="-120"/>
-              </a:rPr>
-              <a:t>render() — ตัว body (TorielBody) เป็นคนวาด</a:t>
-            </a:r>
-            <a:endParaRPr lang="en-US" sz="1100" dirty="0"/>
-          </a:p>
-          <a:p>
-            <a:pPr indent="0" marL="0">
-              <a:lnSpc>
-                <a:spcPct val="100000"/>
-              </a:lnSpc>
-              <a:buNone/>
-            </a:pPr>
-            <a:r>
-              <a:rPr lang="en-US" sz="1050" i="1" dirty="0">
-                <a:solidFill>
-                  <a:srgbClr val="FFD43B"/>
-                </a:solidFill>
-                <a:latin typeface="Calibri" pitchFamily="34" charset="0"/>
-                <a:ea typeface="Calibri" pitchFamily="34" charset="-122"/>
-                <a:cs typeface="Calibri" pitchFamily="34" charset="-120"/>
-              </a:rPr>
-              <a:t>GENOCIDE: murderlv ≥ 1 → DEF −9999, ฆ่าได้หมัดเดียว + บทพูดตอนตายแบบเย็นชา 'เกลียดฉันถึงขนาดนั้นเลยหรือ?'</a:t>
-            </a:r>
-            <a:endParaRPr lang="en-US" sz="1100" dirty="0"/>
-          </a:p>
-        </p:txBody>
-      </p:sp>
-      <p:sp>
-        <p:nvSpPr>
-          <p:cNvPr id="14" name="Text 12"/>
-          <p:cNvSpPr/>
-          <p:nvPr/>
-        </p:nvSpPr>
-        <p:spPr>
-          <a:xfrm>
-            <a:off x="548640" y="6382512"/>
-            <a:ext cx="11064240" cy="384048"/>
-          </a:xfrm>
-          <a:prstGeom prst="rect">
-            <a:avLst/>
-          </a:prstGeom>
-          <a:noFill/>
-          <a:ln/>
-        </p:spPr>
-        <p:txBody>
-          <a:bodyPr wrap="square" lIns="0" tIns="0" rIns="0" bIns="0" rtlCol="0" anchor="ctr"/>
-          <a:lstStyle/>
-          <a:p>
-            <a:pPr algn="ctr" indent="0" marL="0">
-              <a:buNone/>
-            </a:pPr>
-            <a:r>
-              <a:rPr lang="en-US" sz="1150" i="1" dirty="0">
-                <a:solidFill>
-                  <a:srgbClr val="FFD43B"/>
-                </a:solidFill>
-                <a:latin typeface="Courier New" pitchFamily="34" charset="0"/>
-                <a:ea typeface="Courier New" pitchFamily="34" charset="-122"/>
-                <a:cs typeface="Courier New" pitchFamily="34" charset="-120"/>
-              </a:rPr>
-              <a:t>438 บรรทัด — บอสตัวแรก · พอร์ต fire-helix + มือกวาดครบ · bullet/toriel (FireHelix · MiniHelix · ChaseFire · HandBullet) · เส้นทางไว้ชีวิตแบบปฏิเสธจะสู้</a:t>
-            </a:r>
-            <a:endParaRPr lang="en-US" sz="1150" dirty="0"/>
           </a:p>
         </p:txBody>
       </p:sp>
@@ -17246,6 +18521,10 @@
             </a:outerShdw>
           </a:effectLst>
         </p:spPr>
+        <p:txBody>
+          <a:bodyPr/>
+          <a:p/>
+        </p:txBody>
       </p:sp>
       <p:sp>
         <p:nvSpPr>
@@ -17551,6 +18830,10 @@
             </a:outerShdw>
           </a:effectLst>
         </p:spPr>
+        <p:txBody>
+          <a:bodyPr/>
+          <a:p/>
+        </p:txBody>
       </p:sp>
       <p:sp>
         <p:nvSpPr>
@@ -17880,6 +19163,10 @@
             </a:outerShdw>
           </a:effectLst>
         </p:spPr>
+        <p:txBody>
+          <a:bodyPr/>
+          <a:p/>
+        </p:txBody>
       </p:sp>
       <p:sp>
         <p:nvSpPr>
@@ -18334,6 +19621,10 @@
             </a:outerShdw>
           </a:effectLst>
         </p:spPr>
+        <p:txBody>
+          <a:bodyPr/>
+          <a:p/>
+        </p:txBody>
       </p:sp>
       <p:sp>
         <p:nvSpPr>
@@ -18503,6 +19794,10 @@
             </a:outerShdw>
           </a:effectLst>
         </p:spPr>
+        <p:txBody>
+          <a:bodyPr/>
+          <a:p/>
+        </p:txBody>
       </p:sp>
       <p:sp>
         <p:nvSpPr>
@@ -18672,6 +19967,10 @@
             </a:outerShdw>
           </a:effectLst>
         </p:spPr>
+        <p:txBody>
+          <a:bodyPr/>
+          <a:p/>
+        </p:txBody>
       </p:sp>
       <p:sp>
         <p:nvSpPr>
@@ -18841,6 +20140,10 @@
             </a:outerShdw>
           </a:effectLst>
         </p:spPr>
+        <p:txBody>
+          <a:bodyPr/>
+          <a:p/>
+        </p:txBody>
       </p:sp>
       <p:sp>
         <p:nvSpPr>
@@ -19034,6 +20337,10 @@
             </a:outerShdw>
           </a:effectLst>
         </p:spPr>
+        <p:txBody>
+          <a:bodyPr/>
+          <a:p/>
+        </p:txBody>
       </p:sp>
       <p:sp>
         <p:nvSpPr>
@@ -19393,6 +20700,10 @@
             </a:outerShdw>
           </a:effectLst>
         </p:spPr>
+        <p:txBody>
+          <a:bodyPr/>
+          <a:p/>
+        </p:txBody>
       </p:sp>
       <p:sp>
         <p:nvSpPr>
@@ -19550,6 +20861,10 @@
             </a:outerShdw>
           </a:effectLst>
         </p:spPr>
+        <p:txBody>
+          <a:bodyPr/>
+          <a:p/>
+        </p:txBody>
       </p:sp>
       <p:sp>
         <p:nvSpPr>
@@ -19707,6 +21022,10 @@
             </a:outerShdw>
           </a:effectLst>
         </p:spPr>
+        <p:txBody>
+          <a:bodyPr/>
+          <a:p/>
+        </p:txBody>
       </p:sp>
       <p:sp>
         <p:nvSpPr>
@@ -19864,6 +21183,10 @@
             </a:outerShdw>
           </a:effectLst>
         </p:spPr>
+        <p:txBody>
+          <a:bodyPr/>
+          <a:p/>
+        </p:txBody>
       </p:sp>
       <p:sp>
         <p:nvSpPr>
@@ -20021,6 +21344,10 @@
             </a:outerShdw>
           </a:effectLst>
         </p:spPr>
+        <p:txBody>
+          <a:bodyPr/>
+          <a:p/>
+        </p:txBody>
       </p:sp>
       <p:sp>
         <p:nvSpPr>
@@ -20178,6 +21505,10 @@
             </a:outerShdw>
           </a:effectLst>
         </p:spPr>
+        <p:txBody>
+          <a:bodyPr/>
+          <a:p/>
+        </p:txBody>
       </p:sp>
       <p:sp>
         <p:nvSpPr>
@@ -20516,6 +21847,10 @@
             <a:prstDash val="solid"/>
           </a:ln>
         </p:spPr>
+        <p:txBody>
+          <a:bodyPr/>
+          <a:p/>
+        </p:txBody>
       </p:sp>
       <p:sp>
         <p:nvSpPr>
@@ -20538,6 +21873,10 @@
           </a:solidFill>
           <a:ln/>
         </p:spPr>
+        <p:txBody>
+          <a:bodyPr/>
+          <a:p/>
+        </p:txBody>
       </p:sp>
       <p:sp>
         <p:nvSpPr>
@@ -20684,6 +22023,10 @@
             <a:prstDash val="solid"/>
           </a:ln>
         </p:spPr>
+        <p:txBody>
+          <a:bodyPr/>
+          <a:p/>
+        </p:txBody>
       </p:sp>
       <p:sp>
         <p:nvSpPr>
@@ -20706,6 +22049,10 @@
           </a:solidFill>
           <a:ln/>
         </p:spPr>
+        <p:txBody>
+          <a:bodyPr/>
+          <a:p/>
+        </p:txBody>
       </p:sp>
       <p:sp>
         <p:nvSpPr>
@@ -20852,6 +22199,10 @@
             <a:prstDash val="solid"/>
           </a:ln>
         </p:spPr>
+        <p:txBody>
+          <a:bodyPr/>
+          <a:p/>
+        </p:txBody>
       </p:sp>
       <p:sp>
         <p:nvSpPr>
@@ -20874,6 +22225,10 @@
           </a:solidFill>
           <a:ln/>
         </p:spPr>
+        <p:txBody>
+          <a:bodyPr/>
+          <a:p/>
+        </p:txBody>
       </p:sp>
       <p:sp>
         <p:nvSpPr>
@@ -21020,6 +22375,10 @@
             <a:prstDash val="solid"/>
           </a:ln>
         </p:spPr>
+        <p:txBody>
+          <a:bodyPr/>
+          <a:p/>
+        </p:txBody>
       </p:sp>
       <p:sp>
         <p:nvSpPr>
@@ -21042,6 +22401,10 @@
           </a:solidFill>
           <a:ln/>
         </p:spPr>
+        <p:txBody>
+          <a:bodyPr/>
+          <a:p/>
+        </p:txBody>
       </p:sp>
       <p:sp>
         <p:nvSpPr>
@@ -21188,6 +22551,10 @@
             <a:prstDash val="solid"/>
           </a:ln>
         </p:spPr>
+        <p:txBody>
+          <a:bodyPr/>
+          <a:p/>
+        </p:txBody>
       </p:sp>
       <p:sp>
         <p:nvSpPr>
@@ -21210,6 +22577,10 @@
           </a:solidFill>
           <a:ln/>
         </p:spPr>
+        <p:txBody>
+          <a:bodyPr/>
+          <a:p/>
+        </p:txBody>
       </p:sp>
       <p:sp>
         <p:nvSpPr>
@@ -21356,6 +22727,10 @@
             <a:prstDash val="solid"/>
           </a:ln>
         </p:spPr>
+        <p:txBody>
+          <a:bodyPr/>
+          <a:p/>
+        </p:txBody>
       </p:sp>
       <p:sp>
         <p:nvSpPr>
@@ -21378,6 +22753,10 @@
           </a:solidFill>
           <a:ln/>
         </p:spPr>
+        <p:txBody>
+          <a:bodyPr/>
+          <a:p/>
+        </p:txBody>
       </p:sp>
       <p:sp>
         <p:nvSpPr>
@@ -21531,6 +22910,10 @@
             </a:outerShdw>
           </a:effectLst>
         </p:spPr>
+        <p:txBody>
+          <a:bodyPr/>
+          <a:p/>
+        </p:txBody>
       </p:sp>
       <p:sp>
         <p:nvSpPr>
@@ -21741,6 +23124,10 @@
             <a:prstDash val="solid"/>
           </a:ln>
         </p:spPr>
+        <p:txBody>
+          <a:bodyPr/>
+          <a:p/>
+        </p:txBody>
       </p:sp>
       <p:sp>
         <p:nvSpPr>
@@ -22001,6 +23388,10 @@
             <a:prstDash val="solid"/>
           </a:ln>
         </p:spPr>
+        <p:txBody>
+          <a:bodyPr/>
+          <a:p/>
+        </p:txBody>
       </p:sp>
       <p:sp>
         <p:nvSpPr>
@@ -22026,6 +23417,10 @@
             <a:prstDash val="solid"/>
           </a:ln>
         </p:spPr>
+        <p:txBody>
+          <a:bodyPr/>
+          <a:p/>
+        </p:txBody>
       </p:sp>
       <p:sp>
         <p:nvSpPr>
@@ -22051,6 +23446,10 @@
             <a:prstDash val="solid"/>
           </a:ln>
         </p:spPr>
+        <p:txBody>
+          <a:bodyPr/>
+          <a:p/>
+        </p:txBody>
       </p:sp>
       <p:sp>
         <p:nvSpPr>
@@ -22076,6 +23475,10 @@
             <a:prstDash val="solid"/>
           </a:ln>
         </p:spPr>
+        <p:txBody>
+          <a:bodyPr/>
+          <a:p/>
+        </p:txBody>
       </p:sp>
       <p:sp>
         <p:nvSpPr>
@@ -22222,6 +23625,10 @@
             <a:prstDash val="solid"/>
           </a:ln>
         </p:spPr>
+        <p:txBody>
+          <a:bodyPr/>
+          <a:p/>
+        </p:txBody>
       </p:sp>
       <p:sp>
         <p:nvSpPr>
@@ -22247,6 +23654,10 @@
             <a:prstDash val="solid"/>
           </a:ln>
         </p:spPr>
+        <p:txBody>
+          <a:bodyPr/>
+          <a:p/>
+        </p:txBody>
       </p:sp>
       <p:sp>
         <p:nvSpPr>
@@ -22272,6 +23683,10 @@
             <a:prstDash val="solid"/>
           </a:ln>
         </p:spPr>
+        <p:txBody>
+          <a:bodyPr/>
+          <a:p/>
+        </p:txBody>
       </p:sp>
       <p:sp>
         <p:nvSpPr>
@@ -22297,6 +23712,10 @@
             <a:prstDash val="solid"/>
           </a:ln>
         </p:spPr>
+        <p:txBody>
+          <a:bodyPr/>
+          <a:p/>
+        </p:txBody>
       </p:sp>
       <p:sp>
         <p:nvSpPr>
@@ -22443,6 +23862,10 @@
             <a:prstDash val="solid"/>
           </a:ln>
         </p:spPr>
+        <p:txBody>
+          <a:bodyPr/>
+          <a:p/>
+        </p:txBody>
       </p:sp>
       <p:sp>
         <p:nvSpPr>
@@ -22468,6 +23891,10 @@
             <a:prstDash val="solid"/>
           </a:ln>
         </p:spPr>
+        <p:txBody>
+          <a:bodyPr/>
+          <a:p/>
+        </p:txBody>
       </p:sp>
       <p:sp>
         <p:nvSpPr>
@@ -22493,6 +23920,10 @@
             <a:prstDash val="solid"/>
           </a:ln>
         </p:spPr>
+        <p:txBody>
+          <a:bodyPr/>
+          <a:p/>
+        </p:txBody>
       </p:sp>
       <p:sp>
         <p:nvSpPr>
@@ -22518,6 +23949,10 @@
             <a:prstDash val="solid"/>
           </a:ln>
         </p:spPr>
+        <p:txBody>
+          <a:bodyPr/>
+          <a:p/>
+        </p:txBody>
       </p:sp>
       <p:sp>
         <p:nvSpPr>
@@ -22664,6 +24099,10 @@
             <a:prstDash val="solid"/>
           </a:ln>
         </p:spPr>
+        <p:txBody>
+          <a:bodyPr/>
+          <a:p/>
+        </p:txBody>
       </p:sp>
       <p:sp>
         <p:nvSpPr>
@@ -22689,6 +24128,10 @@
             <a:prstDash val="solid"/>
           </a:ln>
         </p:spPr>
+        <p:txBody>
+          <a:bodyPr/>
+          <a:p/>
+        </p:txBody>
       </p:sp>
       <p:sp>
         <p:nvSpPr>
@@ -22714,6 +24157,10 @@
             <a:prstDash val="solid"/>
           </a:ln>
         </p:spPr>
+        <p:txBody>
+          <a:bodyPr/>
+          <a:p/>
+        </p:txBody>
       </p:sp>
       <p:sp>
         <p:nvSpPr>
@@ -22739,6 +24186,10 @@
             <a:prstDash val="solid"/>
           </a:ln>
         </p:spPr>
+        <p:txBody>
+          <a:bodyPr/>
+          <a:p/>
+        </p:txBody>
       </p:sp>
       <p:sp>
         <p:nvSpPr>
@@ -22885,6 +24336,10 @@
             <a:prstDash val="solid"/>
           </a:ln>
         </p:spPr>
+        <p:txBody>
+          <a:bodyPr/>
+          <a:p/>
+        </p:txBody>
       </p:sp>
       <p:sp>
         <p:nvSpPr>
@@ -22910,6 +24365,10 @@
             <a:prstDash val="solid"/>
           </a:ln>
         </p:spPr>
+        <p:txBody>
+          <a:bodyPr/>
+          <a:p/>
+        </p:txBody>
       </p:sp>
       <p:sp>
         <p:nvSpPr>
@@ -22935,6 +24394,10 @@
             <a:prstDash val="solid"/>
           </a:ln>
         </p:spPr>
+        <p:txBody>
+          <a:bodyPr/>
+          <a:p/>
+        </p:txBody>
       </p:sp>
       <p:sp>
         <p:nvSpPr>
@@ -22960,6 +24423,10 @@
             <a:prstDash val="solid"/>
           </a:ln>
         </p:spPr>
+        <p:txBody>
+          <a:bodyPr/>
+          <a:p/>
+        </p:txBody>
       </p:sp>
       <p:sp>
         <p:nvSpPr>
@@ -23113,6 +24580,10 @@
             </a:outerShdw>
           </a:effectLst>
         </p:spPr>
+        <p:txBody>
+          <a:bodyPr/>
+          <a:p/>
+        </p:txBody>
       </p:sp>
       <p:sp>
         <p:nvSpPr>
@@ -23306,6 +24777,10 @@
             </a:outerShdw>
           </a:effectLst>
         </p:spPr>
+        <p:txBody>
+          <a:bodyPr/>
+          <a:p/>
+        </p:txBody>
       </p:sp>
       <p:sp>
         <p:nvSpPr>
@@ -23648,6 +25123,10 @@
             </a:outerShdw>
           </a:effectLst>
         </p:spPr>
+        <p:txBody>
+          <a:bodyPr/>
+          <a:p/>
+        </p:txBody>
       </p:sp>
       <p:sp>
         <p:nvSpPr>
@@ -23957,6 +25436,10 @@
             </a:outerShdw>
           </a:effectLst>
         </p:spPr>
+        <p:txBody>
+          <a:bodyPr/>
+          <a:p/>
+        </p:txBody>
       </p:sp>
       <p:sp>
         <p:nvSpPr>
@@ -24435,6 +25918,10 @@
             </a:outerShdw>
           </a:effectLst>
         </p:spPr>
+        <p:txBody>
+          <a:bodyPr/>
+          <a:p/>
+        </p:txBody>
       </p:sp>
       <p:sp>
         <p:nvSpPr>
@@ -24712,6 +26199,10 @@
             </a:outerShdw>
           </a:effectLst>
         </p:spPr>
+        <p:txBody>
+          <a:bodyPr/>
+          <a:p/>
+        </p:txBody>
       </p:sp>
       <p:sp>
         <p:nvSpPr>
@@ -25001,6 +26492,10 @@
             </a:outerShdw>
           </a:effectLst>
         </p:spPr>
+        <p:txBody>
+          <a:bodyPr/>
+          <a:p/>
+        </p:txBody>
       </p:sp>
       <p:sp>
         <p:nvSpPr>
